--- a/docs/営業改革_STO立ち上げ_山本会長共有資料.pptx
+++ b/docs/営業改革_STO立ち上げ_山本会長共有資料.pptx
@@ -15,6 +15,8 @@
     <p:sldId id="263" r:id="rId14"/>
     <p:sldId id="264" r:id="rId15"/>
     <p:sldId id="265" r:id="rId16"/>
+    <p:sldId id="266" r:id="rId17"/>
+    <p:sldId id="267" r:id="rId18"/>
   </p:sldIdLst>
   <p:sldSz cx="12191695" cy="6858000" type="screen4x3"/>
   <p:notesSz cx="6858000" cy="9144000"/>
@@ -3398,7 +3400,7 @@
                 <a:ea typeface="Yu Gothic"/>
                 <a:cs typeface="Yu Gothic"/>
               </a:rPr>
-              <a:t>立ち上げの道筋と会長へのお願い</a:t>
+              <a:t>部長フィードバック ①</a:t>
             </a:r>
           </a:p>
         </p:txBody>
@@ -3439,7 +3441,7 @@
                 <a:ea typeface="Yu Gothic"/>
                 <a:cs typeface="Yu Gothic"/>
               </a:rPr>
-              <a:t>小さく発足し、90日で解散できる状態へ</a:t>
+              <a:t>部長フィードバック37件 — 全部門が当事者として応答</a:t>
             </a:r>
           </a:p>
         </p:txBody>
@@ -3496,8 +3498,137 @@
         </p:nvSpPr>
         <p:spPr>
           <a:xfrm>
-            <a:off x="502920" y="1920240"/>
-            <a:ext cx="3456432" cy="932688"/>
+            <a:off x="502920" y="1627632"/>
+            <a:ext cx="11183112" cy="438912"/>
+          </a:xfrm>
+          <a:prstGeom prst="rect">
+            <a:avLst/>
+          </a:prstGeom>
+          <a:solidFill>
+            <a:srgbClr val="F3EFFB"/>
+          </a:solidFill>
+          <a:ln>
+            <a:noFill/>
+          </a:ln>
+          <a:effectLst/>
+        </p:spPr>
+        <p:style>
+          <a:lnRef idx="1">
+            <a:schemeClr val="accent1"/>
+          </a:lnRef>
+          <a:fillRef idx="3">
+            <a:schemeClr val="accent1"/>
+          </a:fillRef>
+          <a:effectRef idx="2">
+            <a:schemeClr val="accent1"/>
+          </a:effectRef>
+          <a:fontRef idx="minor">
+            <a:schemeClr val="lt1"/>
+          </a:fontRef>
+        </p:style>
+        <p:txBody>
+          <a:bodyPr rtlCol="0" anchor="ctr"/>
+          <a:lstStyle/>
+          <a:p>
+            <a:pPr algn="ctr"/>
+          </a:p>
+        </p:txBody>
+      </p:sp>
+      <p:sp>
+        <p:nvSpPr>
+          <p:cNvPr id="6" name="Rectangle 5"/>
+          <p:cNvSpPr/>
+          <p:nvPr/>
+        </p:nvSpPr>
+        <p:spPr>
+          <a:xfrm>
+            <a:off x="502920" y="1627632"/>
+            <a:ext cx="38100" cy="438912"/>
+          </a:xfrm>
+          <a:prstGeom prst="rect">
+            <a:avLst/>
+          </a:prstGeom>
+          <a:solidFill>
+            <a:srgbClr val="7823DC"/>
+          </a:solidFill>
+          <a:ln>
+            <a:noFill/>
+          </a:ln>
+          <a:effectLst/>
+        </p:spPr>
+        <p:style>
+          <a:lnRef idx="1">
+            <a:schemeClr val="accent1"/>
+          </a:lnRef>
+          <a:fillRef idx="3">
+            <a:schemeClr val="accent1"/>
+          </a:fillRef>
+          <a:effectRef idx="2">
+            <a:schemeClr val="accent1"/>
+          </a:effectRef>
+          <a:fontRef idx="minor">
+            <a:schemeClr val="lt1"/>
+          </a:fontRef>
+        </p:style>
+        <p:txBody>
+          <a:bodyPr rtlCol="0" anchor="ctr"/>
+          <a:lstStyle/>
+          <a:p>
+            <a:pPr algn="ctr"/>
+          </a:p>
+        </p:txBody>
+      </p:sp>
+      <p:sp>
+        <p:nvSpPr>
+          <p:cNvPr id="7" name="TextBox 6"/>
+          <p:cNvSpPr txBox="1"/>
+          <p:nvPr/>
+        </p:nvSpPr>
+        <p:spPr>
+          <a:xfrm>
+            <a:off x="731520" y="1627632"/>
+            <a:ext cx="10744200" cy="438912"/>
+          </a:xfrm>
+          <a:prstGeom prst="rect">
+            <a:avLst/>
+          </a:prstGeom>
+          <a:noFill/>
+        </p:spPr>
+        <p:txBody>
+          <a:bodyPr wrap="square" lIns="0" rIns="0" tIns="0" bIns="0" anchor="ctr">
+            <a:spAutoFit/>
+          </a:bodyPr>
+          <a:lstStyle/>
+          <a:p>
+            <a:pPr algn="l">
+              <a:spcAft>
+                <a:spcPts val="0"/>
+              </a:spcAft>
+            </a:pPr>
+            <a:r>
+              <a:rPr sz="1100" b="1" i="0">
+                <a:solidFill>
+                  <a:srgbClr val="3A106E"/>
+                </a:solidFill>
+                <a:latin typeface="Yu Gothic"/>
+                <a:ea typeface="Yu Gothic"/>
+                <a:cs typeface="Yu Gothic"/>
+              </a:rPr>
+              <a:t>11部門・37件。反対ではなく「共に設計したい」という提案が大勢です（全件に回答済み）</a:t>
+            </a:r>
+          </a:p>
+        </p:txBody>
+      </p:sp>
+      <p:sp>
+        <p:nvSpPr>
+          <p:cNvPr id="8" name="Rectangle 7"/>
+          <p:cNvSpPr/>
+          <p:nvPr/>
+        </p:nvSpPr>
+        <p:spPr>
+          <a:xfrm>
+            <a:off x="502920" y="2212848"/>
+            <a:ext cx="11183112" cy="749808"/>
           </a:xfrm>
           <a:prstGeom prst="rect">
             <a:avLst/>
@@ -3536,14 +3667,14 @@
       </p:sp>
       <p:sp>
         <p:nvSpPr>
-          <p:cNvPr id="6" name="Rectangle 5"/>
+          <p:cNvPr id="9" name="Rectangle 8"/>
           <p:cNvSpPr/>
           <p:nvPr/>
         </p:nvSpPr>
         <p:spPr>
           <a:xfrm>
-            <a:off x="502920" y="1920240"/>
-            <a:ext cx="3456432" cy="384048"/>
+            <a:off x="502920" y="2212848"/>
+            <a:ext cx="64008" cy="749808"/>
           </a:xfrm>
           <a:prstGeom prst="rect">
             <a:avLst/>
@@ -3580,14 +3711,14 @@
       </p:sp>
       <p:sp>
         <p:nvSpPr>
-          <p:cNvPr id="7" name="TextBox 6"/>
+          <p:cNvPr id="10" name="TextBox 9"/>
           <p:cNvSpPr txBox="1"/>
           <p:nvPr/>
         </p:nvSpPr>
         <p:spPr>
           <a:xfrm>
-            <a:off x="502920" y="1965960"/>
-            <a:ext cx="3456432" cy="310896"/>
+            <a:off x="740664" y="2267712"/>
+            <a:ext cx="2395728" cy="640080"/>
           </a:xfrm>
           <a:prstGeom prst="rect">
             <a:avLst/>
@@ -3600,82 +3731,59 @@
           </a:bodyPr>
           <a:lstStyle/>
           <a:p>
-            <a:pPr algn="ctr">
+            <a:pPr algn="l">
+              <a:spcAft>
+                <a:spcPts val="100"/>
+              </a:spcAft>
+            </a:pPr>
+            <a:r>
+              <a:rPr sz="1100" b="1" i="0">
+                <a:solidFill>
+                  <a:srgbClr val="3A106E"/>
+                </a:solidFill>
+                <a:latin typeface="Yu Gothic"/>
+                <a:ea typeface="Yu Gothic"/>
+                <a:cs typeface="Yu Gothic"/>
+              </a:rPr>
+              <a:t>橋本部長</a:t>
+            </a:r>
+          </a:p>
+          <a:p>
+            <a:pPr algn="l">
               <a:spcAft>
                 <a:spcPts val="0"/>
               </a:spcAft>
             </a:pPr>
             <a:r>
-              <a:rPr sz="1400" b="1" i="0">
-                <a:solidFill>
-                  <a:srgbClr val="FFFFFF"/>
+              <a:rPr sz="850" b="1" i="0">
+                <a:solidFill>
+                  <a:srgbClr val="7823DC"/>
                 </a:solidFill>
                 <a:latin typeface="Yu Gothic"/>
                 <a:ea typeface="Yu Gothic"/>
                 <a:cs typeface="Yu Gothic"/>
               </a:rPr>
-              <a:t>今週</a:t>
-            </a:r>
-          </a:p>
-        </p:txBody>
-      </p:sp>
-      <p:sp>
-        <p:nvSpPr>
-          <p:cNvPr id="8" name="TextBox 7"/>
-          <p:cNvSpPr txBox="1"/>
-          <p:nvPr/>
-        </p:nvSpPr>
-        <p:spPr>
-          <a:xfrm>
-            <a:off x="649224" y="2377440"/>
-            <a:ext cx="3163824" cy="438912"/>
-          </a:xfrm>
-          <a:prstGeom prst="rect">
-            <a:avLst/>
-          </a:prstGeom>
-          <a:noFill/>
-        </p:spPr>
-        <p:txBody>
-          <a:bodyPr wrap="square" lIns="0" rIns="0" tIns="0" bIns="0" anchor="ctr">
-            <a:spAutoFit/>
-          </a:bodyPr>
-          <a:lstStyle/>
-          <a:p>
-            <a:pPr algn="ctr">
-              <a:spcAft>
-                <a:spcPts val="0"/>
-              </a:spcAft>
-            </a:pPr>
-            <a:r>
-              <a:rPr sz="1050" b="1" i="0">
-                <a:solidFill>
-                  <a:srgbClr val="262630"/>
-                </a:solidFill>
-                <a:latin typeface="Yu Gothic"/>
-                <a:ea typeface="Yu Gothic"/>
-                <a:cs typeface="Yu Gothic"/>
-              </a:rPr>
-              <a:t>専任化の部門長合意・発足通知</a:t>
-            </a:r>
-          </a:p>
-        </p:txBody>
-      </p:sp>
-      <p:sp>
-        <p:nvSpPr>
-          <p:cNvPr id="9" name="Right Arrow 8"/>
+              <a:t>TFEI</a:t>
+            </a:r>
+          </a:p>
+        </p:txBody>
+      </p:sp>
+      <p:sp>
+        <p:nvSpPr>
+          <p:cNvPr id="11" name="Rectangle 10"/>
           <p:cNvSpPr/>
           <p:nvPr/>
         </p:nvSpPr>
         <p:spPr>
           <a:xfrm>
-            <a:off x="3995928" y="2267712"/>
-            <a:ext cx="256032" cy="237744"/>
-          </a:xfrm>
-          <a:prstGeom prst="rightArrow">
+            <a:off x="3300984" y="2340864"/>
+            <a:ext cx="12700" cy="493776"/>
+          </a:xfrm>
+          <a:prstGeom prst="rect">
             <a:avLst/>
           </a:prstGeom>
           <a:solidFill>
-            <a:srgbClr val="7823DC"/>
+            <a:srgbClr val="D9D9E0"/>
           </a:solidFill>
           <a:ln>
             <a:noFill/>
@@ -3706,14 +3814,55 @@
       </p:sp>
       <p:sp>
         <p:nvSpPr>
-          <p:cNvPr id="10" name="Rectangle 9"/>
+          <p:cNvPr id="12" name="TextBox 11"/>
+          <p:cNvSpPr txBox="1"/>
+          <p:nvPr/>
+        </p:nvSpPr>
+        <p:spPr>
+          <a:xfrm>
+            <a:off x="3502152" y="2267712"/>
+            <a:ext cx="7982712" cy="640080"/>
+          </a:xfrm>
+          <a:prstGeom prst="rect">
+            <a:avLst/>
+          </a:prstGeom>
+          <a:noFill/>
+        </p:spPr>
+        <p:txBody>
+          <a:bodyPr wrap="square" lIns="0" rIns="0" tIns="0" bIns="0" anchor="ctr">
+            <a:spAutoFit/>
+          </a:bodyPr>
+          <a:lstStyle/>
+          <a:p>
+            <a:pPr algn="l">
+              <a:spcAft>
+                <a:spcPts val="0"/>
+              </a:spcAft>
+            </a:pPr>
+            <a:r>
+              <a:rPr sz="1050" b="0" i="0">
+                <a:solidFill>
+                  <a:srgbClr val="262630"/>
+                </a:solidFill>
+                <a:latin typeface="Yu Gothic"/>
+                <a:ea typeface="Yu Gothic"/>
+                <a:cs typeface="Yu Gothic"/>
+              </a:rPr>
+              <a:t>「案件成立からクロージングまで採番制で一気通貫管理を。担当が変わっても質が落ちない仕組みに」</a:t>
+            </a:r>
+          </a:p>
+        </p:txBody>
+      </p:sp>
+      <p:sp>
+        <p:nvSpPr>
+          <p:cNvPr id="13" name="Rectangle 12"/>
           <p:cNvSpPr/>
           <p:nvPr/>
         </p:nvSpPr>
         <p:spPr>
           <a:xfrm>
-            <a:off x="4288536" y="1920240"/>
-            <a:ext cx="3456432" cy="932688"/>
+            <a:off x="502920" y="3049524"/>
+            <a:ext cx="11183112" cy="749808"/>
           </a:xfrm>
           <a:prstGeom prst="rect">
             <a:avLst/>
@@ -3752,14 +3901,14 @@
       </p:sp>
       <p:sp>
         <p:nvSpPr>
-          <p:cNvPr id="11" name="Rectangle 10"/>
+          <p:cNvPr id="14" name="Rectangle 13"/>
           <p:cNvSpPr/>
           <p:nvPr/>
         </p:nvSpPr>
         <p:spPr>
           <a:xfrm>
-            <a:off x="4288536" y="1920240"/>
-            <a:ext cx="3456432" cy="384048"/>
+            <a:off x="502920" y="3049524"/>
+            <a:ext cx="64008" cy="749808"/>
           </a:xfrm>
           <a:prstGeom prst="rect">
             <a:avLst/>
@@ -3796,14 +3945,14 @@
       </p:sp>
       <p:sp>
         <p:nvSpPr>
-          <p:cNvPr id="12" name="TextBox 11"/>
+          <p:cNvPr id="15" name="TextBox 14"/>
           <p:cNvSpPr txBox="1"/>
           <p:nvPr/>
         </p:nvSpPr>
         <p:spPr>
           <a:xfrm>
-            <a:off x="4288536" y="1965960"/>
-            <a:ext cx="3456432" cy="310896"/>
+            <a:off x="740664" y="3104388"/>
+            <a:ext cx="2395728" cy="640080"/>
           </a:xfrm>
           <a:prstGeom prst="rect">
             <a:avLst/>
@@ -3816,82 +3965,59 @@
           </a:bodyPr>
           <a:lstStyle/>
           <a:p>
-            <a:pPr algn="ctr">
+            <a:pPr algn="l">
+              <a:spcAft>
+                <a:spcPts val="100"/>
+              </a:spcAft>
+            </a:pPr>
+            <a:r>
+              <a:rPr sz="1100" b="1" i="0">
+                <a:solidFill>
+                  <a:srgbClr val="3A106E"/>
+                </a:solidFill>
+                <a:latin typeface="Yu Gothic"/>
+                <a:ea typeface="Yu Gothic"/>
+                <a:cs typeface="Yu Gothic"/>
+              </a:rPr>
+              <a:t>石塚部長</a:t>
+            </a:r>
+          </a:p>
+          <a:p>
+            <a:pPr algn="l">
               <a:spcAft>
                 <a:spcPts val="0"/>
               </a:spcAft>
             </a:pPr>
             <a:r>
-              <a:rPr sz="1400" b="1" i="0">
-                <a:solidFill>
-                  <a:srgbClr val="FFFFFF"/>
+              <a:rPr sz="850" b="1" i="0">
+                <a:solidFill>
+                  <a:srgbClr val="7823DC"/>
                 </a:solidFill>
                 <a:latin typeface="Yu Gothic"/>
                 <a:ea typeface="Yu Gothic"/>
                 <a:cs typeface="Yu Gothic"/>
               </a:rPr>
-              <a:t>来週</a:t>
-            </a:r>
-          </a:p>
-        </p:txBody>
-      </p:sp>
-      <p:sp>
-        <p:nvSpPr>
-          <p:cNvPr id="13" name="TextBox 12"/>
-          <p:cNvSpPr txBox="1"/>
-          <p:nvPr/>
-        </p:nvSpPr>
-        <p:spPr>
-          <a:xfrm>
-            <a:off x="4434840" y="2377440"/>
-            <a:ext cx="3163824" cy="438912"/>
-          </a:xfrm>
-          <a:prstGeom prst="rect">
-            <a:avLst/>
-          </a:prstGeom>
-          <a:noFill/>
-        </p:spPr>
-        <p:txBody>
-          <a:bodyPr wrap="square" lIns="0" rIns="0" tIns="0" bIns="0" anchor="ctr">
-            <a:spAutoFit/>
-          </a:bodyPr>
-          <a:lstStyle/>
-          <a:p>
-            <a:pPr algn="ctr">
-              <a:spcAft>
-                <a:spcPts val="0"/>
-              </a:spcAft>
-            </a:pPr>
-            <a:r>
-              <a:rPr sz="1050" b="1" i="0">
-                <a:solidFill>
-                  <a:srgbClr val="262630"/>
-                </a:solidFill>
-                <a:latin typeface="Yu Gothic"/>
-                <a:ea typeface="Yu Gothic"/>
-                <a:cs typeface="Yu Gothic"/>
-              </a:rPr>
-              <a:t>棚卸し確認会・データ整備の完了</a:t>
-            </a:r>
-          </a:p>
-        </p:txBody>
-      </p:sp>
-      <p:sp>
-        <p:nvSpPr>
-          <p:cNvPr id="14" name="Right Arrow 13"/>
+              <a:t>製作企画</a:t>
+            </a:r>
+          </a:p>
+        </p:txBody>
+      </p:sp>
+      <p:sp>
+        <p:nvSpPr>
+          <p:cNvPr id="16" name="Rectangle 15"/>
           <p:cNvSpPr/>
           <p:nvPr/>
         </p:nvSpPr>
         <p:spPr>
           <a:xfrm>
-            <a:off x="7781544" y="2267712"/>
-            <a:ext cx="256032" cy="237744"/>
-          </a:xfrm>
-          <a:prstGeom prst="rightArrow">
+            <a:off x="3300984" y="3177540"/>
+            <a:ext cx="12700" cy="493776"/>
+          </a:xfrm>
+          <a:prstGeom prst="rect">
             <a:avLst/>
           </a:prstGeom>
           <a:solidFill>
-            <a:srgbClr val="7823DC"/>
+            <a:srgbClr val="D9D9E0"/>
           </a:solidFill>
           <a:ln>
             <a:noFill/>
@@ -3922,14 +4048,55 @@
       </p:sp>
       <p:sp>
         <p:nvSpPr>
-          <p:cNvPr id="15" name="Rectangle 14"/>
+          <p:cNvPr id="17" name="TextBox 16"/>
+          <p:cNvSpPr txBox="1"/>
+          <p:nvPr/>
+        </p:nvSpPr>
+        <p:spPr>
+          <a:xfrm>
+            <a:off x="3502152" y="3104388"/>
+            <a:ext cx="7982712" cy="640080"/>
+          </a:xfrm>
+          <a:prstGeom prst="rect">
+            <a:avLst/>
+          </a:prstGeom>
+          <a:noFill/>
+        </p:spPr>
+        <p:txBody>
+          <a:bodyPr wrap="square" lIns="0" rIns="0" tIns="0" bIns="0" anchor="ctr">
+            <a:spAutoFit/>
+          </a:bodyPr>
+          <a:lstStyle/>
+          <a:p>
+            <a:pPr algn="l">
+              <a:spcAft>
+                <a:spcPts val="0"/>
+              </a:spcAft>
+            </a:pPr>
+            <a:r>
+              <a:rPr sz="1050" b="0" i="0">
+                <a:solidFill>
+                  <a:srgbClr val="262630"/>
+                </a:solidFill>
+                <a:latin typeface="Yu Gothic"/>
+                <a:ea typeface="Yu Gothic"/>
+                <a:cs typeface="Yu Gothic"/>
+              </a:rPr>
+              <a:t>「企画段階から営業と会話しながら進める仕組みを一緒に作りたい。製作と営業の間の情報流通は双方に大きなロス」</a:t>
+            </a:r>
+          </a:p>
+        </p:txBody>
+      </p:sp>
+      <p:sp>
+        <p:nvSpPr>
+          <p:cNvPr id="18" name="Rectangle 17"/>
           <p:cNvSpPr/>
           <p:nvPr/>
         </p:nvSpPr>
         <p:spPr>
           <a:xfrm>
-            <a:off x="8074152" y="1920240"/>
-            <a:ext cx="3456432" cy="932688"/>
+            <a:off x="502920" y="3886200"/>
+            <a:ext cx="11183112" cy="749808"/>
           </a:xfrm>
           <a:prstGeom prst="rect">
             <a:avLst/>
@@ -3968,20 +4135,20 @@
       </p:sp>
       <p:sp>
         <p:nvSpPr>
-          <p:cNvPr id="16" name="Rectangle 15"/>
+          <p:cNvPr id="19" name="Rectangle 18"/>
           <p:cNvSpPr/>
           <p:nvPr/>
         </p:nvSpPr>
         <p:spPr>
           <a:xfrm>
-            <a:off x="8074152" y="1920240"/>
-            <a:ext cx="3456432" cy="384048"/>
+            <a:off x="502920" y="3886200"/>
+            <a:ext cx="64008" cy="749808"/>
           </a:xfrm>
           <a:prstGeom prst="rect">
             <a:avLst/>
           </a:prstGeom>
           <a:solidFill>
-            <a:srgbClr val="3A106E"/>
+            <a:srgbClr val="7823DC"/>
           </a:solidFill>
           <a:ln>
             <a:noFill/>
@@ -4012,14 +4179,14 @@
       </p:sp>
       <p:sp>
         <p:nvSpPr>
-          <p:cNvPr id="17" name="TextBox 16"/>
+          <p:cNvPr id="20" name="TextBox 19"/>
           <p:cNvSpPr txBox="1"/>
           <p:nvPr/>
         </p:nvSpPr>
         <p:spPr>
           <a:xfrm>
-            <a:off x="8074152" y="1965960"/>
-            <a:ext cx="3456432" cy="310896"/>
+            <a:off x="740664" y="3941064"/>
+            <a:ext cx="2395728" cy="640080"/>
           </a:xfrm>
           <a:prstGeom prst="rect">
             <a:avLst/>
@@ -4032,35 +4199,97 @@
           </a:bodyPr>
           <a:lstStyle/>
           <a:p>
-            <a:pPr algn="ctr">
+            <a:pPr algn="l">
+              <a:spcAft>
+                <a:spcPts val="100"/>
+              </a:spcAft>
+            </a:pPr>
+            <a:r>
+              <a:rPr sz="1100" b="1" i="0">
+                <a:solidFill>
+                  <a:srgbClr val="3A106E"/>
+                </a:solidFill>
+                <a:latin typeface="Yu Gothic"/>
+                <a:ea typeface="Yu Gothic"/>
+                <a:cs typeface="Yu Gothic"/>
+              </a:rPr>
+              <a:t>田中部長</a:t>
+            </a:r>
+          </a:p>
+          <a:p>
+            <a:pPr algn="l">
               <a:spcAft>
                 <a:spcPts val="0"/>
               </a:spcAft>
             </a:pPr>
             <a:r>
-              <a:rPr sz="1400" b="1" i="0">
-                <a:solidFill>
-                  <a:srgbClr val="FFFFFF"/>
+              <a:rPr sz="850" b="1" i="0">
+                <a:solidFill>
+                  <a:srgbClr val="7823DC"/>
                 </a:solidFill>
                 <a:latin typeface="Yu Gothic"/>
                 <a:ea typeface="Yu Gothic"/>
                 <a:cs typeface="Yu Gothic"/>
               </a:rPr>
-              <a:t>以降</a:t>
-            </a:r>
-          </a:p>
-        </p:txBody>
-      </p:sp>
-      <p:sp>
-        <p:nvSpPr>
-          <p:cNvPr id="18" name="TextBox 17"/>
+              <a:t>ライブイベント</a:t>
+            </a:r>
+          </a:p>
+        </p:txBody>
+      </p:sp>
+      <p:sp>
+        <p:nvSpPr>
+          <p:cNvPr id="21" name="Rectangle 20"/>
+          <p:cNvSpPr/>
+          <p:nvPr/>
+        </p:nvSpPr>
+        <p:spPr>
+          <a:xfrm>
+            <a:off x="3300984" y="4014216"/>
+            <a:ext cx="12700" cy="493776"/>
+          </a:xfrm>
+          <a:prstGeom prst="rect">
+            <a:avLst/>
+          </a:prstGeom>
+          <a:solidFill>
+            <a:srgbClr val="D9D9E0"/>
+          </a:solidFill>
+          <a:ln>
+            <a:noFill/>
+          </a:ln>
+          <a:effectLst/>
+        </p:spPr>
+        <p:style>
+          <a:lnRef idx="1">
+            <a:schemeClr val="accent1"/>
+          </a:lnRef>
+          <a:fillRef idx="3">
+            <a:schemeClr val="accent1"/>
+          </a:fillRef>
+          <a:effectRef idx="2">
+            <a:schemeClr val="accent1"/>
+          </a:effectRef>
+          <a:fontRef idx="minor">
+            <a:schemeClr val="lt1"/>
+          </a:fontRef>
+        </p:style>
+        <p:txBody>
+          <a:bodyPr rtlCol="0" anchor="ctr"/>
+          <a:lstStyle/>
+          <a:p>
+            <a:pPr algn="ctr"/>
+          </a:p>
+        </p:txBody>
+      </p:sp>
+      <p:sp>
+        <p:nvSpPr>
+          <p:cNvPr id="22" name="TextBox 21"/>
           <p:cNvSpPr txBox="1"/>
           <p:nvPr/>
         </p:nvSpPr>
         <p:spPr>
           <a:xfrm>
-            <a:off x="8220456" y="2377440"/>
-            <a:ext cx="3163824" cy="438912"/>
+            <a:off x="3502152" y="3941064"/>
+            <a:ext cx="7982712" cy="640080"/>
           </a:xfrm>
           <a:prstGeom prst="rect">
             <a:avLst/>
@@ -4073,13 +4302,13 @@
           </a:bodyPr>
           <a:lstStyle/>
           <a:p>
-            <a:pPr algn="ctr">
+            <a:pPr algn="l">
               <a:spcAft>
                 <a:spcPts val="0"/>
               </a:spcAft>
             </a:pPr>
             <a:r>
-              <a:rPr sz="1050" b="1" i="0">
+              <a:rPr sz="1050" b="0" i="0">
                 <a:solidFill>
                   <a:srgbClr val="262630"/>
                 </a:solidFill>
@@ -4087,21 +4316,21 @@
                 <a:ea typeface="Yu Gothic"/>
                 <a:cs typeface="Yu Gothic"/>
               </a:rPr>
-              <a:t>分科会×3の定常運転開始、初回点検会議へ</a:t>
-            </a:r>
-          </a:p>
-        </p:txBody>
-      </p:sp>
-      <p:sp>
-        <p:nvSpPr>
-          <p:cNvPr id="19" name="Rectangle 18"/>
+              <a:t>「ライブは収益だけでなくファン化・海外・商品への波及を担う。総合評価とセットなら賛成」</a:t>
+            </a:r>
+          </a:p>
+        </p:txBody>
+      </p:sp>
+      <p:sp>
+        <p:nvSpPr>
+          <p:cNvPr id="23" name="Rectangle 22"/>
           <p:cNvSpPr/>
           <p:nvPr/>
         </p:nvSpPr>
         <p:spPr>
           <a:xfrm>
-            <a:off x="502920" y="3145536"/>
-            <a:ext cx="5504688" cy="1188720"/>
+            <a:off x="502920" y="4722876"/>
+            <a:ext cx="11183112" cy="749808"/>
           </a:xfrm>
           <a:prstGeom prst="rect">
             <a:avLst/>
@@ -4140,20 +4369,20 @@
       </p:sp>
       <p:sp>
         <p:nvSpPr>
-          <p:cNvPr id="20" name="Rectangle 19"/>
+          <p:cNvPr id="24" name="Rectangle 23"/>
           <p:cNvSpPr/>
           <p:nvPr/>
         </p:nvSpPr>
         <p:spPr>
           <a:xfrm>
-            <a:off x="502920" y="3145536"/>
-            <a:ext cx="5504688" cy="54864"/>
+            <a:off x="502920" y="4722876"/>
+            <a:ext cx="64008" cy="749808"/>
           </a:xfrm>
           <a:prstGeom prst="rect">
             <a:avLst/>
           </a:prstGeom>
           <a:solidFill>
-            <a:srgbClr val="3A106E"/>
+            <a:srgbClr val="7823DC"/>
           </a:solidFill>
           <a:ln>
             <a:noFill/>
@@ -4184,14 +4413,14 @@
       </p:sp>
       <p:sp>
         <p:nvSpPr>
-          <p:cNvPr id="21" name="TextBox 20"/>
+          <p:cNvPr id="25" name="TextBox 24"/>
           <p:cNvSpPr txBox="1"/>
           <p:nvPr/>
         </p:nvSpPr>
         <p:spPr>
           <a:xfrm>
-            <a:off x="722376" y="3346704"/>
-            <a:ext cx="5065776" cy="822960"/>
+            <a:off x="740664" y="4777740"/>
+            <a:ext cx="2395728" cy="640080"/>
           </a:xfrm>
           <a:prstGeom prst="rect">
             <a:avLst/>
@@ -4199,18 +4428,18 @@
           <a:noFill/>
         </p:spPr>
         <p:txBody>
-          <a:bodyPr wrap="square" lIns="0" rIns="0" tIns="0" bIns="0">
+          <a:bodyPr wrap="square" lIns="0" rIns="0" tIns="0" bIns="0" anchor="ctr">
             <a:spAutoFit/>
           </a:bodyPr>
           <a:lstStyle/>
           <a:p>
             <a:pPr algn="l">
               <a:spcAft>
-                <a:spcPts val="600"/>
+                <a:spcPts val="100"/>
               </a:spcAft>
             </a:pPr>
             <a:r>
-              <a:rPr sz="1300" b="1" i="0">
+              <a:rPr sz="1100" b="1" i="0">
                 <a:solidFill>
                   <a:srgbClr val="3A106E"/>
                 </a:solidFill>
@@ -4218,7 +4447,7 @@
                 <a:ea typeface="Yu Gothic"/>
                 <a:cs typeface="Yu Gothic"/>
               </a:rPr>
-              <a:t>① 発足の後ろ盾</a:t>
+              <a:t>高橋本部長</a:t>
             </a:r>
           </a:p>
           <a:p>
@@ -4228,29 +4457,114 @@
               </a:spcAft>
             </a:pPr>
             <a:r>
-              <a:rPr sz="1100" b="0" i="0">
-                <a:solidFill>
-                  <a:srgbClr val="262630"/>
+              <a:rPr sz="850" b="1" i="0">
+                <a:solidFill>
+                  <a:srgbClr val="7823DC"/>
                 </a:solidFill>
                 <a:latin typeface="Yu Gothic"/>
                 <a:ea typeface="Yu Gothic"/>
                 <a:cs typeface="Yu Gothic"/>
               </a:rPr>
-              <a:t>全社への発足通知に際し、会長からも一言の後押しをいただきたい</a:t>
-            </a:r>
-          </a:p>
-        </p:txBody>
-      </p:sp>
-      <p:sp>
-        <p:nvSpPr>
-          <p:cNvPr id="22" name="Rectangle 21"/>
+              <a:t>管理</a:t>
+            </a:r>
+          </a:p>
+        </p:txBody>
+      </p:sp>
+      <p:sp>
+        <p:nvSpPr>
+          <p:cNvPr id="26" name="Rectangle 25"/>
           <p:cNvSpPr/>
           <p:nvPr/>
         </p:nvSpPr>
         <p:spPr>
           <a:xfrm>
-            <a:off x="6181344" y="3145536"/>
-            <a:ext cx="5504688" cy="1188720"/>
+            <a:off x="3300984" y="4850892"/>
+            <a:ext cx="12700" cy="493776"/>
+          </a:xfrm>
+          <a:prstGeom prst="rect">
+            <a:avLst/>
+          </a:prstGeom>
+          <a:solidFill>
+            <a:srgbClr val="D9D9E0"/>
+          </a:solidFill>
+          <a:ln>
+            <a:noFill/>
+          </a:ln>
+          <a:effectLst/>
+        </p:spPr>
+        <p:style>
+          <a:lnRef idx="1">
+            <a:schemeClr val="accent1"/>
+          </a:lnRef>
+          <a:fillRef idx="3">
+            <a:schemeClr val="accent1"/>
+          </a:fillRef>
+          <a:effectRef idx="2">
+            <a:schemeClr val="accent1"/>
+          </a:effectRef>
+          <a:fontRef idx="minor">
+            <a:schemeClr val="lt1"/>
+          </a:fontRef>
+        </p:style>
+        <p:txBody>
+          <a:bodyPr rtlCol="0" anchor="ctr"/>
+          <a:lstStyle/>
+          <a:p>
+            <a:pPr algn="ctr"/>
+          </a:p>
+        </p:txBody>
+      </p:sp>
+      <p:sp>
+        <p:nvSpPr>
+          <p:cNvPr id="27" name="TextBox 26"/>
+          <p:cNvSpPr txBox="1"/>
+          <p:nvPr/>
+        </p:nvSpPr>
+        <p:spPr>
+          <a:xfrm>
+            <a:off x="3502152" y="4777740"/>
+            <a:ext cx="7982712" cy="640080"/>
+          </a:xfrm>
+          <a:prstGeom prst="rect">
+            <a:avLst/>
+          </a:prstGeom>
+          <a:noFill/>
+        </p:spPr>
+        <p:txBody>
+          <a:bodyPr wrap="square" lIns="0" rIns="0" tIns="0" bIns="0" anchor="ctr">
+            <a:spAutoFit/>
+          </a:bodyPr>
+          <a:lstStyle/>
+          <a:p>
+            <a:pPr algn="l">
+              <a:spcAft>
+                <a:spcPts val="0"/>
+              </a:spcAft>
+            </a:pPr>
+            <a:r>
+              <a:rPr sz="1050" b="0" i="0">
+                <a:solidFill>
+                  <a:srgbClr val="262630"/>
+                </a:solidFill>
+                <a:latin typeface="Yu Gothic"/>
+                <a:ea typeface="Yu Gothic"/>
+                <a:cs typeface="Yu Gothic"/>
+              </a:rPr>
+              <a:t>「契約まわりの改革はすぐにでも動き出したい。HD側の新規人員で最優先稼働が可能」</a:t>
+            </a:r>
+          </a:p>
+        </p:txBody>
+      </p:sp>
+      <p:sp>
+        <p:nvSpPr>
+          <p:cNvPr id="28" name="Rectangle 27"/>
+          <p:cNvSpPr/>
+          <p:nvPr/>
+        </p:nvSpPr>
+        <p:spPr>
+          <a:xfrm>
+            <a:off x="502920" y="5559552"/>
+            <a:ext cx="11183112" cy="749808"/>
           </a:xfrm>
           <a:prstGeom prst="rect">
             <a:avLst/>
@@ -4289,14 +4603,1043 @@
       </p:sp>
       <p:sp>
         <p:nvSpPr>
-          <p:cNvPr id="23" name="Rectangle 22"/>
+          <p:cNvPr id="29" name="Rectangle 28"/>
           <p:cNvSpPr/>
           <p:nvPr/>
         </p:nvSpPr>
         <p:spPr>
           <a:xfrm>
-            <a:off x="6181344" y="3145536"/>
-            <a:ext cx="5504688" cy="54864"/>
+            <a:off x="502920" y="5559552"/>
+            <a:ext cx="64008" cy="749808"/>
+          </a:xfrm>
+          <a:prstGeom prst="rect">
+            <a:avLst/>
+          </a:prstGeom>
+          <a:solidFill>
+            <a:srgbClr val="7823DC"/>
+          </a:solidFill>
+          <a:ln>
+            <a:noFill/>
+          </a:ln>
+          <a:effectLst/>
+        </p:spPr>
+        <p:style>
+          <a:lnRef idx="1">
+            <a:schemeClr val="accent1"/>
+          </a:lnRef>
+          <a:fillRef idx="3">
+            <a:schemeClr val="accent1"/>
+          </a:fillRef>
+          <a:effectRef idx="2">
+            <a:schemeClr val="accent1"/>
+          </a:effectRef>
+          <a:fontRef idx="minor">
+            <a:schemeClr val="lt1"/>
+          </a:fontRef>
+        </p:style>
+        <p:txBody>
+          <a:bodyPr rtlCol="0" anchor="ctr"/>
+          <a:lstStyle/>
+          <a:p>
+            <a:pPr algn="ctr"/>
+          </a:p>
+        </p:txBody>
+      </p:sp>
+      <p:sp>
+        <p:nvSpPr>
+          <p:cNvPr id="30" name="TextBox 29"/>
+          <p:cNvSpPr txBox="1"/>
+          <p:nvPr/>
+        </p:nvSpPr>
+        <p:spPr>
+          <a:xfrm>
+            <a:off x="740664" y="5614416"/>
+            <a:ext cx="2395728" cy="640080"/>
+          </a:xfrm>
+          <a:prstGeom prst="rect">
+            <a:avLst/>
+          </a:prstGeom>
+          <a:noFill/>
+        </p:spPr>
+        <p:txBody>
+          <a:bodyPr wrap="square" lIns="0" rIns="0" tIns="0" bIns="0" anchor="ctr">
+            <a:spAutoFit/>
+          </a:bodyPr>
+          <a:lstStyle/>
+          <a:p>
+            <a:pPr algn="l">
+              <a:spcAft>
+                <a:spcPts val="100"/>
+              </a:spcAft>
+            </a:pPr>
+            <a:r>
+              <a:rPr sz="1100" b="1" i="0">
+                <a:solidFill>
+                  <a:srgbClr val="3A106E"/>
+                </a:solidFill>
+                <a:latin typeface="Yu Gothic"/>
+                <a:ea typeface="Yu Gothic"/>
+                <a:cs typeface="Yu Gothic"/>
+              </a:rPr>
+              <a:t>木綿さん</a:t>
+            </a:r>
+          </a:p>
+          <a:p>
+            <a:pPr algn="l">
+              <a:spcAft>
+                <a:spcPts val="0"/>
+              </a:spcAft>
+            </a:pPr>
+            <a:r>
+              <a:rPr sz="850" b="1" i="0">
+                <a:solidFill>
+                  <a:srgbClr val="7823DC"/>
+                </a:solidFill>
+                <a:latin typeface="Yu Gothic"/>
+                <a:ea typeface="Yu Gothic"/>
+                <a:cs typeface="Yu Gothic"/>
+              </a:rPr>
+              <a:t>HD戦略</a:t>
+            </a:r>
+          </a:p>
+        </p:txBody>
+      </p:sp>
+      <p:sp>
+        <p:nvSpPr>
+          <p:cNvPr id="31" name="Rectangle 30"/>
+          <p:cNvSpPr/>
+          <p:nvPr/>
+        </p:nvSpPr>
+        <p:spPr>
+          <a:xfrm>
+            <a:off x="3300984" y="5687568"/>
+            <a:ext cx="12700" cy="493776"/>
+          </a:xfrm>
+          <a:prstGeom prst="rect">
+            <a:avLst/>
+          </a:prstGeom>
+          <a:solidFill>
+            <a:srgbClr val="D9D9E0"/>
+          </a:solidFill>
+          <a:ln>
+            <a:noFill/>
+          </a:ln>
+          <a:effectLst/>
+        </p:spPr>
+        <p:style>
+          <a:lnRef idx="1">
+            <a:schemeClr val="accent1"/>
+          </a:lnRef>
+          <a:fillRef idx="3">
+            <a:schemeClr val="accent1"/>
+          </a:fillRef>
+          <a:effectRef idx="2">
+            <a:schemeClr val="accent1"/>
+          </a:effectRef>
+          <a:fontRef idx="minor">
+            <a:schemeClr val="lt1"/>
+          </a:fontRef>
+        </p:style>
+        <p:txBody>
+          <a:bodyPr rtlCol="0" anchor="ctr"/>
+          <a:lstStyle/>
+          <a:p>
+            <a:pPr algn="ctr"/>
+          </a:p>
+        </p:txBody>
+      </p:sp>
+      <p:sp>
+        <p:nvSpPr>
+          <p:cNvPr id="32" name="TextBox 31"/>
+          <p:cNvSpPr txBox="1"/>
+          <p:nvPr/>
+        </p:nvSpPr>
+        <p:spPr>
+          <a:xfrm>
+            <a:off x="3502152" y="5614416"/>
+            <a:ext cx="7982712" cy="640080"/>
+          </a:xfrm>
+          <a:prstGeom prst="rect">
+            <a:avLst/>
+          </a:prstGeom>
+          <a:noFill/>
+        </p:spPr>
+        <p:txBody>
+          <a:bodyPr wrap="square" lIns="0" rIns="0" tIns="0" bIns="0" anchor="ctr">
+            <a:spAutoFit/>
+          </a:bodyPr>
+          <a:lstStyle/>
+          <a:p>
+            <a:pPr algn="l">
+              <a:spcAft>
+                <a:spcPts val="0"/>
+              </a:spcAft>
+            </a:pPr>
+            <a:r>
+              <a:rPr sz="1050" b="0" i="0">
+                <a:solidFill>
+                  <a:srgbClr val="262630"/>
+                </a:solidFill>
+                <a:latin typeface="Yu Gothic"/>
+                <a:ea typeface="Yu Gothic"/>
+                <a:cs typeface="Yu Gothic"/>
+              </a:rPr>
+              <a:t>「ウルトラマート内覧会でファッションブランドから「一緒に面白いことを」の声。新拠点を営業拠点として活用できる」</a:t>
+            </a:r>
+          </a:p>
+        </p:txBody>
+      </p:sp>
+      <p:sp>
+        <p:nvSpPr>
+          <p:cNvPr id="33" name="Rectangle 32"/>
+          <p:cNvSpPr/>
+          <p:nvPr/>
+        </p:nvSpPr>
+        <p:spPr>
+          <a:xfrm>
+            <a:off x="502920" y="6510528"/>
+            <a:ext cx="11183112" cy="15240"/>
+          </a:xfrm>
+          <a:prstGeom prst="rect">
+            <a:avLst/>
+          </a:prstGeom>
+          <a:solidFill>
+            <a:srgbClr val="D9D9E0"/>
+          </a:solidFill>
+          <a:ln>
+            <a:noFill/>
+          </a:ln>
+          <a:effectLst/>
+        </p:spPr>
+        <p:style>
+          <a:lnRef idx="1">
+            <a:schemeClr val="accent1"/>
+          </a:lnRef>
+          <a:fillRef idx="3">
+            <a:schemeClr val="accent1"/>
+          </a:fillRef>
+          <a:effectRef idx="2">
+            <a:schemeClr val="accent1"/>
+          </a:effectRef>
+          <a:fontRef idx="minor">
+            <a:schemeClr val="lt1"/>
+          </a:fontRef>
+        </p:style>
+        <p:txBody>
+          <a:bodyPr rtlCol="0" anchor="ctr"/>
+          <a:lstStyle/>
+          <a:p>
+            <a:pPr algn="ctr"/>
+          </a:p>
+        </p:txBody>
+      </p:sp>
+      <p:sp>
+        <p:nvSpPr>
+          <p:cNvPr id="34" name="TextBox 33"/>
+          <p:cNvSpPr txBox="1"/>
+          <p:nvPr/>
+        </p:nvSpPr>
+        <p:spPr>
+          <a:xfrm>
+            <a:off x="502920" y="6565392"/>
+            <a:ext cx="8686800" cy="274320"/>
+          </a:xfrm>
+          <a:prstGeom prst="rect">
+            <a:avLst/>
+          </a:prstGeom>
+          <a:noFill/>
+        </p:spPr>
+        <p:txBody>
+          <a:bodyPr wrap="square" lIns="0" rIns="0" tIns="0" bIns="0">
+            <a:spAutoFit/>
+          </a:bodyPr>
+          <a:lstStyle/>
+          <a:p>
+            <a:pPr algn="l">
+              <a:spcAft>
+                <a:spcPts val="400"/>
+              </a:spcAft>
+            </a:pPr>
+            <a:r>
+              <a:rPr sz="750" b="0" i="0">
+                <a:solidFill>
+                  <a:srgbClr val="8A8A99"/>
+                </a:solidFill>
+                <a:latin typeface="Yu Gothic"/>
+                <a:ea typeface="Yu Gothic"/>
+                <a:cs typeface="Yu Gothic"/>
+              </a:rPr>
+              <a:t>円谷プロダクション 営業改革 | 社外秘（経営限り）</a:t>
+            </a:r>
+          </a:p>
+        </p:txBody>
+      </p:sp>
+      <p:sp>
+        <p:nvSpPr>
+          <p:cNvPr id="35" name="TextBox 34"/>
+          <p:cNvSpPr txBox="1"/>
+          <p:nvPr/>
+        </p:nvSpPr>
+        <p:spPr>
+          <a:xfrm>
+            <a:off x="11247120" y="6565392"/>
+            <a:ext cx="457200" cy="274320"/>
+          </a:xfrm>
+          <a:prstGeom prst="rect">
+            <a:avLst/>
+          </a:prstGeom>
+          <a:noFill/>
+        </p:spPr>
+        <p:txBody>
+          <a:bodyPr wrap="square" lIns="0" rIns="0" tIns="0" bIns="0">
+            <a:spAutoFit/>
+          </a:bodyPr>
+          <a:lstStyle/>
+          <a:p>
+            <a:pPr algn="r">
+              <a:spcAft>
+                <a:spcPts val="400"/>
+              </a:spcAft>
+            </a:pPr>
+            <a:r>
+              <a:rPr sz="900" b="0" i="0">
+                <a:solidFill>
+                  <a:srgbClr val="5F5F6E"/>
+                </a:solidFill>
+                <a:latin typeface="Yu Gothic"/>
+                <a:ea typeface="Yu Gothic"/>
+                <a:cs typeface="Yu Gothic"/>
+              </a:rPr>
+              <a:t>10</a:t>
+            </a:r>
+          </a:p>
+        </p:txBody>
+      </p:sp>
+    </p:spTree>
+  </p:cSld>
+  <p:clrMapOvr>
+    <a:masterClrMapping/>
+  </p:clrMapOvr>
+</p:sld>
+</file>
+
+<file path=ppt/slides/slide11.xml><?xml version="1.0" encoding="utf-8"?>
+<p:sld xmlns:a="http://schemas.openxmlformats.org/drawingml/2006/main" xmlns:p="http://schemas.openxmlformats.org/presentationml/2006/main" xmlns:r="http://schemas.openxmlformats.org/officeDocument/2006/relationships">
+  <p:cSld>
+    <p:spTree>
+      <p:nvGrpSpPr>
+        <p:cNvPr id="1" name=""/>
+        <p:cNvGrpSpPr/>
+        <p:nvPr/>
+      </p:nvGrpSpPr>
+      <p:grpSpPr/>
+      <p:sp>
+        <p:nvSpPr>
+          <p:cNvPr id="2" name="TextBox 1"/>
+          <p:cNvSpPr txBox="1"/>
+          <p:nvPr/>
+        </p:nvSpPr>
+        <p:spPr>
+          <a:xfrm>
+            <a:off x="502920" y="256032"/>
+            <a:ext cx="11155680" cy="256032"/>
+          </a:xfrm>
+          <a:prstGeom prst="rect">
+            <a:avLst/>
+          </a:prstGeom>
+          <a:noFill/>
+        </p:spPr>
+        <p:txBody>
+          <a:bodyPr wrap="square" lIns="0" rIns="0" tIns="0" bIns="0">
+            <a:spAutoFit/>
+          </a:bodyPr>
+          <a:lstStyle/>
+          <a:p>
+            <a:pPr algn="l">
+              <a:spcAft>
+                <a:spcPts val="400"/>
+              </a:spcAft>
+            </a:pPr>
+            <a:r>
+              <a:rPr sz="1000" b="1" i="0">
+                <a:solidFill>
+                  <a:srgbClr val="7823DC"/>
+                </a:solidFill>
+                <a:latin typeface="Yu Gothic"/>
+                <a:ea typeface="Yu Gothic"/>
+                <a:cs typeface="Yu Gothic"/>
+              </a:rPr>
+              <a:t>部長フィードバック ②</a:t>
+            </a:r>
+          </a:p>
+        </p:txBody>
+      </p:sp>
+      <p:sp>
+        <p:nvSpPr>
+          <p:cNvPr id="3" name="TextBox 2"/>
+          <p:cNvSpPr txBox="1"/>
+          <p:nvPr/>
+        </p:nvSpPr>
+        <p:spPr>
+          <a:xfrm>
+            <a:off x="502920" y="512064"/>
+            <a:ext cx="11155680" cy="868680"/>
+          </a:xfrm>
+          <a:prstGeom prst="rect">
+            <a:avLst/>
+          </a:prstGeom>
+          <a:noFill/>
+        </p:spPr>
+        <p:txBody>
+          <a:bodyPr wrap="square" lIns="0" rIns="0" tIns="0" bIns="0">
+            <a:spAutoFit/>
+          </a:bodyPr>
+          <a:lstStyle/>
+          <a:p>
+            <a:pPr algn="l">
+              <a:spcAft>
+                <a:spcPts val="0"/>
+              </a:spcAft>
+            </a:pPr>
+            <a:r>
+              <a:rPr sz="1900" b="1" i="0">
+                <a:solidFill>
+                  <a:srgbClr val="262630"/>
+                </a:solidFill>
+                <a:latin typeface="Yu Gothic"/>
+                <a:ea typeface="Yu Gothic"/>
+                <a:cs typeface="Yu Gothic"/>
+              </a:rPr>
+              <a:t>経営が受け止めるべき率直な声 — 会長にもそのまま共有します</a:t>
+            </a:r>
+          </a:p>
+        </p:txBody>
+      </p:sp>
+      <p:sp>
+        <p:nvSpPr>
+          <p:cNvPr id="4" name="Rectangle 3"/>
+          <p:cNvSpPr/>
+          <p:nvPr/>
+        </p:nvSpPr>
+        <p:spPr>
+          <a:xfrm>
+            <a:off x="502920" y="1389888"/>
+            <a:ext cx="1463040" cy="33020"/>
+          </a:xfrm>
+          <a:prstGeom prst="rect">
+            <a:avLst/>
+          </a:prstGeom>
+          <a:solidFill>
+            <a:srgbClr val="7823DC"/>
+          </a:solidFill>
+          <a:ln>
+            <a:noFill/>
+          </a:ln>
+          <a:effectLst/>
+        </p:spPr>
+        <p:style>
+          <a:lnRef idx="1">
+            <a:schemeClr val="accent1"/>
+          </a:lnRef>
+          <a:fillRef idx="3">
+            <a:schemeClr val="accent1"/>
+          </a:fillRef>
+          <a:effectRef idx="2">
+            <a:schemeClr val="accent1"/>
+          </a:effectRef>
+          <a:fontRef idx="minor">
+            <a:schemeClr val="lt1"/>
+          </a:fontRef>
+        </p:style>
+        <p:txBody>
+          <a:bodyPr rtlCol="0" anchor="ctr"/>
+          <a:lstStyle/>
+          <a:p>
+            <a:pPr algn="ctr"/>
+          </a:p>
+        </p:txBody>
+      </p:sp>
+      <p:sp>
+        <p:nvSpPr>
+          <p:cNvPr id="5" name="Rectangle 4"/>
+          <p:cNvSpPr/>
+          <p:nvPr/>
+        </p:nvSpPr>
+        <p:spPr>
+          <a:xfrm>
+            <a:off x="502920" y="1627632"/>
+            <a:ext cx="11183112" cy="438912"/>
+          </a:xfrm>
+          <a:prstGeom prst="rect">
+            <a:avLst/>
+          </a:prstGeom>
+          <a:solidFill>
+            <a:srgbClr val="F3EFFB"/>
+          </a:solidFill>
+          <a:ln>
+            <a:noFill/>
+          </a:ln>
+          <a:effectLst/>
+        </p:spPr>
+        <p:style>
+          <a:lnRef idx="1">
+            <a:schemeClr val="accent1"/>
+          </a:lnRef>
+          <a:fillRef idx="3">
+            <a:schemeClr val="accent1"/>
+          </a:fillRef>
+          <a:effectRef idx="2">
+            <a:schemeClr val="accent1"/>
+          </a:effectRef>
+          <a:fontRef idx="minor">
+            <a:schemeClr val="lt1"/>
+          </a:fontRef>
+        </p:style>
+        <p:txBody>
+          <a:bodyPr rtlCol="0" anchor="ctr"/>
+          <a:lstStyle/>
+          <a:p>
+            <a:pPr algn="ctr"/>
+          </a:p>
+        </p:txBody>
+      </p:sp>
+      <p:sp>
+        <p:nvSpPr>
+          <p:cNvPr id="6" name="Rectangle 5"/>
+          <p:cNvSpPr/>
+          <p:nvPr/>
+        </p:nvSpPr>
+        <p:spPr>
+          <a:xfrm>
+            <a:off x="502920" y="1627632"/>
+            <a:ext cx="38100" cy="438912"/>
+          </a:xfrm>
+          <a:prstGeom prst="rect">
+            <a:avLst/>
+          </a:prstGeom>
+          <a:solidFill>
+            <a:srgbClr val="7823DC"/>
+          </a:solidFill>
+          <a:ln>
+            <a:noFill/>
+          </a:ln>
+          <a:effectLst/>
+        </p:spPr>
+        <p:style>
+          <a:lnRef idx="1">
+            <a:schemeClr val="accent1"/>
+          </a:lnRef>
+          <a:fillRef idx="3">
+            <a:schemeClr val="accent1"/>
+          </a:fillRef>
+          <a:effectRef idx="2">
+            <a:schemeClr val="accent1"/>
+          </a:effectRef>
+          <a:fontRef idx="minor">
+            <a:schemeClr val="lt1"/>
+          </a:fontRef>
+        </p:style>
+        <p:txBody>
+          <a:bodyPr rtlCol="0" anchor="ctr"/>
+          <a:lstStyle/>
+          <a:p>
+            <a:pPr algn="ctr"/>
+          </a:p>
+        </p:txBody>
+      </p:sp>
+      <p:sp>
+        <p:nvSpPr>
+          <p:cNvPr id="7" name="TextBox 6"/>
+          <p:cNvSpPr txBox="1"/>
+          <p:nvPr/>
+        </p:nvSpPr>
+        <p:spPr>
+          <a:xfrm>
+            <a:off x="731520" y="1627632"/>
+            <a:ext cx="10744200" cy="438912"/>
+          </a:xfrm>
+          <a:prstGeom prst="rect">
+            <a:avLst/>
+          </a:prstGeom>
+          <a:noFill/>
+        </p:spPr>
+        <p:txBody>
+          <a:bodyPr wrap="square" lIns="0" rIns="0" tIns="0" bIns="0" anchor="ctr">
+            <a:spAutoFit/>
+          </a:bodyPr>
+          <a:lstStyle/>
+          <a:p>
+            <a:pPr algn="l">
+              <a:spcAft>
+                <a:spcPts val="0"/>
+              </a:spcAft>
+            </a:pPr>
+            <a:r>
+              <a:rPr sz="1100" b="1" i="0">
+                <a:solidFill>
+                  <a:srgbClr val="3A106E"/>
+                </a:solidFill>
+                <a:latin typeface="Yu Gothic"/>
+                <a:ea typeface="Yu Gothic"/>
+                <a:cs typeface="Yu Gothic"/>
+              </a:rPr>
+              <a:t>耳の痛い声こそ改革の信頼の源泉です。加工せずお伝えします</a:t>
+            </a:r>
+          </a:p>
+        </p:txBody>
+      </p:sp>
+      <p:graphicFrame>
+        <p:nvGraphicFramePr>
+          <p:cNvPr id="8" name="Table 7"/>
+          <p:cNvGraphicFramePr>
+            <a:graphicFrameLocks noGrp="1"/>
+          </p:cNvGraphicFramePr>
+          <p:nvPr/>
+        </p:nvGraphicFramePr>
+        <p:xfrm>
+          <a:off x="502920" y="2231136"/>
+          <a:ext cx="11183111" cy="3657600"/>
+        </p:xfrm>
+        <a:graphic>
+          <a:graphicData uri="http://schemas.openxmlformats.org/drawingml/2006/table">
+            <a:tbl>
+              <a:tblPr firstRow="1" bandRow="1">
+                <a:tableStyleId>{5C22544A-7EE6-4342-B048-85BDC9FD1C3A}</a:tableStyleId>
+              </a:tblPr>
+              <a:tblGrid>
+                <a:gridCol w="5774885"/>
+                <a:gridCol w="5408226"/>
+              </a:tblGrid>
+              <a:tr h="731520">
+                <a:tc>
+                  <a:txBody>
+                    <a:bodyPr wrap="square"/>
+                    <a:lstStyle/>
+                    <a:p>
+                      <a:pPr algn="l">
+                        <a:spcAft>
+                          <a:spcPts val="0"/>
+                        </a:spcAft>
+                      </a:pPr>
+                      <a:r>
+                        <a:rPr sz="1000" b="1" i="0">
+                          <a:solidFill>
+                            <a:srgbClr val="FFFFFF"/>
+                          </a:solidFill>
+                          <a:latin typeface="Yu Gothic"/>
+                          <a:ea typeface="Yu Gothic"/>
+                          <a:cs typeface="Yu Gothic"/>
+                        </a:rPr>
+                        <a:t>経営が受け止めるべき声</a:t>
+                      </a:r>
+                    </a:p>
+                  </a:txBody>
+                  <a:tcPr marL="54864" marR="54864" marT="18288" marB="18288" anchor="ctr">
+                    <a:solidFill>
+                      <a:srgbClr val="3A106E"/>
+                    </a:solidFill>
+                  </a:tcPr>
+                </a:tc>
+                <a:tc>
+                  <a:txBody>
+                    <a:bodyPr wrap="square"/>
+                    <a:lstStyle/>
+                    <a:p>
+                      <a:pPr algn="l">
+                        <a:spcAft>
+                          <a:spcPts val="0"/>
+                        </a:spcAft>
+                      </a:pPr>
+                      <a:r>
+                        <a:rPr sz="1000" b="1" i="0">
+                          <a:solidFill>
+                            <a:srgbClr val="FFFFFF"/>
+                          </a:solidFill>
+                          <a:latin typeface="Yu Gothic"/>
+                          <a:ea typeface="Yu Gothic"/>
+                          <a:cs typeface="Yu Gothic"/>
+                        </a:rPr>
+                        <a:t>改革としての受け止め</a:t>
+                      </a:r>
+                    </a:p>
+                  </a:txBody>
+                  <a:tcPr marL="54864" marR="54864" marT="18288" marB="18288" anchor="ctr">
+                    <a:solidFill>
+                      <a:srgbClr val="3A106E"/>
+                    </a:solidFill>
+                  </a:tcPr>
+                </a:tc>
+              </a:tr>
+              <a:tr h="731520">
+                <a:tc>
+                  <a:txBody>
+                    <a:bodyPr wrap="square"/>
+                    <a:lstStyle/>
+                    <a:p>
+                      <a:pPr algn="l">
+                        <a:spcAft>
+                          <a:spcPts val="100"/>
+                        </a:spcAft>
+                      </a:pPr>
+                      <a:r>
+                        <a:rPr sz="900" b="0" i="0">
+                          <a:solidFill>
+                            <a:srgbClr val="262630"/>
+                          </a:solidFill>
+                          <a:latin typeface="Yu Gothic"/>
+                          <a:ea typeface="Yu Gothic"/>
+                          <a:cs typeface="Yu Gothic"/>
+                        </a:rPr>
+                        <a:t>山田部長（商品開発）</a:t>
+                      </a:r>
+                    </a:p>
+                    <a:p>
+                      <a:pPr algn="l">
+                        <a:spcAft>
+                          <a:spcPts val="100"/>
+                        </a:spcAft>
+                      </a:pPr>
+                      <a:r>
+                        <a:rPr sz="900" b="0" i="0">
+                          <a:solidFill>
+                            <a:srgbClr val="262630"/>
+                          </a:solidFill>
+                          <a:latin typeface="Yu Gothic"/>
+                          <a:ea typeface="Yu Gothic"/>
+                          <a:cs typeface="Yu Gothic"/>
+                        </a:rPr>
+                        <a:t>「会長直下の案件は情報が個人に紐づき、横の連動が弱くなり、組織ではなく個人の取り組みになってしまう」</a:t>
+                      </a:r>
+                    </a:p>
+                  </a:txBody>
+                  <a:tcPr marL="54864" marR="54864" marT="18288" marB="18288" anchor="ctr">
+                    <a:solidFill>
+                      <a:srgbClr val="FFFFFF"/>
+                    </a:solidFill>
+                  </a:tcPr>
+                </a:tc>
+                <a:tc>
+                  <a:txBody>
+                    <a:bodyPr wrap="square"/>
+                    <a:lstStyle/>
+                    <a:p>
+                      <a:pPr algn="l">
+                        <a:spcAft>
+                          <a:spcPts val="100"/>
+                        </a:spcAft>
+                      </a:pPr>
+                      <a:r>
+                        <a:rPr sz="900" b="0" i="0">
+                          <a:solidFill>
+                            <a:srgbClr val="262630"/>
+                          </a:solidFill>
+                          <a:latin typeface="Yu Gothic"/>
+                          <a:ea typeface="Yu Gothic"/>
+                          <a:cs typeface="Yu Gothic"/>
+                        </a:rPr>
+                        <a:t>会長のお力を組織の力に変える情報の仕組みを設計したい（本日ご相談したい論点）</a:t>
+                      </a:r>
+                    </a:p>
+                  </a:txBody>
+                  <a:tcPr marL="54864" marR="54864" marT="18288" marB="18288" anchor="ctr">
+                    <a:solidFill>
+                      <a:srgbClr val="FFFFFF"/>
+                    </a:solidFill>
+                  </a:tcPr>
+                </a:tc>
+              </a:tr>
+              <a:tr h="731520">
+                <a:tc>
+                  <a:txBody>
+                    <a:bodyPr wrap="square"/>
+                    <a:lstStyle/>
+                    <a:p>
+                      <a:pPr algn="l">
+                        <a:spcAft>
+                          <a:spcPts val="100"/>
+                        </a:spcAft>
+                      </a:pPr>
+                      <a:r>
+                        <a:rPr sz="900" b="0" i="0">
+                          <a:solidFill>
+                            <a:srgbClr val="262630"/>
+                          </a:solidFill>
+                          <a:latin typeface="Yu Gothic"/>
+                          <a:ea typeface="Yu Gothic"/>
+                          <a:cs typeface="Yu Gothic"/>
+                        </a:rPr>
+                        <a:t>井上部長（販売促進）</a:t>
+                      </a:r>
+                    </a:p>
+                    <a:p>
+                      <a:pPr algn="l">
+                        <a:spcAft>
+                          <a:spcPts val="100"/>
+                        </a:spcAft>
+                      </a:pPr>
+                      <a:r>
+                        <a:rPr sz="900" b="0" i="0">
+                          <a:solidFill>
+                            <a:srgbClr val="262630"/>
+                          </a:solidFill>
+                          <a:latin typeface="Yu Gothic"/>
+                          <a:ea typeface="Yu Gothic"/>
+                          <a:cs typeface="Yu Gothic"/>
+                        </a:rPr>
+                        <a:t>「組織変更に伴う負荷増で心身ともに疲弊しているメンバーが少なくない。経営陣からの継続的な発信を」</a:t>
+                      </a:r>
+                    </a:p>
+                  </a:txBody>
+                  <a:tcPr marL="54864" marR="54864" marT="18288" marB="18288" anchor="ctr">
+                    <a:solidFill>
+                      <a:srgbClr val="F7F7F9"/>
+                    </a:solidFill>
+                  </a:tcPr>
+                </a:tc>
+                <a:tc>
+                  <a:txBody>
+                    <a:bodyPr wrap="square"/>
+                    <a:lstStyle/>
+                    <a:p>
+                      <a:pPr algn="l">
+                        <a:spcAft>
+                          <a:spcPts val="100"/>
+                        </a:spcAft>
+                      </a:pPr>
+                      <a:r>
+                        <a:rPr sz="900" b="0" i="0">
+                          <a:solidFill>
+                            <a:srgbClr val="262630"/>
+                          </a:solidFill>
+                          <a:latin typeface="Yu Gothic"/>
+                          <a:ea typeface="Yu Gothic"/>
+                          <a:cs typeface="Yu Gothic"/>
+                        </a:rPr>
+                        <a:t>負荷の順序設計と経営メッセージの継続。改革の負荷を現場に一斉にかけない段階展開の理由</a:t>
+                      </a:r>
+                    </a:p>
+                  </a:txBody>
+                  <a:tcPr marL="54864" marR="54864" marT="18288" marB="18288" anchor="ctr">
+                    <a:solidFill>
+                      <a:srgbClr val="F7F7F9"/>
+                    </a:solidFill>
+                  </a:tcPr>
+                </a:tc>
+              </a:tr>
+              <a:tr h="731520">
+                <a:tc>
+                  <a:txBody>
+                    <a:bodyPr wrap="square"/>
+                    <a:lstStyle/>
+                    <a:p>
+                      <a:pPr algn="l">
+                        <a:spcAft>
+                          <a:spcPts val="100"/>
+                        </a:spcAft>
+                      </a:pPr>
+                      <a:r>
+                        <a:rPr sz="900" b="0" i="0">
+                          <a:solidFill>
+                            <a:srgbClr val="262630"/>
+                          </a:solidFill>
+                          <a:latin typeface="Yu Gothic"/>
+                          <a:ea typeface="Yu Gothic"/>
+                          <a:cs typeface="Yu Gothic"/>
+                        </a:rPr>
+                        <a:t>庄司部長（ライセンス）・高橋本部長（管理）</a:t>
+                      </a:r>
+                    </a:p>
+                    <a:p>
+                      <a:pPr algn="l">
+                        <a:spcAft>
+                          <a:spcPts val="100"/>
+                        </a:spcAft>
+                      </a:pPr>
+                      <a:r>
+                        <a:rPr sz="900" b="0" i="0">
+                          <a:solidFill>
+                            <a:srgbClr val="262630"/>
+                          </a:solidFill>
+                          <a:latin typeface="Yu Gothic"/>
+                          <a:ea typeface="Yu Gothic"/>
+                          <a:cs typeface="Yu Gothic"/>
+                        </a:rPr>
+                        <a:t>「STOメンバーの現任案件に遅延を出さない体制の確認を。推進する側と現状業務を守る側の明確化を」</a:t>
+                      </a:r>
+                    </a:p>
+                  </a:txBody>
+                  <a:tcPr marL="54864" marR="54864" marT="18288" marB="18288" anchor="ctr">
+                    <a:solidFill>
+                      <a:srgbClr val="FFFFFF"/>
+                    </a:solidFill>
+                  </a:tcPr>
+                </a:tc>
+                <a:tc>
+                  <a:txBody>
+                    <a:bodyPr wrap="square"/>
+                    <a:lstStyle/>
+                    <a:p>
+                      <a:pPr algn="l">
+                        <a:spcAft>
+                          <a:spcPts val="100"/>
+                        </a:spcAft>
+                      </a:pPr>
+                      <a:r>
+                        <a:rPr sz="900" b="0" i="0">
+                          <a:solidFill>
+                            <a:srgbClr val="262630"/>
+                          </a:solidFill>
+                          <a:latin typeface="Yu Gothic"/>
+                          <a:ea typeface="Yu Gothic"/>
+                          <a:cs typeface="Yu Gothic"/>
+                        </a:rPr>
+                        <a:t>着任前の業務棚卸しと部門長合意を立ち上げ手順に組み込み済み</a:t>
+                      </a:r>
+                    </a:p>
+                  </a:txBody>
+                  <a:tcPr marL="54864" marR="54864" marT="18288" marB="18288" anchor="ctr">
+                    <a:solidFill>
+                      <a:srgbClr val="FFFFFF"/>
+                    </a:solidFill>
+                  </a:tcPr>
+                </a:tc>
+              </a:tr>
+              <a:tr h="731520">
+                <a:tc>
+                  <a:txBody>
+                    <a:bodyPr wrap="square"/>
+                    <a:lstStyle/>
+                    <a:p>
+                      <a:pPr algn="l">
+                        <a:spcAft>
+                          <a:spcPts val="100"/>
+                        </a:spcAft>
+                      </a:pPr>
+                      <a:r>
+                        <a:rPr sz="900" b="0" i="0">
+                          <a:solidFill>
+                            <a:srgbClr val="262630"/>
+                          </a:solidFill>
+                          <a:latin typeface="Yu Gothic"/>
+                          <a:ea typeface="Yu Gothic"/>
+                          <a:cs typeface="Yu Gothic"/>
+                        </a:rPr>
+                        <a:t>宍戸部長（カード開発）</a:t>
+                      </a:r>
+                    </a:p>
+                    <a:p>
+                      <a:pPr algn="l">
+                        <a:spcAft>
+                          <a:spcPts val="100"/>
+                        </a:spcAft>
+                      </a:pPr>
+                      <a:r>
+                        <a:rPr sz="900" b="0" i="0">
+                          <a:solidFill>
+                            <a:srgbClr val="262630"/>
+                          </a:solidFill>
+                          <a:latin typeface="Yu Gothic"/>
+                          <a:ea typeface="Yu Gothic"/>
+                          <a:cs typeface="Yu Gothic"/>
+                        </a:rPr>
+                        <a:t>「実行を支える予算設計と人事評価制度との連携が必須」</a:t>
+                      </a:r>
+                    </a:p>
+                  </a:txBody>
+                  <a:tcPr marL="54864" marR="54864" marT="18288" marB="18288" anchor="ctr">
+                    <a:solidFill>
+                      <a:srgbClr val="F7F7F9"/>
+                    </a:solidFill>
+                  </a:tcPr>
+                </a:tc>
+                <a:tc>
+                  <a:txBody>
+                    <a:bodyPr wrap="square"/>
+                    <a:lstStyle/>
+                    <a:p>
+                      <a:pPr algn="l">
+                        <a:spcAft>
+                          <a:spcPts val="100"/>
+                        </a:spcAft>
+                      </a:pPr>
+                      <a:r>
+                        <a:rPr sz="900" b="0" i="0">
+                          <a:solidFill>
+                            <a:srgbClr val="262630"/>
+                          </a:solidFill>
+                          <a:latin typeface="Yu Gothic"/>
+                          <a:ea typeface="Yu Gothic"/>
+                          <a:cs typeface="Yu Gothic"/>
+                        </a:rPr>
+                        <a:t>重要だが順序を慎重に。評価制度への接続は経営会議マターとして後段で（工数データは評価に使わない原則は堅持）</a:t>
+                      </a:r>
+                    </a:p>
+                  </a:txBody>
+                  <a:tcPr marL="54864" marR="54864" marT="18288" marB="18288" anchor="ctr">
+                    <a:solidFill>
+                      <a:srgbClr val="F7F7F9"/>
+                    </a:solidFill>
+                  </a:tcPr>
+                </a:tc>
+              </a:tr>
+            </a:tbl>
+          </a:graphicData>
+        </a:graphic>
+      </p:graphicFrame>
+      <p:sp>
+        <p:nvSpPr>
+          <p:cNvPr id="9" name="Rectangle 8"/>
+          <p:cNvSpPr/>
+          <p:nvPr/>
+        </p:nvSpPr>
+        <p:spPr>
+          <a:xfrm>
+            <a:off x="502920" y="5870448"/>
+            <a:ext cx="11183112" cy="548640"/>
+          </a:xfrm>
+          <a:prstGeom prst="rect">
+            <a:avLst/>
+          </a:prstGeom>
+          <a:solidFill>
+            <a:srgbClr val="F3EFFB"/>
+          </a:solidFill>
+          <a:ln>
+            <a:noFill/>
+          </a:ln>
+          <a:effectLst/>
+        </p:spPr>
+        <p:style>
+          <a:lnRef idx="1">
+            <a:schemeClr val="accent1"/>
+          </a:lnRef>
+          <a:fillRef idx="3">
+            <a:schemeClr val="accent1"/>
+          </a:fillRef>
+          <a:effectRef idx="2">
+            <a:schemeClr val="accent1"/>
+          </a:effectRef>
+          <a:fontRef idx="minor">
+            <a:schemeClr val="lt1"/>
+          </a:fontRef>
+        </p:style>
+        <p:txBody>
+          <a:bodyPr rtlCol="0" anchor="ctr"/>
+          <a:lstStyle/>
+          <a:p>
+            <a:pPr algn="ctr"/>
+          </a:p>
+        </p:txBody>
+      </p:sp>
+      <p:sp>
+        <p:nvSpPr>
+          <p:cNvPr id="10" name="Rectangle 9"/>
+          <p:cNvSpPr/>
+          <p:nvPr/>
+        </p:nvSpPr>
+        <p:spPr>
+          <a:xfrm>
+            <a:off x="502920" y="5870448"/>
+            <a:ext cx="38100" cy="548640"/>
           </a:xfrm>
           <a:prstGeom prst="rect">
             <a:avLst/>
@@ -4333,14 +5676,14 @@
       </p:sp>
       <p:sp>
         <p:nvSpPr>
-          <p:cNvPr id="24" name="TextBox 23"/>
+          <p:cNvPr id="11" name="TextBox 10"/>
           <p:cNvSpPr txBox="1"/>
           <p:nvPr/>
         </p:nvSpPr>
         <p:spPr>
           <a:xfrm>
-            <a:off x="6400800" y="3346704"/>
-            <a:ext cx="5065776" cy="822960"/>
+            <a:off x="713232" y="5925312"/>
+            <a:ext cx="10835640" cy="438912"/>
           </a:xfrm>
           <a:prstGeom prst="rect">
             <a:avLst/>
@@ -4348,28 +5691,10 @@
           <a:noFill/>
         </p:spPr>
         <p:txBody>
-          <a:bodyPr wrap="square" lIns="0" rIns="0" tIns="0" bIns="0">
+          <a:bodyPr wrap="square" lIns="0" rIns="0" tIns="0" bIns="0" anchor="ctr">
             <a:spAutoFit/>
           </a:bodyPr>
           <a:lstStyle/>
-          <a:p>
-            <a:pPr algn="l">
-              <a:spcAft>
-                <a:spcPts val="600"/>
-              </a:spcAft>
-            </a:pPr>
-            <a:r>
-              <a:rPr sz="1300" b="1" i="0">
-                <a:solidFill>
-                  <a:srgbClr val="3A106E"/>
-                </a:solidFill>
-                <a:latin typeface="Yu Gothic"/>
-                <a:ea typeface="Yu Gothic"/>
-                <a:cs typeface="Yu Gothic"/>
-              </a:rPr>
-              <a:t>② 専任体制の維持</a:t>
-            </a:r>
-          </a:p>
           <a:p>
             <a:pPr algn="l">
               <a:spcAft>
@@ -4377,7 +5702,7 @@
               </a:spcAft>
             </a:pPr>
             <a:r>
-              <a:rPr sz="1100" b="0" i="0">
+              <a:rPr sz="1050" b="1" i="0">
                 <a:solidFill>
                   <a:srgbClr val="262630"/>
                 </a:solidFill>
@@ -4385,21 +5710,769 @@
                 <a:ea typeface="Yu Gothic"/>
                 <a:cs typeface="Yu Gothic"/>
               </a:rPr>
-              <a:t>途中で部門都合により専任が崩れそうな場合の後押し</a:t>
-            </a:r>
-          </a:p>
-        </p:txBody>
-      </p:sp>
-      <p:sp>
-        <p:nvSpPr>
-          <p:cNvPr id="25" name="Rectangle 24"/>
+              <a:t>未回答の部門（海外・監修・法務）には個別ヒアリングを実施します。沈黙を合意とみなしません</a:t>
+            </a:r>
+          </a:p>
+        </p:txBody>
+      </p:sp>
+      <p:sp>
+        <p:nvSpPr>
+          <p:cNvPr id="12" name="Rectangle 11"/>
           <p:cNvSpPr/>
           <p:nvPr/>
         </p:nvSpPr>
         <p:spPr>
           <a:xfrm>
-            <a:off x="502920" y="4626864"/>
-            <a:ext cx="11183112" cy="969264"/>
+            <a:off x="502920" y="6510528"/>
+            <a:ext cx="11183112" cy="15240"/>
+          </a:xfrm>
+          <a:prstGeom prst="rect">
+            <a:avLst/>
+          </a:prstGeom>
+          <a:solidFill>
+            <a:srgbClr val="D9D9E0"/>
+          </a:solidFill>
+          <a:ln>
+            <a:noFill/>
+          </a:ln>
+          <a:effectLst/>
+        </p:spPr>
+        <p:style>
+          <a:lnRef idx="1">
+            <a:schemeClr val="accent1"/>
+          </a:lnRef>
+          <a:fillRef idx="3">
+            <a:schemeClr val="accent1"/>
+          </a:fillRef>
+          <a:effectRef idx="2">
+            <a:schemeClr val="accent1"/>
+          </a:effectRef>
+          <a:fontRef idx="minor">
+            <a:schemeClr val="lt1"/>
+          </a:fontRef>
+        </p:style>
+        <p:txBody>
+          <a:bodyPr rtlCol="0" anchor="ctr"/>
+          <a:lstStyle/>
+          <a:p>
+            <a:pPr algn="ctr"/>
+          </a:p>
+        </p:txBody>
+      </p:sp>
+      <p:sp>
+        <p:nvSpPr>
+          <p:cNvPr id="13" name="TextBox 12"/>
+          <p:cNvSpPr txBox="1"/>
+          <p:nvPr/>
+        </p:nvSpPr>
+        <p:spPr>
+          <a:xfrm>
+            <a:off x="502920" y="6565392"/>
+            <a:ext cx="8686800" cy="274320"/>
+          </a:xfrm>
+          <a:prstGeom prst="rect">
+            <a:avLst/>
+          </a:prstGeom>
+          <a:noFill/>
+        </p:spPr>
+        <p:txBody>
+          <a:bodyPr wrap="square" lIns="0" rIns="0" tIns="0" bIns="0">
+            <a:spAutoFit/>
+          </a:bodyPr>
+          <a:lstStyle/>
+          <a:p>
+            <a:pPr algn="l">
+              <a:spcAft>
+                <a:spcPts val="400"/>
+              </a:spcAft>
+            </a:pPr>
+            <a:r>
+              <a:rPr sz="750" b="0" i="0">
+                <a:solidFill>
+                  <a:srgbClr val="8A8A99"/>
+                </a:solidFill>
+                <a:latin typeface="Yu Gothic"/>
+                <a:ea typeface="Yu Gothic"/>
+                <a:cs typeface="Yu Gothic"/>
+              </a:rPr>
+              <a:t>円谷プロダクション 営業改革 | 社外秘（経営限り）</a:t>
+            </a:r>
+          </a:p>
+        </p:txBody>
+      </p:sp>
+      <p:sp>
+        <p:nvSpPr>
+          <p:cNvPr id="14" name="TextBox 13"/>
+          <p:cNvSpPr txBox="1"/>
+          <p:nvPr/>
+        </p:nvSpPr>
+        <p:spPr>
+          <a:xfrm>
+            <a:off x="11247120" y="6565392"/>
+            <a:ext cx="457200" cy="274320"/>
+          </a:xfrm>
+          <a:prstGeom prst="rect">
+            <a:avLst/>
+          </a:prstGeom>
+          <a:noFill/>
+        </p:spPr>
+        <p:txBody>
+          <a:bodyPr wrap="square" lIns="0" rIns="0" tIns="0" bIns="0">
+            <a:spAutoFit/>
+          </a:bodyPr>
+          <a:lstStyle/>
+          <a:p>
+            <a:pPr algn="r">
+              <a:spcAft>
+                <a:spcPts val="400"/>
+              </a:spcAft>
+            </a:pPr>
+            <a:r>
+              <a:rPr sz="900" b="0" i="0">
+                <a:solidFill>
+                  <a:srgbClr val="5F5F6E"/>
+                </a:solidFill>
+                <a:latin typeface="Yu Gothic"/>
+                <a:ea typeface="Yu Gothic"/>
+                <a:cs typeface="Yu Gothic"/>
+              </a:rPr>
+              <a:t>11</a:t>
+            </a:r>
+          </a:p>
+        </p:txBody>
+      </p:sp>
+    </p:spTree>
+  </p:cSld>
+  <p:clrMapOvr>
+    <a:masterClrMapping/>
+  </p:clrMapOvr>
+</p:sld>
+</file>
+
+<file path=ppt/slides/slide12.xml><?xml version="1.0" encoding="utf-8"?>
+<p:sld xmlns:a="http://schemas.openxmlformats.org/drawingml/2006/main" xmlns:p="http://schemas.openxmlformats.org/presentationml/2006/main" xmlns:r="http://schemas.openxmlformats.org/officeDocument/2006/relationships">
+  <p:cSld>
+    <p:spTree>
+      <p:nvGrpSpPr>
+        <p:cNvPr id="1" name=""/>
+        <p:cNvGrpSpPr/>
+        <p:nvPr/>
+      </p:nvGrpSpPr>
+      <p:grpSpPr/>
+      <p:sp>
+        <p:nvSpPr>
+          <p:cNvPr id="2" name="TextBox 1"/>
+          <p:cNvSpPr txBox="1"/>
+          <p:nvPr/>
+        </p:nvSpPr>
+        <p:spPr>
+          <a:xfrm>
+            <a:off x="502920" y="256032"/>
+            <a:ext cx="11155680" cy="256032"/>
+          </a:xfrm>
+          <a:prstGeom prst="rect">
+            <a:avLst/>
+          </a:prstGeom>
+          <a:noFill/>
+        </p:spPr>
+        <p:txBody>
+          <a:bodyPr wrap="square" lIns="0" rIns="0" tIns="0" bIns="0">
+            <a:spAutoFit/>
+          </a:bodyPr>
+          <a:lstStyle/>
+          <a:p>
+            <a:pPr algn="l">
+              <a:spcAft>
+                <a:spcPts val="400"/>
+              </a:spcAft>
+            </a:pPr>
+            <a:r>
+              <a:rPr sz="1000" b="1" i="0">
+                <a:solidFill>
+                  <a:srgbClr val="7823DC"/>
+                </a:solidFill>
+                <a:latin typeface="Yu Gothic"/>
+                <a:ea typeface="Yu Gothic"/>
+                <a:cs typeface="Yu Gothic"/>
+              </a:rPr>
+              <a:t>立ち上げの道筋と会長へのお願い</a:t>
+            </a:r>
+          </a:p>
+        </p:txBody>
+      </p:sp>
+      <p:sp>
+        <p:nvSpPr>
+          <p:cNvPr id="3" name="TextBox 2"/>
+          <p:cNvSpPr txBox="1"/>
+          <p:nvPr/>
+        </p:nvSpPr>
+        <p:spPr>
+          <a:xfrm>
+            <a:off x="502920" y="512064"/>
+            <a:ext cx="11155680" cy="868680"/>
+          </a:xfrm>
+          <a:prstGeom prst="rect">
+            <a:avLst/>
+          </a:prstGeom>
+          <a:noFill/>
+        </p:spPr>
+        <p:txBody>
+          <a:bodyPr wrap="square" lIns="0" rIns="0" tIns="0" bIns="0">
+            <a:spAutoFit/>
+          </a:bodyPr>
+          <a:lstStyle/>
+          <a:p>
+            <a:pPr algn="l">
+              <a:spcAft>
+                <a:spcPts val="0"/>
+              </a:spcAft>
+            </a:pPr>
+            <a:r>
+              <a:rPr sz="1900" b="1" i="0">
+                <a:solidFill>
+                  <a:srgbClr val="262630"/>
+                </a:solidFill>
+                <a:latin typeface="Yu Gothic"/>
+                <a:ea typeface="Yu Gothic"/>
+                <a:cs typeface="Yu Gothic"/>
+              </a:rPr>
+              <a:t>小さく発足し、90日で解散できる状態へ</a:t>
+            </a:r>
+          </a:p>
+        </p:txBody>
+      </p:sp>
+      <p:sp>
+        <p:nvSpPr>
+          <p:cNvPr id="4" name="Rectangle 3"/>
+          <p:cNvSpPr/>
+          <p:nvPr/>
+        </p:nvSpPr>
+        <p:spPr>
+          <a:xfrm>
+            <a:off x="502920" y="1389888"/>
+            <a:ext cx="1463040" cy="33020"/>
+          </a:xfrm>
+          <a:prstGeom prst="rect">
+            <a:avLst/>
+          </a:prstGeom>
+          <a:solidFill>
+            <a:srgbClr val="7823DC"/>
+          </a:solidFill>
+          <a:ln>
+            <a:noFill/>
+          </a:ln>
+          <a:effectLst/>
+        </p:spPr>
+        <p:style>
+          <a:lnRef idx="1">
+            <a:schemeClr val="accent1"/>
+          </a:lnRef>
+          <a:fillRef idx="3">
+            <a:schemeClr val="accent1"/>
+          </a:fillRef>
+          <a:effectRef idx="2">
+            <a:schemeClr val="accent1"/>
+          </a:effectRef>
+          <a:fontRef idx="minor">
+            <a:schemeClr val="lt1"/>
+          </a:fontRef>
+        </p:style>
+        <p:txBody>
+          <a:bodyPr rtlCol="0" anchor="ctr"/>
+          <a:lstStyle/>
+          <a:p>
+            <a:pPr algn="ctr"/>
+          </a:p>
+        </p:txBody>
+      </p:sp>
+      <p:sp>
+        <p:nvSpPr>
+          <p:cNvPr id="5" name="Rectangle 4"/>
+          <p:cNvSpPr/>
+          <p:nvPr/>
+        </p:nvSpPr>
+        <p:spPr>
+          <a:xfrm>
+            <a:off x="502920" y="1920240"/>
+            <a:ext cx="3456432" cy="932688"/>
+          </a:xfrm>
+          <a:prstGeom prst="rect">
+            <a:avLst/>
+          </a:prstGeom>
+          <a:solidFill>
+            <a:srgbClr val="FFFFFF"/>
+          </a:solidFill>
+          <a:ln w="9525">
+            <a:solidFill>
+              <a:srgbClr val="D9D9E0"/>
+            </a:solidFill>
+          </a:ln>
+          <a:effectLst/>
+        </p:spPr>
+        <p:style>
+          <a:lnRef idx="1">
+            <a:schemeClr val="accent1"/>
+          </a:lnRef>
+          <a:fillRef idx="3">
+            <a:schemeClr val="accent1"/>
+          </a:fillRef>
+          <a:effectRef idx="2">
+            <a:schemeClr val="accent1"/>
+          </a:effectRef>
+          <a:fontRef idx="minor">
+            <a:schemeClr val="lt1"/>
+          </a:fontRef>
+        </p:style>
+        <p:txBody>
+          <a:bodyPr rtlCol="0" anchor="ctr"/>
+          <a:lstStyle/>
+          <a:p>
+            <a:pPr algn="ctr"/>
+          </a:p>
+        </p:txBody>
+      </p:sp>
+      <p:sp>
+        <p:nvSpPr>
+          <p:cNvPr id="6" name="Rectangle 5"/>
+          <p:cNvSpPr/>
+          <p:nvPr/>
+        </p:nvSpPr>
+        <p:spPr>
+          <a:xfrm>
+            <a:off x="502920" y="1920240"/>
+            <a:ext cx="3456432" cy="384048"/>
+          </a:xfrm>
+          <a:prstGeom prst="rect">
+            <a:avLst/>
+          </a:prstGeom>
+          <a:solidFill>
+            <a:srgbClr val="7823DC"/>
+          </a:solidFill>
+          <a:ln>
+            <a:noFill/>
+          </a:ln>
+          <a:effectLst/>
+        </p:spPr>
+        <p:style>
+          <a:lnRef idx="1">
+            <a:schemeClr val="accent1"/>
+          </a:lnRef>
+          <a:fillRef idx="3">
+            <a:schemeClr val="accent1"/>
+          </a:fillRef>
+          <a:effectRef idx="2">
+            <a:schemeClr val="accent1"/>
+          </a:effectRef>
+          <a:fontRef idx="minor">
+            <a:schemeClr val="lt1"/>
+          </a:fontRef>
+        </p:style>
+        <p:txBody>
+          <a:bodyPr rtlCol="0" anchor="ctr"/>
+          <a:lstStyle/>
+          <a:p>
+            <a:pPr algn="ctr"/>
+          </a:p>
+        </p:txBody>
+      </p:sp>
+      <p:sp>
+        <p:nvSpPr>
+          <p:cNvPr id="7" name="TextBox 6"/>
+          <p:cNvSpPr txBox="1"/>
+          <p:nvPr/>
+        </p:nvSpPr>
+        <p:spPr>
+          <a:xfrm>
+            <a:off x="502920" y="1965960"/>
+            <a:ext cx="3456432" cy="310896"/>
+          </a:xfrm>
+          <a:prstGeom prst="rect">
+            <a:avLst/>
+          </a:prstGeom>
+          <a:noFill/>
+        </p:spPr>
+        <p:txBody>
+          <a:bodyPr wrap="square" lIns="0" rIns="0" tIns="0" bIns="0" anchor="ctr">
+            <a:spAutoFit/>
+          </a:bodyPr>
+          <a:lstStyle/>
+          <a:p>
+            <a:pPr algn="ctr">
+              <a:spcAft>
+                <a:spcPts val="0"/>
+              </a:spcAft>
+            </a:pPr>
+            <a:r>
+              <a:rPr sz="1400" b="1" i="0">
+                <a:solidFill>
+                  <a:srgbClr val="FFFFFF"/>
+                </a:solidFill>
+                <a:latin typeface="Yu Gothic"/>
+                <a:ea typeface="Yu Gothic"/>
+                <a:cs typeface="Yu Gothic"/>
+              </a:rPr>
+              <a:t>今週</a:t>
+            </a:r>
+          </a:p>
+        </p:txBody>
+      </p:sp>
+      <p:sp>
+        <p:nvSpPr>
+          <p:cNvPr id="8" name="TextBox 7"/>
+          <p:cNvSpPr txBox="1"/>
+          <p:nvPr/>
+        </p:nvSpPr>
+        <p:spPr>
+          <a:xfrm>
+            <a:off x="649224" y="2377440"/>
+            <a:ext cx="3163824" cy="438912"/>
+          </a:xfrm>
+          <a:prstGeom prst="rect">
+            <a:avLst/>
+          </a:prstGeom>
+          <a:noFill/>
+        </p:spPr>
+        <p:txBody>
+          <a:bodyPr wrap="square" lIns="0" rIns="0" tIns="0" bIns="0" anchor="ctr">
+            <a:spAutoFit/>
+          </a:bodyPr>
+          <a:lstStyle/>
+          <a:p>
+            <a:pPr algn="ctr">
+              <a:spcAft>
+                <a:spcPts val="0"/>
+              </a:spcAft>
+            </a:pPr>
+            <a:r>
+              <a:rPr sz="1050" b="1" i="0">
+                <a:solidFill>
+                  <a:srgbClr val="262630"/>
+                </a:solidFill>
+                <a:latin typeface="Yu Gothic"/>
+                <a:ea typeface="Yu Gothic"/>
+                <a:cs typeface="Yu Gothic"/>
+              </a:rPr>
+              <a:t>専任化の部門長合意・発足通知</a:t>
+            </a:r>
+          </a:p>
+        </p:txBody>
+      </p:sp>
+      <p:sp>
+        <p:nvSpPr>
+          <p:cNvPr id="9" name="Right Arrow 8"/>
+          <p:cNvSpPr/>
+          <p:nvPr/>
+        </p:nvSpPr>
+        <p:spPr>
+          <a:xfrm>
+            <a:off x="3995928" y="2267712"/>
+            <a:ext cx="256032" cy="237744"/>
+          </a:xfrm>
+          <a:prstGeom prst="rightArrow">
+            <a:avLst/>
+          </a:prstGeom>
+          <a:solidFill>
+            <a:srgbClr val="7823DC"/>
+          </a:solidFill>
+          <a:ln>
+            <a:noFill/>
+          </a:ln>
+          <a:effectLst/>
+        </p:spPr>
+        <p:style>
+          <a:lnRef idx="1">
+            <a:schemeClr val="accent1"/>
+          </a:lnRef>
+          <a:fillRef idx="3">
+            <a:schemeClr val="accent1"/>
+          </a:fillRef>
+          <a:effectRef idx="2">
+            <a:schemeClr val="accent1"/>
+          </a:effectRef>
+          <a:fontRef idx="minor">
+            <a:schemeClr val="lt1"/>
+          </a:fontRef>
+        </p:style>
+        <p:txBody>
+          <a:bodyPr rtlCol="0" anchor="ctr"/>
+          <a:lstStyle/>
+          <a:p>
+            <a:pPr algn="ctr"/>
+          </a:p>
+        </p:txBody>
+      </p:sp>
+      <p:sp>
+        <p:nvSpPr>
+          <p:cNvPr id="10" name="Rectangle 9"/>
+          <p:cNvSpPr/>
+          <p:nvPr/>
+        </p:nvSpPr>
+        <p:spPr>
+          <a:xfrm>
+            <a:off x="4288536" y="1920240"/>
+            <a:ext cx="3456432" cy="932688"/>
+          </a:xfrm>
+          <a:prstGeom prst="rect">
+            <a:avLst/>
+          </a:prstGeom>
+          <a:solidFill>
+            <a:srgbClr val="FFFFFF"/>
+          </a:solidFill>
+          <a:ln w="9525">
+            <a:solidFill>
+              <a:srgbClr val="D9D9E0"/>
+            </a:solidFill>
+          </a:ln>
+          <a:effectLst/>
+        </p:spPr>
+        <p:style>
+          <a:lnRef idx="1">
+            <a:schemeClr val="accent1"/>
+          </a:lnRef>
+          <a:fillRef idx="3">
+            <a:schemeClr val="accent1"/>
+          </a:fillRef>
+          <a:effectRef idx="2">
+            <a:schemeClr val="accent1"/>
+          </a:effectRef>
+          <a:fontRef idx="minor">
+            <a:schemeClr val="lt1"/>
+          </a:fontRef>
+        </p:style>
+        <p:txBody>
+          <a:bodyPr rtlCol="0" anchor="ctr"/>
+          <a:lstStyle/>
+          <a:p>
+            <a:pPr algn="ctr"/>
+          </a:p>
+        </p:txBody>
+      </p:sp>
+      <p:sp>
+        <p:nvSpPr>
+          <p:cNvPr id="11" name="Rectangle 10"/>
+          <p:cNvSpPr/>
+          <p:nvPr/>
+        </p:nvSpPr>
+        <p:spPr>
+          <a:xfrm>
+            <a:off x="4288536" y="1920240"/>
+            <a:ext cx="3456432" cy="384048"/>
+          </a:xfrm>
+          <a:prstGeom prst="rect">
+            <a:avLst/>
+          </a:prstGeom>
+          <a:solidFill>
+            <a:srgbClr val="7823DC"/>
+          </a:solidFill>
+          <a:ln>
+            <a:noFill/>
+          </a:ln>
+          <a:effectLst/>
+        </p:spPr>
+        <p:style>
+          <a:lnRef idx="1">
+            <a:schemeClr val="accent1"/>
+          </a:lnRef>
+          <a:fillRef idx="3">
+            <a:schemeClr val="accent1"/>
+          </a:fillRef>
+          <a:effectRef idx="2">
+            <a:schemeClr val="accent1"/>
+          </a:effectRef>
+          <a:fontRef idx="minor">
+            <a:schemeClr val="lt1"/>
+          </a:fontRef>
+        </p:style>
+        <p:txBody>
+          <a:bodyPr rtlCol="0" anchor="ctr"/>
+          <a:lstStyle/>
+          <a:p>
+            <a:pPr algn="ctr"/>
+          </a:p>
+        </p:txBody>
+      </p:sp>
+      <p:sp>
+        <p:nvSpPr>
+          <p:cNvPr id="12" name="TextBox 11"/>
+          <p:cNvSpPr txBox="1"/>
+          <p:nvPr/>
+        </p:nvSpPr>
+        <p:spPr>
+          <a:xfrm>
+            <a:off x="4288536" y="1965960"/>
+            <a:ext cx="3456432" cy="310896"/>
+          </a:xfrm>
+          <a:prstGeom prst="rect">
+            <a:avLst/>
+          </a:prstGeom>
+          <a:noFill/>
+        </p:spPr>
+        <p:txBody>
+          <a:bodyPr wrap="square" lIns="0" rIns="0" tIns="0" bIns="0" anchor="ctr">
+            <a:spAutoFit/>
+          </a:bodyPr>
+          <a:lstStyle/>
+          <a:p>
+            <a:pPr algn="ctr">
+              <a:spcAft>
+                <a:spcPts val="0"/>
+              </a:spcAft>
+            </a:pPr>
+            <a:r>
+              <a:rPr sz="1400" b="1" i="0">
+                <a:solidFill>
+                  <a:srgbClr val="FFFFFF"/>
+                </a:solidFill>
+                <a:latin typeface="Yu Gothic"/>
+                <a:ea typeface="Yu Gothic"/>
+                <a:cs typeface="Yu Gothic"/>
+              </a:rPr>
+              <a:t>来週</a:t>
+            </a:r>
+          </a:p>
+        </p:txBody>
+      </p:sp>
+      <p:sp>
+        <p:nvSpPr>
+          <p:cNvPr id="13" name="TextBox 12"/>
+          <p:cNvSpPr txBox="1"/>
+          <p:nvPr/>
+        </p:nvSpPr>
+        <p:spPr>
+          <a:xfrm>
+            <a:off x="4434840" y="2377440"/>
+            <a:ext cx="3163824" cy="438912"/>
+          </a:xfrm>
+          <a:prstGeom prst="rect">
+            <a:avLst/>
+          </a:prstGeom>
+          <a:noFill/>
+        </p:spPr>
+        <p:txBody>
+          <a:bodyPr wrap="square" lIns="0" rIns="0" tIns="0" bIns="0" anchor="ctr">
+            <a:spAutoFit/>
+          </a:bodyPr>
+          <a:lstStyle/>
+          <a:p>
+            <a:pPr algn="ctr">
+              <a:spcAft>
+                <a:spcPts val="0"/>
+              </a:spcAft>
+            </a:pPr>
+            <a:r>
+              <a:rPr sz="1050" b="1" i="0">
+                <a:solidFill>
+                  <a:srgbClr val="262630"/>
+                </a:solidFill>
+                <a:latin typeface="Yu Gothic"/>
+                <a:ea typeface="Yu Gothic"/>
+                <a:cs typeface="Yu Gothic"/>
+              </a:rPr>
+              <a:t>棚卸し確認会・データ整備の完了</a:t>
+            </a:r>
+          </a:p>
+        </p:txBody>
+      </p:sp>
+      <p:sp>
+        <p:nvSpPr>
+          <p:cNvPr id="14" name="Right Arrow 13"/>
+          <p:cNvSpPr/>
+          <p:nvPr/>
+        </p:nvSpPr>
+        <p:spPr>
+          <a:xfrm>
+            <a:off x="7781544" y="2267712"/>
+            <a:ext cx="256032" cy="237744"/>
+          </a:xfrm>
+          <a:prstGeom prst="rightArrow">
+            <a:avLst/>
+          </a:prstGeom>
+          <a:solidFill>
+            <a:srgbClr val="7823DC"/>
+          </a:solidFill>
+          <a:ln>
+            <a:noFill/>
+          </a:ln>
+          <a:effectLst/>
+        </p:spPr>
+        <p:style>
+          <a:lnRef idx="1">
+            <a:schemeClr val="accent1"/>
+          </a:lnRef>
+          <a:fillRef idx="3">
+            <a:schemeClr val="accent1"/>
+          </a:fillRef>
+          <a:effectRef idx="2">
+            <a:schemeClr val="accent1"/>
+          </a:effectRef>
+          <a:fontRef idx="minor">
+            <a:schemeClr val="lt1"/>
+          </a:fontRef>
+        </p:style>
+        <p:txBody>
+          <a:bodyPr rtlCol="0" anchor="ctr"/>
+          <a:lstStyle/>
+          <a:p>
+            <a:pPr algn="ctr"/>
+          </a:p>
+        </p:txBody>
+      </p:sp>
+      <p:sp>
+        <p:nvSpPr>
+          <p:cNvPr id="15" name="Rectangle 14"/>
+          <p:cNvSpPr/>
+          <p:nvPr/>
+        </p:nvSpPr>
+        <p:spPr>
+          <a:xfrm>
+            <a:off x="8074152" y="1920240"/>
+            <a:ext cx="3456432" cy="932688"/>
+          </a:xfrm>
+          <a:prstGeom prst="rect">
+            <a:avLst/>
+          </a:prstGeom>
+          <a:solidFill>
+            <a:srgbClr val="FFFFFF"/>
+          </a:solidFill>
+          <a:ln w="9525">
+            <a:solidFill>
+              <a:srgbClr val="D9D9E0"/>
+            </a:solidFill>
+          </a:ln>
+          <a:effectLst/>
+        </p:spPr>
+        <p:style>
+          <a:lnRef idx="1">
+            <a:schemeClr val="accent1"/>
+          </a:lnRef>
+          <a:fillRef idx="3">
+            <a:schemeClr val="accent1"/>
+          </a:fillRef>
+          <a:effectRef idx="2">
+            <a:schemeClr val="accent1"/>
+          </a:effectRef>
+          <a:fontRef idx="minor">
+            <a:schemeClr val="lt1"/>
+          </a:fontRef>
+        </p:style>
+        <p:txBody>
+          <a:bodyPr rtlCol="0" anchor="ctr"/>
+          <a:lstStyle/>
+          <a:p>
+            <a:pPr algn="ctr"/>
+          </a:p>
+        </p:txBody>
+      </p:sp>
+      <p:sp>
+        <p:nvSpPr>
+          <p:cNvPr id="16" name="Rectangle 15"/>
+          <p:cNvSpPr/>
+          <p:nvPr/>
+        </p:nvSpPr>
+        <p:spPr>
+          <a:xfrm>
+            <a:off x="8074152" y="1920240"/>
+            <a:ext cx="3456432" cy="384048"/>
           </a:xfrm>
           <a:prstGeom prst="rect">
             <a:avLst/>
@@ -4436,6 +6509,430 @@
       </p:sp>
       <p:sp>
         <p:nvSpPr>
+          <p:cNvPr id="17" name="TextBox 16"/>
+          <p:cNvSpPr txBox="1"/>
+          <p:nvPr/>
+        </p:nvSpPr>
+        <p:spPr>
+          <a:xfrm>
+            <a:off x="8074152" y="1965960"/>
+            <a:ext cx="3456432" cy="310896"/>
+          </a:xfrm>
+          <a:prstGeom prst="rect">
+            <a:avLst/>
+          </a:prstGeom>
+          <a:noFill/>
+        </p:spPr>
+        <p:txBody>
+          <a:bodyPr wrap="square" lIns="0" rIns="0" tIns="0" bIns="0" anchor="ctr">
+            <a:spAutoFit/>
+          </a:bodyPr>
+          <a:lstStyle/>
+          <a:p>
+            <a:pPr algn="ctr">
+              <a:spcAft>
+                <a:spcPts val="0"/>
+              </a:spcAft>
+            </a:pPr>
+            <a:r>
+              <a:rPr sz="1400" b="1" i="0">
+                <a:solidFill>
+                  <a:srgbClr val="FFFFFF"/>
+                </a:solidFill>
+                <a:latin typeface="Yu Gothic"/>
+                <a:ea typeface="Yu Gothic"/>
+                <a:cs typeface="Yu Gothic"/>
+              </a:rPr>
+              <a:t>以降</a:t>
+            </a:r>
+          </a:p>
+        </p:txBody>
+      </p:sp>
+      <p:sp>
+        <p:nvSpPr>
+          <p:cNvPr id="18" name="TextBox 17"/>
+          <p:cNvSpPr txBox="1"/>
+          <p:nvPr/>
+        </p:nvSpPr>
+        <p:spPr>
+          <a:xfrm>
+            <a:off x="8220456" y="2377440"/>
+            <a:ext cx="3163824" cy="438912"/>
+          </a:xfrm>
+          <a:prstGeom prst="rect">
+            <a:avLst/>
+          </a:prstGeom>
+          <a:noFill/>
+        </p:spPr>
+        <p:txBody>
+          <a:bodyPr wrap="square" lIns="0" rIns="0" tIns="0" bIns="0" anchor="ctr">
+            <a:spAutoFit/>
+          </a:bodyPr>
+          <a:lstStyle/>
+          <a:p>
+            <a:pPr algn="ctr">
+              <a:spcAft>
+                <a:spcPts val="0"/>
+              </a:spcAft>
+            </a:pPr>
+            <a:r>
+              <a:rPr sz="1050" b="1" i="0">
+                <a:solidFill>
+                  <a:srgbClr val="262630"/>
+                </a:solidFill>
+                <a:latin typeface="Yu Gothic"/>
+                <a:ea typeface="Yu Gothic"/>
+                <a:cs typeface="Yu Gothic"/>
+              </a:rPr>
+              <a:t>分科会×3の定常運転開始、初回点検会議へ</a:t>
+            </a:r>
+          </a:p>
+        </p:txBody>
+      </p:sp>
+      <p:sp>
+        <p:nvSpPr>
+          <p:cNvPr id="19" name="Rectangle 18"/>
+          <p:cNvSpPr/>
+          <p:nvPr/>
+        </p:nvSpPr>
+        <p:spPr>
+          <a:xfrm>
+            <a:off x="502920" y="3145536"/>
+            <a:ext cx="5504688" cy="1188720"/>
+          </a:xfrm>
+          <a:prstGeom prst="rect">
+            <a:avLst/>
+          </a:prstGeom>
+          <a:solidFill>
+            <a:srgbClr val="FFFFFF"/>
+          </a:solidFill>
+          <a:ln w="9525">
+            <a:solidFill>
+              <a:srgbClr val="D9D9E0"/>
+            </a:solidFill>
+          </a:ln>
+          <a:effectLst/>
+        </p:spPr>
+        <p:style>
+          <a:lnRef idx="1">
+            <a:schemeClr val="accent1"/>
+          </a:lnRef>
+          <a:fillRef idx="3">
+            <a:schemeClr val="accent1"/>
+          </a:fillRef>
+          <a:effectRef idx="2">
+            <a:schemeClr val="accent1"/>
+          </a:effectRef>
+          <a:fontRef idx="minor">
+            <a:schemeClr val="lt1"/>
+          </a:fontRef>
+        </p:style>
+        <p:txBody>
+          <a:bodyPr rtlCol="0" anchor="ctr"/>
+          <a:lstStyle/>
+          <a:p>
+            <a:pPr algn="ctr"/>
+          </a:p>
+        </p:txBody>
+      </p:sp>
+      <p:sp>
+        <p:nvSpPr>
+          <p:cNvPr id="20" name="Rectangle 19"/>
+          <p:cNvSpPr/>
+          <p:nvPr/>
+        </p:nvSpPr>
+        <p:spPr>
+          <a:xfrm>
+            <a:off x="502920" y="3145536"/>
+            <a:ext cx="5504688" cy="54864"/>
+          </a:xfrm>
+          <a:prstGeom prst="rect">
+            <a:avLst/>
+          </a:prstGeom>
+          <a:solidFill>
+            <a:srgbClr val="3A106E"/>
+          </a:solidFill>
+          <a:ln>
+            <a:noFill/>
+          </a:ln>
+          <a:effectLst/>
+        </p:spPr>
+        <p:style>
+          <a:lnRef idx="1">
+            <a:schemeClr val="accent1"/>
+          </a:lnRef>
+          <a:fillRef idx="3">
+            <a:schemeClr val="accent1"/>
+          </a:fillRef>
+          <a:effectRef idx="2">
+            <a:schemeClr val="accent1"/>
+          </a:effectRef>
+          <a:fontRef idx="minor">
+            <a:schemeClr val="lt1"/>
+          </a:fontRef>
+        </p:style>
+        <p:txBody>
+          <a:bodyPr rtlCol="0" anchor="ctr"/>
+          <a:lstStyle/>
+          <a:p>
+            <a:pPr algn="ctr"/>
+          </a:p>
+        </p:txBody>
+      </p:sp>
+      <p:sp>
+        <p:nvSpPr>
+          <p:cNvPr id="21" name="TextBox 20"/>
+          <p:cNvSpPr txBox="1"/>
+          <p:nvPr/>
+        </p:nvSpPr>
+        <p:spPr>
+          <a:xfrm>
+            <a:off x="722376" y="3346704"/>
+            <a:ext cx="5065776" cy="822960"/>
+          </a:xfrm>
+          <a:prstGeom prst="rect">
+            <a:avLst/>
+          </a:prstGeom>
+          <a:noFill/>
+        </p:spPr>
+        <p:txBody>
+          <a:bodyPr wrap="square" lIns="0" rIns="0" tIns="0" bIns="0">
+            <a:spAutoFit/>
+          </a:bodyPr>
+          <a:lstStyle/>
+          <a:p>
+            <a:pPr algn="l">
+              <a:spcAft>
+                <a:spcPts val="600"/>
+              </a:spcAft>
+            </a:pPr>
+            <a:r>
+              <a:rPr sz="1300" b="1" i="0">
+                <a:solidFill>
+                  <a:srgbClr val="3A106E"/>
+                </a:solidFill>
+                <a:latin typeface="Yu Gothic"/>
+                <a:ea typeface="Yu Gothic"/>
+                <a:cs typeface="Yu Gothic"/>
+              </a:rPr>
+              <a:t>① 発足の後ろ盾</a:t>
+            </a:r>
+          </a:p>
+          <a:p>
+            <a:pPr algn="l">
+              <a:spcAft>
+                <a:spcPts val="0"/>
+              </a:spcAft>
+            </a:pPr>
+            <a:r>
+              <a:rPr sz="1100" b="0" i="0">
+                <a:solidFill>
+                  <a:srgbClr val="262630"/>
+                </a:solidFill>
+                <a:latin typeface="Yu Gothic"/>
+                <a:ea typeface="Yu Gothic"/>
+                <a:cs typeface="Yu Gothic"/>
+              </a:rPr>
+              <a:t>全社への発足通知に際し、会長からも一言の後押しをいただきたい</a:t>
+            </a:r>
+          </a:p>
+        </p:txBody>
+      </p:sp>
+      <p:sp>
+        <p:nvSpPr>
+          <p:cNvPr id="22" name="Rectangle 21"/>
+          <p:cNvSpPr/>
+          <p:nvPr/>
+        </p:nvSpPr>
+        <p:spPr>
+          <a:xfrm>
+            <a:off x="6181344" y="3145536"/>
+            <a:ext cx="5504688" cy="1188720"/>
+          </a:xfrm>
+          <a:prstGeom prst="rect">
+            <a:avLst/>
+          </a:prstGeom>
+          <a:solidFill>
+            <a:srgbClr val="FFFFFF"/>
+          </a:solidFill>
+          <a:ln w="9525">
+            <a:solidFill>
+              <a:srgbClr val="D9D9E0"/>
+            </a:solidFill>
+          </a:ln>
+          <a:effectLst/>
+        </p:spPr>
+        <p:style>
+          <a:lnRef idx="1">
+            <a:schemeClr val="accent1"/>
+          </a:lnRef>
+          <a:fillRef idx="3">
+            <a:schemeClr val="accent1"/>
+          </a:fillRef>
+          <a:effectRef idx="2">
+            <a:schemeClr val="accent1"/>
+          </a:effectRef>
+          <a:fontRef idx="minor">
+            <a:schemeClr val="lt1"/>
+          </a:fontRef>
+        </p:style>
+        <p:txBody>
+          <a:bodyPr rtlCol="0" anchor="ctr"/>
+          <a:lstStyle/>
+          <a:p>
+            <a:pPr algn="ctr"/>
+          </a:p>
+        </p:txBody>
+      </p:sp>
+      <p:sp>
+        <p:nvSpPr>
+          <p:cNvPr id="23" name="Rectangle 22"/>
+          <p:cNvSpPr/>
+          <p:nvPr/>
+        </p:nvSpPr>
+        <p:spPr>
+          <a:xfrm>
+            <a:off x="6181344" y="3145536"/>
+            <a:ext cx="5504688" cy="54864"/>
+          </a:xfrm>
+          <a:prstGeom prst="rect">
+            <a:avLst/>
+          </a:prstGeom>
+          <a:solidFill>
+            <a:srgbClr val="3A106E"/>
+          </a:solidFill>
+          <a:ln>
+            <a:noFill/>
+          </a:ln>
+          <a:effectLst/>
+        </p:spPr>
+        <p:style>
+          <a:lnRef idx="1">
+            <a:schemeClr val="accent1"/>
+          </a:lnRef>
+          <a:fillRef idx="3">
+            <a:schemeClr val="accent1"/>
+          </a:fillRef>
+          <a:effectRef idx="2">
+            <a:schemeClr val="accent1"/>
+          </a:effectRef>
+          <a:fontRef idx="minor">
+            <a:schemeClr val="lt1"/>
+          </a:fontRef>
+        </p:style>
+        <p:txBody>
+          <a:bodyPr rtlCol="0" anchor="ctr"/>
+          <a:lstStyle/>
+          <a:p>
+            <a:pPr algn="ctr"/>
+          </a:p>
+        </p:txBody>
+      </p:sp>
+      <p:sp>
+        <p:nvSpPr>
+          <p:cNvPr id="24" name="TextBox 23"/>
+          <p:cNvSpPr txBox="1"/>
+          <p:nvPr/>
+        </p:nvSpPr>
+        <p:spPr>
+          <a:xfrm>
+            <a:off x="6400800" y="3346704"/>
+            <a:ext cx="5065776" cy="822960"/>
+          </a:xfrm>
+          <a:prstGeom prst="rect">
+            <a:avLst/>
+          </a:prstGeom>
+          <a:noFill/>
+        </p:spPr>
+        <p:txBody>
+          <a:bodyPr wrap="square" lIns="0" rIns="0" tIns="0" bIns="0">
+            <a:spAutoFit/>
+          </a:bodyPr>
+          <a:lstStyle/>
+          <a:p>
+            <a:pPr algn="l">
+              <a:spcAft>
+                <a:spcPts val="600"/>
+              </a:spcAft>
+            </a:pPr>
+            <a:r>
+              <a:rPr sz="1300" b="1" i="0">
+                <a:solidFill>
+                  <a:srgbClr val="3A106E"/>
+                </a:solidFill>
+                <a:latin typeface="Yu Gothic"/>
+                <a:ea typeface="Yu Gothic"/>
+                <a:cs typeface="Yu Gothic"/>
+              </a:rPr>
+              <a:t>② 専任体制の維持</a:t>
+            </a:r>
+          </a:p>
+          <a:p>
+            <a:pPr algn="l">
+              <a:spcAft>
+                <a:spcPts val="0"/>
+              </a:spcAft>
+            </a:pPr>
+            <a:r>
+              <a:rPr sz="1100" b="0" i="0">
+                <a:solidFill>
+                  <a:srgbClr val="262630"/>
+                </a:solidFill>
+                <a:latin typeface="Yu Gothic"/>
+                <a:ea typeface="Yu Gothic"/>
+                <a:cs typeface="Yu Gothic"/>
+              </a:rPr>
+              <a:t>途中で部門都合により専任が崩れそうな場合の後押し</a:t>
+            </a:r>
+          </a:p>
+        </p:txBody>
+      </p:sp>
+      <p:sp>
+        <p:nvSpPr>
+          <p:cNvPr id="25" name="Rectangle 24"/>
+          <p:cNvSpPr/>
+          <p:nvPr/>
+        </p:nvSpPr>
+        <p:spPr>
+          <a:xfrm>
+            <a:off x="502920" y="4626864"/>
+            <a:ext cx="11183112" cy="969264"/>
+          </a:xfrm>
+          <a:prstGeom prst="rect">
+            <a:avLst/>
+          </a:prstGeom>
+          <a:solidFill>
+            <a:srgbClr val="3A106E"/>
+          </a:solidFill>
+          <a:ln>
+            <a:noFill/>
+          </a:ln>
+          <a:effectLst/>
+        </p:spPr>
+        <p:style>
+          <a:lnRef idx="1">
+            <a:schemeClr val="accent1"/>
+          </a:lnRef>
+          <a:fillRef idx="3">
+            <a:schemeClr val="accent1"/>
+          </a:fillRef>
+          <a:effectRef idx="2">
+            <a:schemeClr val="accent1"/>
+          </a:effectRef>
+          <a:fontRef idx="minor">
+            <a:schemeClr val="lt1"/>
+          </a:fontRef>
+        </p:style>
+        <p:txBody>
+          <a:bodyPr rtlCol="0" anchor="ctr"/>
+          <a:lstStyle/>
+          <a:p>
+            <a:pPr algn="ctr"/>
+          </a:p>
+        </p:txBody>
+      </p:sp>
+      <p:sp>
+        <p:nvSpPr>
           <p:cNvPr id="26" name="Rectangle 25"/>
           <p:cNvSpPr/>
           <p:nvPr/>
@@ -4658,7 +7155,7 @@
                 <a:ea typeface="Yu Gothic"/>
                 <a:cs typeface="Yu Gothic"/>
               </a:rPr>
-              <a:t>10</a:t>
+              <a:t>12</a:t>
             </a:r>
           </a:p>
         </p:txBody>
@@ -11331,7 +13828,7 @@
                 <a:ea typeface="Yu Gothic"/>
                 <a:cs typeface="Yu Gothic"/>
               </a:rPr>
-              <a:t>運用</a:t>
+              <a:t>会議体設計</a:t>
             </a:r>
           </a:p>
         </p:txBody>
@@ -11372,7 +13869,7 @@
                 <a:ea typeface="Yu Gothic"/>
                 <a:cs typeface="Yu Gothic"/>
               </a:rPr>
-              <a:t>週次の運転リズム</a:t>
+              <a:t>分科会と戦略会議の関係 — 論点が決まっていく流れ</a:t>
             </a:r>
           </a:p>
         </p:txBody>
@@ -11429,8 +13926,199 @@
         </p:nvSpPr>
         <p:spPr>
           <a:xfrm>
-            <a:off x="502920" y="2249424"/>
-            <a:ext cx="2112264" cy="2798064"/>
+            <a:off x="502920" y="1755648"/>
+            <a:ext cx="7680960" cy="987552"/>
+          </a:xfrm>
+          <a:prstGeom prst="rect">
+            <a:avLst/>
+          </a:prstGeom>
+          <a:solidFill>
+            <a:srgbClr val="3A106E"/>
+          </a:solidFill>
+          <a:ln>
+            <a:noFill/>
+          </a:ln>
+          <a:effectLst/>
+        </p:spPr>
+        <p:style>
+          <a:lnRef idx="1">
+            <a:schemeClr val="accent1"/>
+          </a:lnRef>
+          <a:fillRef idx="3">
+            <a:schemeClr val="accent1"/>
+          </a:fillRef>
+          <a:effectRef idx="2">
+            <a:schemeClr val="accent1"/>
+          </a:effectRef>
+          <a:fontRef idx="minor">
+            <a:schemeClr val="lt1"/>
+          </a:fontRef>
+        </p:style>
+        <p:txBody>
+          <a:bodyPr rtlCol="0" anchor="ctr"/>
+          <a:lstStyle/>
+          <a:p>
+            <a:pPr algn="ctr"/>
+          </a:p>
+        </p:txBody>
+      </p:sp>
+      <p:sp>
+        <p:nvSpPr>
+          <p:cNvPr id="6" name="Rectangle 5"/>
+          <p:cNvSpPr/>
+          <p:nvPr/>
+        </p:nvSpPr>
+        <p:spPr>
+          <a:xfrm>
+            <a:off x="502920" y="1755648"/>
+            <a:ext cx="82296" cy="987552"/>
+          </a:xfrm>
+          <a:prstGeom prst="rect">
+            <a:avLst/>
+          </a:prstGeom>
+          <a:solidFill>
+            <a:srgbClr val="7823DC"/>
+          </a:solidFill>
+          <a:ln>
+            <a:noFill/>
+          </a:ln>
+          <a:effectLst/>
+        </p:spPr>
+        <p:style>
+          <a:lnRef idx="1">
+            <a:schemeClr val="accent1"/>
+          </a:lnRef>
+          <a:fillRef idx="3">
+            <a:schemeClr val="accent1"/>
+          </a:fillRef>
+          <a:effectRef idx="2">
+            <a:schemeClr val="accent1"/>
+          </a:effectRef>
+          <a:fontRef idx="minor">
+            <a:schemeClr val="lt1"/>
+          </a:fontRef>
+        </p:style>
+        <p:txBody>
+          <a:bodyPr rtlCol="0" anchor="ctr"/>
+          <a:lstStyle/>
+          <a:p>
+            <a:pPr algn="ctr"/>
+          </a:p>
+        </p:txBody>
+      </p:sp>
+      <p:sp>
+        <p:nvSpPr>
+          <p:cNvPr id="7" name="TextBox 6"/>
+          <p:cNvSpPr txBox="1"/>
+          <p:nvPr/>
+        </p:nvSpPr>
+        <p:spPr>
+          <a:xfrm>
+            <a:off x="731520" y="1847088"/>
+            <a:ext cx="7315200" cy="804672"/>
+          </a:xfrm>
+          <a:prstGeom prst="rect">
+            <a:avLst/>
+          </a:prstGeom>
+          <a:noFill/>
+        </p:spPr>
+        <p:txBody>
+          <a:bodyPr wrap="square" lIns="0" rIns="0" tIns="0" bIns="0" anchor="ctr">
+            <a:spAutoFit/>
+          </a:bodyPr>
+          <a:lstStyle/>
+          <a:p>
+            <a:pPr algn="l">
+              <a:spcAft>
+                <a:spcPts val="300"/>
+              </a:spcAft>
+            </a:pPr>
+            <a:r>
+              <a:rPr sz="1250" b="1" i="0">
+                <a:solidFill>
+                  <a:srgbClr val="FFFFFF"/>
+                </a:solidFill>
+                <a:latin typeface="Yu Gothic"/>
+                <a:ea typeface="Yu Gothic"/>
+                <a:cs typeface="Yu Gothic"/>
+              </a:rPr>
+              <a:t>点検会議（月次60分・議長: 山本会長）</a:t>
+            </a:r>
+          </a:p>
+          <a:p>
+            <a:pPr algn="l">
+              <a:spcAft>
+                <a:spcPts val="0"/>
+              </a:spcAft>
+            </a:pPr>
+            <a:r>
+              <a:rPr sz="1000" b="1" i="0">
+                <a:solidFill>
+                  <a:srgbClr val="E0D2F6"/>
+                </a:solidFill>
+                <a:latin typeface="Yu Gothic"/>
+                <a:ea typeface="Yu Gothic"/>
+                <a:cs typeface="Yu Gothic"/>
+              </a:rPr>
+              <a:t>役割: 会長にしか決められないことだけを、選択肢と推奨案の形で（1回3件以内）</a:t>
+            </a:r>
+          </a:p>
+        </p:txBody>
+      </p:sp>
+      <p:sp>
+        <p:nvSpPr>
+          <p:cNvPr id="8" name="Up Arrow 7"/>
+          <p:cNvSpPr/>
+          <p:nvPr/>
+        </p:nvSpPr>
+        <p:spPr>
+          <a:xfrm>
+            <a:off x="4206240" y="2798064"/>
+            <a:ext cx="292608" cy="274320"/>
+          </a:xfrm>
+          <a:prstGeom prst="upArrow">
+            <a:avLst/>
+          </a:prstGeom>
+          <a:solidFill>
+            <a:srgbClr val="3A106E"/>
+          </a:solidFill>
+          <a:ln>
+            <a:noFill/>
+          </a:ln>
+          <a:effectLst/>
+        </p:spPr>
+        <p:style>
+          <a:lnRef idx="1">
+            <a:schemeClr val="accent1"/>
+          </a:lnRef>
+          <a:fillRef idx="3">
+            <a:schemeClr val="accent1"/>
+          </a:fillRef>
+          <a:effectRef idx="2">
+            <a:schemeClr val="accent1"/>
+          </a:effectRef>
+          <a:fontRef idx="minor">
+            <a:schemeClr val="lt1"/>
+          </a:fontRef>
+        </p:style>
+        <p:txBody>
+          <a:bodyPr rtlCol="0" anchor="ctr"/>
+          <a:lstStyle/>
+          <a:p>
+            <a:pPr algn="ctr"/>
+          </a:p>
+        </p:txBody>
+      </p:sp>
+      <p:sp>
+        <p:nvSpPr>
+          <p:cNvPr id="9" name="Rectangle 8"/>
+          <p:cNvSpPr/>
+          <p:nvPr/>
+        </p:nvSpPr>
+        <p:spPr>
+          <a:xfrm>
+            <a:off x="502920" y="3127248"/>
+            <a:ext cx="7680960" cy="950976"/>
           </a:xfrm>
           <a:prstGeom prst="rect">
             <a:avLst/>
@@ -11469,20 +14157,20 @@
       </p:sp>
       <p:sp>
         <p:nvSpPr>
-          <p:cNvPr id="6" name="Rectangle 5"/>
+          <p:cNvPr id="10" name="Rectangle 9"/>
           <p:cNvSpPr/>
           <p:nvPr/>
         </p:nvSpPr>
         <p:spPr>
           <a:xfrm>
-            <a:off x="502920" y="2249424"/>
-            <a:ext cx="2112264" cy="786384"/>
+            <a:off x="502920" y="3127248"/>
+            <a:ext cx="82296" cy="950976"/>
           </a:xfrm>
           <a:prstGeom prst="rect">
             <a:avLst/>
           </a:prstGeom>
           <a:solidFill>
-            <a:srgbClr val="3A106E"/>
+            <a:srgbClr val="7823DC"/>
           </a:solidFill>
           <a:ln>
             <a:noFill/>
@@ -11513,14 +14201,14 @@
       </p:sp>
       <p:sp>
         <p:nvSpPr>
-          <p:cNvPr id="7" name="TextBox 6"/>
+          <p:cNvPr id="11" name="TextBox 10"/>
           <p:cNvSpPr txBox="1"/>
           <p:nvPr/>
         </p:nvSpPr>
         <p:spPr>
           <a:xfrm>
-            <a:off x="502920" y="2322576"/>
-            <a:ext cx="2112264" cy="658368"/>
+            <a:off x="731520" y="3218688"/>
+            <a:ext cx="7315200" cy="768096"/>
           </a:xfrm>
           <a:prstGeom prst="rect">
             <a:avLst/>
@@ -11533,94 +14221,115 @@
           </a:bodyPr>
           <a:lstStyle/>
           <a:p>
-            <a:pPr algn="ctr">
+            <a:pPr algn="l">
+              <a:spcAft>
+                <a:spcPts val="300"/>
+              </a:spcAft>
+            </a:pPr>
+            <a:r>
+              <a:rPr sz="1250" b="1" i="0">
+                <a:solidFill>
+                  <a:srgbClr val="3A106E"/>
+                </a:solidFill>
+                <a:latin typeface="Yu Gothic"/>
+                <a:ea typeface="Yu Gothic"/>
+                <a:cs typeface="Yu Gothic"/>
+              </a:rPr>
+              <a:t>戦略会議（隔週90分・議長: 永竹社長）</a:t>
+            </a:r>
+          </a:p>
+          <a:p>
+            <a:pPr algn="l">
+              <a:spcAft>
+                <a:spcPts val="100"/>
+              </a:spcAft>
+            </a:pPr>
+            <a:r>
+              <a:rPr sz="1000" b="0" i="0">
+                <a:solidFill>
+                  <a:srgbClr val="262630"/>
+                </a:solidFill>
+                <a:latin typeface="Yu Gothic"/>
+                <a:ea typeface="Yu Gothic"/>
+                <a:cs typeface="Yu Gothic"/>
+              </a:rPr>
+              <a:t>役割: 決め切る場 — リソース配分・部門横断・ルール制定</a:t>
+            </a:r>
+          </a:p>
+          <a:p>
+            <a:pPr algn="l">
               <a:spcAft>
                 <a:spcPts val="0"/>
               </a:spcAft>
             </a:pPr>
             <a:r>
-              <a:rPr sz="2600" b="1" i="0">
-                <a:solidFill>
-                  <a:srgbClr val="FFFFFF"/>
+              <a:rPr sz="1000" b="1" i="0">
+                <a:solidFill>
+                  <a:srgbClr val="7823DC"/>
                 </a:solidFill>
                 <a:latin typeface="Yu Gothic"/>
                 <a:ea typeface="Yu Gothic"/>
                 <a:cs typeface="Yu Gothic"/>
               </a:rPr>
-              <a:t>月</a:t>
-            </a:r>
-          </a:p>
-        </p:txBody>
-      </p:sp>
-      <p:sp>
-        <p:nvSpPr>
-          <p:cNvPr id="8" name="TextBox 7"/>
-          <p:cNvSpPr txBox="1"/>
-          <p:nvPr/>
-        </p:nvSpPr>
-        <p:spPr>
-          <a:xfrm>
-            <a:off x="630936" y="3291839"/>
-            <a:ext cx="1856232" cy="1554480"/>
-          </a:xfrm>
-          <a:prstGeom prst="rect">
-            <a:avLst/>
-          </a:prstGeom>
-          <a:noFill/>
-        </p:spPr>
-        <p:txBody>
-          <a:bodyPr wrap="square" lIns="0" rIns="0" tIns="0" bIns="0" anchor="t">
-            <a:spAutoFit/>
-          </a:bodyPr>
-          <a:lstStyle/>
-          <a:p>
-            <a:pPr algn="ctr">
-              <a:spcAft>
-                <a:spcPts val="200"/>
-              </a:spcAft>
-            </a:pPr>
-            <a:r>
-              <a:rPr sz="1150" b="1" i="0">
-                <a:solidFill>
-                  <a:srgbClr val="3A106E"/>
-                </a:solidFill>
-                <a:latin typeface="Yu Gothic"/>
-                <a:ea typeface="Yu Gothic"/>
-                <a:cs typeface="Yu Gothic"/>
-              </a:rPr>
-              <a:t>スケジュール確定</a:t>
-            </a:r>
-          </a:p>
-          <a:p>
-            <a:pPr algn="ctr">
-              <a:spcAft>
-                <a:spcPts val="200"/>
-              </a:spcAft>
-            </a:pPr>
-            <a:r>
-              <a:rPr sz="1150" b="0" i="0">
-                <a:solidFill>
-                  <a:srgbClr val="262630"/>
-                </a:solidFill>
-                <a:latin typeface="Yu Gothic"/>
-                <a:ea typeface="Yu Gothic"/>
-                <a:cs typeface="Yu Gothic"/>
-              </a:rPr>
-              <a:t>データ週次更新</a:t>
-            </a:r>
-          </a:p>
-        </p:txBody>
-      </p:sp>
-      <p:sp>
-        <p:nvSpPr>
-          <p:cNvPr id="9" name="Rectangle 8"/>
+              <a:t>点検会議に上げる論点を、ここで選別する</a:t>
+            </a:r>
+          </a:p>
+        </p:txBody>
+      </p:sp>
+      <p:sp>
+        <p:nvSpPr>
+          <p:cNvPr id="12" name="Up Arrow 11"/>
           <p:cNvSpPr/>
           <p:nvPr/>
         </p:nvSpPr>
         <p:spPr>
           <a:xfrm>
-            <a:off x="2770632" y="2249424"/>
-            <a:ext cx="2112264" cy="2798064"/>
+            <a:off x="4206240" y="4114800"/>
+            <a:ext cx="292608" cy="274320"/>
+          </a:xfrm>
+          <a:prstGeom prst="upArrow">
+            <a:avLst/>
+          </a:prstGeom>
+          <a:solidFill>
+            <a:srgbClr val="7823DC"/>
+          </a:solidFill>
+          <a:ln>
+            <a:noFill/>
+          </a:ln>
+          <a:effectLst/>
+        </p:spPr>
+        <p:style>
+          <a:lnRef idx="1">
+            <a:schemeClr val="accent1"/>
+          </a:lnRef>
+          <a:fillRef idx="3">
+            <a:schemeClr val="accent1"/>
+          </a:fillRef>
+          <a:effectRef idx="2">
+            <a:schemeClr val="accent1"/>
+          </a:effectRef>
+          <a:fontRef idx="minor">
+            <a:schemeClr val="lt1"/>
+          </a:fontRef>
+        </p:style>
+        <p:txBody>
+          <a:bodyPr rtlCol="0" anchor="ctr"/>
+          <a:lstStyle/>
+          <a:p>
+            <a:pPr algn="ctr"/>
+          </a:p>
+        </p:txBody>
+      </p:sp>
+      <p:sp>
+        <p:nvSpPr>
+          <p:cNvPr id="13" name="Rectangle 12"/>
+          <p:cNvSpPr/>
+          <p:nvPr/>
+        </p:nvSpPr>
+        <p:spPr>
+          <a:xfrm>
+            <a:off x="502920" y="4443984"/>
+            <a:ext cx="7680960" cy="1042415"/>
           </a:xfrm>
           <a:prstGeom prst="rect">
             <a:avLst/>
@@ -11659,14 +14368,181 @@
       </p:sp>
       <p:sp>
         <p:nvSpPr>
-          <p:cNvPr id="10" name="Rectangle 9"/>
+          <p:cNvPr id="14" name="Rectangle 13"/>
           <p:cNvSpPr/>
           <p:nvPr/>
         </p:nvSpPr>
         <p:spPr>
           <a:xfrm>
-            <a:off x="2770632" y="2249424"/>
-            <a:ext cx="2112264" cy="786384"/>
+            <a:off x="502920" y="4443984"/>
+            <a:ext cx="82296" cy="1042415"/>
+          </a:xfrm>
+          <a:prstGeom prst="rect">
+            <a:avLst/>
+          </a:prstGeom>
+          <a:solidFill>
+            <a:srgbClr val="6B5E8A"/>
+          </a:solidFill>
+          <a:ln>
+            <a:noFill/>
+          </a:ln>
+          <a:effectLst/>
+        </p:spPr>
+        <p:style>
+          <a:lnRef idx="1">
+            <a:schemeClr val="accent1"/>
+          </a:lnRef>
+          <a:fillRef idx="3">
+            <a:schemeClr val="accent1"/>
+          </a:fillRef>
+          <a:effectRef idx="2">
+            <a:schemeClr val="accent1"/>
+          </a:effectRef>
+          <a:fontRef idx="minor">
+            <a:schemeClr val="lt1"/>
+          </a:fontRef>
+        </p:style>
+        <p:txBody>
+          <a:bodyPr rtlCol="0" anchor="ctr"/>
+          <a:lstStyle/>
+          <a:p>
+            <a:pPr algn="ctr"/>
+          </a:p>
+        </p:txBody>
+      </p:sp>
+      <p:sp>
+        <p:nvSpPr>
+          <p:cNvPr id="15" name="TextBox 14"/>
+          <p:cNvSpPr txBox="1"/>
+          <p:nvPr/>
+        </p:nvSpPr>
+        <p:spPr>
+          <a:xfrm>
+            <a:off x="731520" y="4535424"/>
+            <a:ext cx="7315200" cy="859535"/>
+          </a:xfrm>
+          <a:prstGeom prst="rect">
+            <a:avLst/>
+          </a:prstGeom>
+          <a:noFill/>
+        </p:spPr>
+        <p:txBody>
+          <a:bodyPr wrap="square" lIns="0" rIns="0" tIns="0" bIns="0" anchor="ctr">
+            <a:spAutoFit/>
+          </a:bodyPr>
+          <a:lstStyle/>
+          <a:p>
+            <a:pPr algn="l">
+              <a:spcAft>
+                <a:spcPts val="300"/>
+              </a:spcAft>
+            </a:pPr>
+            <a:r>
+              <a:rPr sz="1250" b="1" i="0">
+                <a:solidFill>
+                  <a:srgbClr val="3A106E"/>
+                </a:solidFill>
+                <a:latin typeface="Yu Gothic"/>
+                <a:ea typeface="Yu Gothic"/>
+                <a:cs typeface="Yu Gothic"/>
+              </a:rPr>
+              <a:t>分科会 ×3（週次75分）　リーダー: 黒澤・南谷・高橋</a:t>
+            </a:r>
+          </a:p>
+          <a:p>
+            <a:pPr algn="l">
+              <a:spcAft>
+                <a:spcPts val="100"/>
+              </a:spcAft>
+            </a:pPr>
+            <a:r>
+              <a:rPr sz="1000" b="0" i="0">
+                <a:solidFill>
+                  <a:srgbClr val="262630"/>
+                </a:solidFill>
+                <a:latin typeface="Yu Gothic"/>
+                <a:ea typeface="Yu Gothic"/>
+                <a:cs typeface="Yu Gothic"/>
+              </a:rPr>
+              <a:t>テーマ: 接点づくり ／ ライセンス営業改革 ／ 経営基盤強化</a:t>
+            </a:r>
+          </a:p>
+          <a:p>
+            <a:pPr algn="l">
+              <a:spcAft>
+                <a:spcPts val="0"/>
+              </a:spcAft>
+            </a:pPr>
+            <a:r>
+              <a:rPr sz="1000" b="1" i="0">
+                <a:solidFill>
+                  <a:srgbClr val="6B5E8A"/>
+                </a:solidFill>
+                <a:latin typeface="Yu Gothic"/>
+                <a:ea typeface="Yu Gothic"/>
+                <a:cs typeface="Yu Gothic"/>
+              </a:rPr>
+              <a:t>役割: 実務の検討とPDCA。決め切れるものは、ここで決める</a:t>
+            </a:r>
+          </a:p>
+        </p:txBody>
+      </p:sp>
+      <p:sp>
+        <p:nvSpPr>
+          <p:cNvPr id="16" name="Rectangle 15"/>
+          <p:cNvSpPr/>
+          <p:nvPr/>
+        </p:nvSpPr>
+        <p:spPr>
+          <a:xfrm>
+            <a:off x="8366760" y="2724912"/>
+            <a:ext cx="3319272" cy="841248"/>
+          </a:xfrm>
+          <a:prstGeom prst="rect">
+            <a:avLst/>
+          </a:prstGeom>
+          <a:solidFill>
+            <a:srgbClr val="F7F7F9"/>
+          </a:solidFill>
+          <a:ln w="9525">
+            <a:solidFill>
+              <a:srgbClr val="D9D9E0"/>
+            </a:solidFill>
+          </a:ln>
+          <a:effectLst/>
+        </p:spPr>
+        <p:style>
+          <a:lnRef idx="1">
+            <a:schemeClr val="accent1"/>
+          </a:lnRef>
+          <a:fillRef idx="3">
+            <a:schemeClr val="accent1"/>
+          </a:fillRef>
+          <a:effectRef idx="2">
+            <a:schemeClr val="accent1"/>
+          </a:effectRef>
+          <a:fontRef idx="minor">
+            <a:schemeClr val="lt1"/>
+          </a:fontRef>
+        </p:style>
+        <p:txBody>
+          <a:bodyPr rtlCol="0" anchor="ctr"/>
+          <a:lstStyle/>
+          <a:p>
+            <a:pPr algn="ctr"/>
+          </a:p>
+        </p:txBody>
+      </p:sp>
+      <p:sp>
+        <p:nvSpPr>
+          <p:cNvPr id="17" name="Rectangle 16"/>
+          <p:cNvSpPr/>
+          <p:nvPr/>
+        </p:nvSpPr>
+        <p:spPr>
+          <a:xfrm>
+            <a:off x="8366760" y="2724912"/>
+            <a:ext cx="64008" cy="841248"/>
           </a:xfrm>
           <a:prstGeom prst="rect">
             <a:avLst/>
@@ -11703,14 +14579,14 @@
       </p:sp>
       <p:sp>
         <p:nvSpPr>
-          <p:cNvPr id="11" name="TextBox 10"/>
+          <p:cNvPr id="18" name="TextBox 17"/>
           <p:cNvSpPr txBox="1"/>
           <p:nvPr/>
         </p:nvSpPr>
         <p:spPr>
           <a:xfrm>
-            <a:off x="2770632" y="2322576"/>
-            <a:ext cx="2112264" cy="658368"/>
+            <a:off x="8567928" y="2798064"/>
+            <a:ext cx="2953512" cy="694944"/>
           </a:xfrm>
           <a:prstGeom prst="rect">
             <a:avLst/>
@@ -11723,100 +14599,59 @@
           </a:bodyPr>
           <a:lstStyle/>
           <a:p>
-            <a:pPr algn="ctr">
+            <a:pPr algn="l">
+              <a:spcAft>
+                <a:spcPts val="200"/>
+              </a:spcAft>
+            </a:pPr>
+            <a:r>
+              <a:rPr sz="900" b="1" i="0">
+                <a:solidFill>
+                  <a:srgbClr val="3A106E"/>
+                </a:solidFill>
+                <a:latin typeface="Yu Gothic"/>
+                <a:ea typeface="Yu Gothic"/>
+                <a:cs typeface="Yu Gothic"/>
+              </a:rPr>
+              <a:t>↑ 点検会議へ上げる論点</a:t>
+            </a:r>
+          </a:p>
+          <a:p>
+            <a:pPr algn="l">
               <a:spcAft>
                 <a:spcPts val="0"/>
               </a:spcAft>
             </a:pPr>
             <a:r>
-              <a:rPr sz="2600" b="1" i="0">
-                <a:solidFill>
-                  <a:srgbClr val="FFFFFF"/>
+              <a:rPr sz="1100" b="1" i="0">
+                <a:solidFill>
+                  <a:srgbClr val="3A106E"/>
                 </a:solidFill>
                 <a:latin typeface="Yu Gothic"/>
                 <a:ea typeface="Yu Gothic"/>
                 <a:cs typeface="Yu Gothic"/>
               </a:rPr>
-              <a:t>火</a:t>
-            </a:r>
-          </a:p>
-        </p:txBody>
-      </p:sp>
-      <p:sp>
-        <p:nvSpPr>
-          <p:cNvPr id="12" name="TextBox 11"/>
-          <p:cNvSpPr txBox="1"/>
-          <p:nvPr/>
-        </p:nvSpPr>
-        <p:spPr>
-          <a:xfrm>
-            <a:off x="2898648" y="3291839"/>
-            <a:ext cx="1856232" cy="1554480"/>
-          </a:xfrm>
-          <a:prstGeom prst="rect">
-            <a:avLst/>
-          </a:prstGeom>
-          <a:noFill/>
-        </p:spPr>
-        <p:txBody>
-          <a:bodyPr wrap="square" lIns="0" rIns="0" tIns="0" bIns="0" anchor="t">
-            <a:spAutoFit/>
-          </a:bodyPr>
-          <a:lstStyle/>
-          <a:p>
-            <a:pPr algn="ctr">
-              <a:spcAft>
-                <a:spcPts val="200"/>
-              </a:spcAft>
-            </a:pPr>
-            <a:r>
-              <a:rPr sz="1150" b="1" i="0">
-                <a:solidFill>
-                  <a:srgbClr val="3A106E"/>
-                </a:solidFill>
-                <a:latin typeface="Yu Gothic"/>
-                <a:ea typeface="Yu Gothic"/>
-                <a:cs typeface="Yu Gothic"/>
-              </a:rPr>
-              <a:t>分科会×3</a:t>
-            </a:r>
-          </a:p>
-          <a:p>
-            <a:pPr algn="ctr">
-              <a:spcAft>
-                <a:spcPts val="200"/>
-              </a:spcAft>
-            </a:pPr>
-            <a:r>
-              <a:rPr sz="1150" b="0" i="0">
-                <a:solidFill>
-                  <a:srgbClr val="262630"/>
-                </a:solidFill>
-                <a:latin typeface="Yu Gothic"/>
-                <a:ea typeface="Yu Gothic"/>
-                <a:cs typeface="Yu Gothic"/>
-              </a:rPr>
-              <a:t>（週次75分）</a:t>
-            </a:r>
-          </a:p>
-        </p:txBody>
-      </p:sp>
-      <p:sp>
-        <p:nvSpPr>
-          <p:cNvPr id="13" name="Rectangle 12"/>
+              <a:t>方針・投資・聖域・重大遅延のみ</a:t>
+            </a:r>
+          </a:p>
+        </p:txBody>
+      </p:sp>
+      <p:sp>
+        <p:nvSpPr>
+          <p:cNvPr id="19" name="Rectangle 18"/>
           <p:cNvSpPr/>
           <p:nvPr/>
         </p:nvSpPr>
         <p:spPr>
           <a:xfrm>
-            <a:off x="5038344" y="2249424"/>
-            <a:ext cx="2112264" cy="2798064"/>
+            <a:off x="8366760" y="4041648"/>
+            <a:ext cx="3319272" cy="841248"/>
           </a:xfrm>
           <a:prstGeom prst="rect">
             <a:avLst/>
           </a:prstGeom>
           <a:solidFill>
-            <a:srgbClr val="FFFFFF"/>
+            <a:srgbClr val="F7F7F9"/>
           </a:solidFill>
           <a:ln w="9525">
             <a:solidFill>
@@ -11849,20 +14684,20 @@
       </p:sp>
       <p:sp>
         <p:nvSpPr>
-          <p:cNvPr id="14" name="Rectangle 13"/>
+          <p:cNvPr id="20" name="Rectangle 19"/>
           <p:cNvSpPr/>
           <p:nvPr/>
         </p:nvSpPr>
         <p:spPr>
           <a:xfrm>
-            <a:off x="5038344" y="2249424"/>
-            <a:ext cx="2112264" cy="786384"/>
+            <a:off x="8366760" y="4041648"/>
+            <a:ext cx="64008" cy="841248"/>
           </a:xfrm>
           <a:prstGeom prst="rect">
             <a:avLst/>
           </a:prstGeom>
           <a:solidFill>
-            <a:srgbClr val="3A106E"/>
+            <a:srgbClr val="7823DC"/>
           </a:solidFill>
           <a:ln>
             <a:noFill/>
@@ -11893,14 +14728,14 @@
       </p:sp>
       <p:sp>
         <p:nvSpPr>
-          <p:cNvPr id="15" name="TextBox 14"/>
+          <p:cNvPr id="21" name="TextBox 20"/>
           <p:cNvSpPr txBox="1"/>
           <p:nvPr/>
         </p:nvSpPr>
         <p:spPr>
           <a:xfrm>
-            <a:off x="5038344" y="2322576"/>
-            <a:ext cx="2112264" cy="658368"/>
+            <a:off x="8567928" y="4114800"/>
+            <a:ext cx="2953512" cy="694944"/>
           </a:xfrm>
           <a:prstGeom prst="rect">
             <a:avLst/>
@@ -11913,317 +14748,40 @@
           </a:bodyPr>
           <a:lstStyle/>
           <a:p>
-            <a:pPr algn="ctr">
+            <a:pPr algn="l">
+              <a:spcAft>
+                <a:spcPts val="200"/>
+              </a:spcAft>
+            </a:pPr>
+            <a:r>
+              <a:rPr sz="900" b="1" i="0">
+                <a:solidFill>
+                  <a:srgbClr val="7823DC"/>
+                </a:solidFill>
+                <a:latin typeface="Yu Gothic"/>
+                <a:ea typeface="Yu Gothic"/>
+                <a:cs typeface="Yu Gothic"/>
+              </a:rPr>
+              <a:t>↑ 戦略会議へ上げる論点</a:t>
+            </a:r>
+          </a:p>
+          <a:p>
+            <a:pPr algn="l">
               <a:spcAft>
                 <a:spcPts val="0"/>
               </a:spcAft>
             </a:pPr>
             <a:r>
-              <a:rPr sz="2600" b="1" i="0">
-                <a:solidFill>
-                  <a:srgbClr val="FFFFFF"/>
+              <a:rPr sz="1100" b="1" i="0">
+                <a:solidFill>
+                  <a:srgbClr val="3A106E"/>
                 </a:solidFill>
                 <a:latin typeface="Yu Gothic"/>
                 <a:ea typeface="Yu Gothic"/>
                 <a:cs typeface="Yu Gothic"/>
               </a:rPr>
-              <a:t>水</a:t>
-            </a:r>
-          </a:p>
-        </p:txBody>
-      </p:sp>
-      <p:sp>
-        <p:nvSpPr>
-          <p:cNvPr id="16" name="TextBox 15"/>
-          <p:cNvSpPr txBox="1"/>
-          <p:nvPr/>
-        </p:nvSpPr>
-        <p:spPr>
-          <a:xfrm>
-            <a:off x="5166360" y="3291839"/>
-            <a:ext cx="1856232" cy="1554480"/>
-          </a:xfrm>
-          <a:prstGeom prst="rect">
-            <a:avLst/>
-          </a:prstGeom>
-          <a:noFill/>
-        </p:spPr>
-        <p:txBody>
-          <a:bodyPr wrap="square" lIns="0" rIns="0" tIns="0" bIns="0" anchor="t">
-            <a:spAutoFit/>
-          </a:bodyPr>
-          <a:lstStyle/>
-          <a:p>
-            <a:pPr algn="ctr">
-              <a:spcAft>
-                <a:spcPts val="200"/>
-              </a:spcAft>
-            </a:pPr>
-            <a:r>
-              <a:rPr sz="1150" b="1" i="0">
-                <a:solidFill>
-                  <a:srgbClr val="3A106E"/>
-                </a:solidFill>
-                <a:latin typeface="Yu Gothic"/>
-                <a:ea typeface="Yu Gothic"/>
-                <a:cs typeface="Yu Gothic"/>
-              </a:rPr>
-              <a:t>データ処理</a:t>
-            </a:r>
-          </a:p>
-          <a:p>
-            <a:pPr algn="ctr">
-              <a:spcAft>
-                <a:spcPts val="200"/>
-              </a:spcAft>
-            </a:pPr>
-            <a:r>
-              <a:rPr sz="1150" b="0" i="0">
-                <a:solidFill>
-                  <a:srgbClr val="262630"/>
-                </a:solidFill>
-                <a:latin typeface="Yu Gothic"/>
-                <a:ea typeface="Yu Gothic"/>
-                <a:cs typeface="Yu Gothic"/>
-              </a:rPr>
-              <a:t>集中日</a:t>
-            </a:r>
-          </a:p>
-        </p:txBody>
-      </p:sp>
-      <p:sp>
-        <p:nvSpPr>
-          <p:cNvPr id="17" name="Rectangle 16"/>
-          <p:cNvSpPr/>
-          <p:nvPr/>
-        </p:nvSpPr>
-        <p:spPr>
-          <a:xfrm>
-            <a:off x="7306056" y="2249424"/>
-            <a:ext cx="2112264" cy="2798064"/>
-          </a:xfrm>
-          <a:prstGeom prst="rect">
-            <a:avLst/>
-          </a:prstGeom>
-          <a:solidFill>
-            <a:srgbClr val="FFFFFF"/>
-          </a:solidFill>
-          <a:ln w="9525">
-            <a:solidFill>
-              <a:srgbClr val="D9D9E0"/>
-            </a:solidFill>
-          </a:ln>
-          <a:effectLst/>
-        </p:spPr>
-        <p:style>
-          <a:lnRef idx="1">
-            <a:schemeClr val="accent1"/>
-          </a:lnRef>
-          <a:fillRef idx="3">
-            <a:schemeClr val="accent1"/>
-          </a:fillRef>
-          <a:effectRef idx="2">
-            <a:schemeClr val="accent1"/>
-          </a:effectRef>
-          <a:fontRef idx="minor">
-            <a:schemeClr val="lt1"/>
-          </a:fontRef>
-        </p:style>
-        <p:txBody>
-          <a:bodyPr rtlCol="0" anchor="ctr"/>
-          <a:lstStyle/>
-          <a:p>
-            <a:pPr algn="ctr"/>
-          </a:p>
-        </p:txBody>
-      </p:sp>
-      <p:sp>
-        <p:nvSpPr>
-          <p:cNvPr id="18" name="Rectangle 17"/>
-          <p:cNvSpPr/>
-          <p:nvPr/>
-        </p:nvSpPr>
-        <p:spPr>
-          <a:xfrm>
-            <a:off x="7306056" y="2249424"/>
-            <a:ext cx="2112264" cy="786384"/>
-          </a:xfrm>
-          <a:prstGeom prst="rect">
-            <a:avLst/>
-          </a:prstGeom>
-          <a:solidFill>
-            <a:srgbClr val="3A106E"/>
-          </a:solidFill>
-          <a:ln>
-            <a:noFill/>
-          </a:ln>
-          <a:effectLst/>
-        </p:spPr>
-        <p:style>
-          <a:lnRef idx="1">
-            <a:schemeClr val="accent1"/>
-          </a:lnRef>
-          <a:fillRef idx="3">
-            <a:schemeClr val="accent1"/>
-          </a:fillRef>
-          <a:effectRef idx="2">
-            <a:schemeClr val="accent1"/>
-          </a:effectRef>
-          <a:fontRef idx="minor">
-            <a:schemeClr val="lt1"/>
-          </a:fontRef>
-        </p:style>
-        <p:txBody>
-          <a:bodyPr rtlCol="0" anchor="ctr"/>
-          <a:lstStyle/>
-          <a:p>
-            <a:pPr algn="ctr"/>
-          </a:p>
-        </p:txBody>
-      </p:sp>
-      <p:sp>
-        <p:nvSpPr>
-          <p:cNvPr id="19" name="TextBox 18"/>
-          <p:cNvSpPr txBox="1"/>
-          <p:nvPr/>
-        </p:nvSpPr>
-        <p:spPr>
-          <a:xfrm>
-            <a:off x="7306056" y="2322576"/>
-            <a:ext cx="2112264" cy="658368"/>
-          </a:xfrm>
-          <a:prstGeom prst="rect">
-            <a:avLst/>
-          </a:prstGeom>
-          <a:noFill/>
-        </p:spPr>
-        <p:txBody>
-          <a:bodyPr wrap="square" lIns="0" rIns="0" tIns="0" bIns="0" anchor="ctr">
-            <a:spAutoFit/>
-          </a:bodyPr>
-          <a:lstStyle/>
-          <a:p>
-            <a:pPr algn="ctr">
-              <a:spcAft>
-                <a:spcPts val="0"/>
-              </a:spcAft>
-            </a:pPr>
-            <a:r>
-              <a:rPr sz="2600" b="1" i="0">
-                <a:solidFill>
-                  <a:srgbClr val="FFFFFF"/>
-                </a:solidFill>
-                <a:latin typeface="Yu Gothic"/>
-                <a:ea typeface="Yu Gothic"/>
-                <a:cs typeface="Yu Gothic"/>
-              </a:rPr>
-              <a:t>木</a:t>
-            </a:r>
-          </a:p>
-        </p:txBody>
-      </p:sp>
-      <p:sp>
-        <p:nvSpPr>
-          <p:cNvPr id="20" name="TextBox 19"/>
-          <p:cNvSpPr txBox="1"/>
-          <p:nvPr/>
-        </p:nvSpPr>
-        <p:spPr>
-          <a:xfrm>
-            <a:off x="7434072" y="3291839"/>
-            <a:ext cx="1856232" cy="1554480"/>
-          </a:xfrm>
-          <a:prstGeom prst="rect">
-            <a:avLst/>
-          </a:prstGeom>
-          <a:noFill/>
-        </p:spPr>
-        <p:txBody>
-          <a:bodyPr wrap="square" lIns="0" rIns="0" tIns="0" bIns="0" anchor="t">
-            <a:spAutoFit/>
-          </a:bodyPr>
-          <a:lstStyle/>
-          <a:p>
-            <a:pPr algn="ctr">
-              <a:spcAft>
-                <a:spcPts val="200"/>
-              </a:spcAft>
-            </a:pPr>
-            <a:r>
-              <a:rPr sz="1150" b="1" i="0">
-                <a:solidFill>
-                  <a:srgbClr val="3A106E"/>
-                </a:solidFill>
-                <a:latin typeface="Yu Gothic"/>
-                <a:ea typeface="Yu Gothic"/>
-                <a:cs typeface="Yu Gothic"/>
-              </a:rPr>
-              <a:t>戦略会議</a:t>
-            </a:r>
-          </a:p>
-          <a:p>
-            <a:pPr algn="ctr">
-              <a:spcAft>
-                <a:spcPts val="200"/>
-              </a:spcAft>
-            </a:pPr>
-            <a:r>
-              <a:rPr sz="1150" b="0" i="0">
-                <a:solidFill>
-                  <a:srgbClr val="262630"/>
-                </a:solidFill>
-                <a:latin typeface="Yu Gothic"/>
-                <a:ea typeface="Yu Gothic"/>
-                <a:cs typeface="Yu Gothic"/>
-              </a:rPr>
-              <a:t>（隔週90分・社長）</a:t>
-            </a:r>
-          </a:p>
-        </p:txBody>
-      </p:sp>
-      <p:sp>
-        <p:nvSpPr>
-          <p:cNvPr id="21" name="Rectangle 20"/>
-          <p:cNvSpPr/>
-          <p:nvPr/>
-        </p:nvSpPr>
-        <p:spPr>
-          <a:xfrm>
-            <a:off x="9573768" y="2249424"/>
-            <a:ext cx="2112264" cy="2798064"/>
-          </a:xfrm>
-          <a:prstGeom prst="rect">
-            <a:avLst/>
-          </a:prstGeom>
-          <a:solidFill>
-            <a:srgbClr val="FFFFFF"/>
-          </a:solidFill>
-          <a:ln w="9525">
-            <a:solidFill>
-              <a:srgbClr val="D9D9E0"/>
-            </a:solidFill>
-          </a:ln>
-          <a:effectLst/>
-        </p:spPr>
-        <p:style>
-          <a:lnRef idx="1">
-            <a:schemeClr val="accent1"/>
-          </a:lnRef>
-          <a:fillRef idx="3">
-            <a:schemeClr val="accent1"/>
-          </a:fillRef>
-          <a:effectRef idx="2">
-            <a:schemeClr val="accent1"/>
-          </a:effectRef>
-          <a:fontRef idx="minor">
-            <a:schemeClr val="lt1"/>
-          </a:fontRef>
-        </p:style>
-        <p:txBody>
-          <a:bodyPr rtlCol="0" anchor="ctr"/>
-          <a:lstStyle/>
-          <a:p>
-            <a:pPr algn="ctr"/>
+              <a:t>分科会で決め切れない論点のみ</a:t>
+            </a:r>
           </a:p>
         </p:txBody>
       </p:sp>
@@ -12235,152 +14793,8 @@
         </p:nvSpPr>
         <p:spPr>
           <a:xfrm>
-            <a:off x="9573768" y="2249424"/>
-            <a:ext cx="2112264" cy="786384"/>
-          </a:xfrm>
-          <a:prstGeom prst="rect">
-            <a:avLst/>
-          </a:prstGeom>
-          <a:solidFill>
-            <a:srgbClr val="3A106E"/>
-          </a:solidFill>
-          <a:ln>
-            <a:noFill/>
-          </a:ln>
-          <a:effectLst/>
-        </p:spPr>
-        <p:style>
-          <a:lnRef idx="1">
-            <a:schemeClr val="accent1"/>
-          </a:lnRef>
-          <a:fillRef idx="3">
-            <a:schemeClr val="accent1"/>
-          </a:fillRef>
-          <a:effectRef idx="2">
-            <a:schemeClr val="accent1"/>
-          </a:effectRef>
-          <a:fontRef idx="minor">
-            <a:schemeClr val="lt1"/>
-          </a:fontRef>
-        </p:style>
-        <p:txBody>
-          <a:bodyPr rtlCol="0" anchor="ctr"/>
-          <a:lstStyle/>
-          <a:p>
-            <a:pPr algn="ctr"/>
-          </a:p>
-        </p:txBody>
-      </p:sp>
-      <p:sp>
-        <p:nvSpPr>
-          <p:cNvPr id="23" name="TextBox 22"/>
-          <p:cNvSpPr txBox="1"/>
-          <p:nvPr/>
-        </p:nvSpPr>
-        <p:spPr>
-          <a:xfrm>
-            <a:off x="9573768" y="2322576"/>
-            <a:ext cx="2112264" cy="658368"/>
-          </a:xfrm>
-          <a:prstGeom prst="rect">
-            <a:avLst/>
-          </a:prstGeom>
-          <a:noFill/>
-        </p:spPr>
-        <p:txBody>
-          <a:bodyPr wrap="square" lIns="0" rIns="0" tIns="0" bIns="0" anchor="ctr">
-            <a:spAutoFit/>
-          </a:bodyPr>
-          <a:lstStyle/>
-          <a:p>
-            <a:pPr algn="ctr">
-              <a:spcAft>
-                <a:spcPts val="0"/>
-              </a:spcAft>
-            </a:pPr>
-            <a:r>
-              <a:rPr sz="2600" b="1" i="0">
-                <a:solidFill>
-                  <a:srgbClr val="FFFFFF"/>
-                </a:solidFill>
-                <a:latin typeface="Yu Gothic"/>
-                <a:ea typeface="Yu Gothic"/>
-                <a:cs typeface="Yu Gothic"/>
-              </a:rPr>
-              <a:t>金</a:t>
-            </a:r>
-          </a:p>
-        </p:txBody>
-      </p:sp>
-      <p:sp>
-        <p:nvSpPr>
-          <p:cNvPr id="24" name="TextBox 23"/>
-          <p:cNvSpPr txBox="1"/>
-          <p:nvPr/>
-        </p:nvSpPr>
-        <p:spPr>
-          <a:xfrm>
-            <a:off x="9701784" y="3291839"/>
-            <a:ext cx="1856232" cy="1554480"/>
-          </a:xfrm>
-          <a:prstGeom prst="rect">
-            <a:avLst/>
-          </a:prstGeom>
-          <a:noFill/>
-        </p:spPr>
-        <p:txBody>
-          <a:bodyPr wrap="square" lIns="0" rIns="0" tIns="0" bIns="0" anchor="t">
-            <a:spAutoFit/>
-          </a:bodyPr>
-          <a:lstStyle/>
-          <a:p>
-            <a:pPr algn="ctr">
-              <a:spcAft>
-                <a:spcPts val="200"/>
-              </a:spcAft>
-            </a:pPr>
-            <a:r>
-              <a:rPr sz="1150" b="1" i="0">
-                <a:solidFill>
-                  <a:srgbClr val="3A106E"/>
-                </a:solidFill>
-                <a:latin typeface="Yu Gothic"/>
-                <a:ea typeface="Yu Gothic"/>
-                <a:cs typeface="Yu Gothic"/>
-              </a:rPr>
-              <a:t>STO週次</a:t>
-            </a:r>
-          </a:p>
-          <a:p>
-            <a:pPr algn="ctr">
-              <a:spcAft>
-                <a:spcPts val="200"/>
-              </a:spcAft>
-            </a:pPr>
-            <a:r>
-              <a:rPr sz="1150" b="0" i="0">
-                <a:solidFill>
-                  <a:srgbClr val="262630"/>
-                </a:solidFill>
-                <a:latin typeface="Yu Gothic"/>
-                <a:ea typeface="Yu Gothic"/>
-                <a:cs typeface="Yu Gothic"/>
-              </a:rPr>
-              <a:t>レビュー30分</a:t>
-            </a:r>
-          </a:p>
-        </p:txBody>
-      </p:sp>
-      <p:sp>
-        <p:nvSpPr>
-          <p:cNvPr id="25" name="Rectangle 24"/>
-          <p:cNvSpPr/>
-          <p:nvPr/>
-        </p:nvSpPr>
-        <p:spPr>
-          <a:xfrm>
-            <a:off x="502920" y="5394960"/>
-            <a:ext cx="11183112" cy="676656"/>
+            <a:off x="502920" y="5541264"/>
+            <a:ext cx="11183112" cy="859536"/>
           </a:xfrm>
           <a:prstGeom prst="rect">
             <a:avLst/>
@@ -12417,14 +14831,14 @@
       </p:sp>
       <p:sp>
         <p:nvSpPr>
-          <p:cNvPr id="26" name="Rectangle 25"/>
+          <p:cNvPr id="23" name="Rectangle 22"/>
           <p:cNvSpPr/>
           <p:nvPr/>
         </p:nvSpPr>
         <p:spPr>
           <a:xfrm>
-            <a:off x="502920" y="5394960"/>
-            <a:ext cx="38100" cy="676656"/>
+            <a:off x="502920" y="5541264"/>
+            <a:ext cx="38100" cy="859536"/>
           </a:xfrm>
           <a:prstGeom prst="rect">
             <a:avLst/>
@@ -12461,14 +14875,14 @@
       </p:sp>
       <p:sp>
         <p:nvSpPr>
-          <p:cNvPr id="27" name="TextBox 26"/>
+          <p:cNvPr id="24" name="TextBox 23"/>
           <p:cNvSpPr txBox="1"/>
           <p:nvPr/>
         </p:nvSpPr>
         <p:spPr>
           <a:xfrm>
-            <a:off x="713232" y="5449824"/>
-            <a:ext cx="10835640" cy="566928"/>
+            <a:off x="749808" y="5614416"/>
+            <a:ext cx="10698480" cy="713232"/>
           </a:xfrm>
           <a:prstGeom prst="rect">
             <a:avLst/>
@@ -12480,6 +14894,42 @@
             <a:spAutoFit/>
           </a:bodyPr>
           <a:lstStyle/>
+          <a:p>
+            <a:pPr algn="l">
+              <a:spcAft>
+                <a:spcPts val="200"/>
+              </a:spcAft>
+            </a:pPr>
+            <a:r>
+              <a:rPr sz="900" b="1" i="0">
+                <a:solidFill>
+                  <a:srgbClr val="7823DC"/>
+                </a:solidFill>
+                <a:latin typeface="Yu Gothic"/>
+                <a:ea typeface="Yu Gothic"/>
+                <a:cs typeface="Yu Gothic"/>
+              </a:rPr>
+              <a:t>運用原則</a:t>
+            </a:r>
+          </a:p>
+          <a:p>
+            <a:pPr algn="l">
+              <a:spcAft>
+                <a:spcPts val="200"/>
+              </a:spcAft>
+            </a:pPr>
+            <a:r>
+              <a:rPr sz="950" b="1" i="0">
+                <a:solidFill>
+                  <a:srgbClr val="3A106E"/>
+                </a:solidFill>
+                <a:latin typeface="Yu Gothic"/>
+                <a:ea typeface="Yu Gothic"/>
+                <a:cs typeface="Yu Gothic"/>
+              </a:rPr>
+              <a:t>① 同じ論点を二度議論しない（下で決めたことは上では報告のみ）　　② 下で決められることは、下で決める</a:t>
+            </a:r>
+          </a:p>
           <a:p>
             <a:pPr algn="l">
               <a:spcAft>
@@ -12487,7 +14937,7 @@
               </a:spcAft>
             </a:pPr>
             <a:r>
-              <a:rPr sz="1050" b="1" i="0">
+              <a:rPr sz="950" b="1" i="0">
                 <a:solidFill>
                   <a:srgbClr val="3A106E"/>
                 </a:solidFill>
@@ -12495,14 +14945,14 @@
                 <a:ea typeface="Yu Gothic"/>
                 <a:cs typeface="Yu Gothic"/>
               </a:rPr>
-              <a:t>会長のお時間をいただくのは月次の点検会議60分のみです。日々の運転はSTOが担います</a:t>
-            </a:r>
-          </a:p>
-        </p:txBody>
-      </p:sp>
-      <p:sp>
-        <p:nvSpPr>
-          <p:cNvPr id="28" name="Rectangle 27"/>
+              <a:t>③ 決定は24時間以内に「決定ログ」で全体へ展開する</a:t>
+            </a:r>
+          </a:p>
+        </p:txBody>
+      </p:sp>
+      <p:sp>
+        <p:nvSpPr>
+          <p:cNvPr id="25" name="Rectangle 24"/>
           <p:cNvSpPr/>
           <p:nvPr/>
         </p:nvSpPr>
@@ -12546,7 +14996,7 @@
       </p:sp>
       <p:sp>
         <p:nvSpPr>
-          <p:cNvPr id="29" name="TextBox 28"/>
+          <p:cNvPr id="26" name="TextBox 25"/>
           <p:cNvSpPr txBox="1"/>
           <p:nvPr/>
         </p:nvSpPr>
@@ -12587,7 +15037,7 @@
       </p:sp>
       <p:sp>
         <p:nvSpPr>
-          <p:cNvPr id="30" name="TextBox 29"/>
+          <p:cNvPr id="27" name="TextBox 26"/>
           <p:cNvSpPr txBox="1"/>
           <p:nvPr/>
         </p:nvSpPr>
@@ -12680,7 +15130,7 @@
                 <a:ea typeface="Yu Gothic"/>
                 <a:cs typeface="Yu Gothic"/>
               </a:rPr>
-              <a:t>部長の声 → STO設計への反映</a:t>
+              <a:t>運用</a:t>
             </a:r>
           </a:p>
         </p:txBody>
@@ -12721,7 +15171,7 @@
                 <a:ea typeface="Yu Gothic"/>
                 <a:cs typeface="Yu Gothic"/>
               </a:rPr>
-              <a:t>いただいた懸念を、設計に落とし込みました</a:t>
+              <a:t>週次の運転リズム</a:t>
             </a:r>
           </a:p>
         </p:txBody>
@@ -12770,332 +15220,52 @@
           </a:p>
         </p:txBody>
       </p:sp>
-      <p:graphicFrame>
-        <p:nvGraphicFramePr>
-          <p:cNvPr id="5" name="Table 4"/>
-          <p:cNvGraphicFramePr>
-            <a:graphicFrameLocks noGrp="1"/>
-          </p:cNvGraphicFramePr>
-          <p:nvPr/>
-        </p:nvGraphicFramePr>
-        <p:xfrm>
-          <a:off x="502920" y="1883664"/>
-          <a:ext cx="11183111" cy="3291839"/>
-        </p:xfrm>
-        <a:graphic>
-          <a:graphicData uri="http://schemas.openxmlformats.org/drawingml/2006/table">
-            <a:tbl>
-              <a:tblPr firstRow="1" bandRow="1">
-                <a:tableStyleId>{5C22544A-7EE6-4342-B048-85BDC9FD1C3A}</a:tableStyleId>
-              </a:tblPr>
-              <a:tblGrid>
-                <a:gridCol w="4858237"/>
-                <a:gridCol w="6324874"/>
-              </a:tblGrid>
-              <a:tr h="658367">
-                <a:tc>
-                  <a:txBody>
-                    <a:bodyPr wrap="square"/>
-                    <a:lstStyle/>
-                    <a:p>
-                      <a:pPr algn="l">
-                        <a:spcAft>
-                          <a:spcPts val="0"/>
-                        </a:spcAft>
-                      </a:pPr>
-                      <a:r>
-                        <a:rPr sz="1050" b="1" i="0">
-                          <a:solidFill>
-                            <a:srgbClr val="FFFFFF"/>
-                          </a:solidFill>
-                          <a:latin typeface="Yu Gothic"/>
-                          <a:ea typeface="Yu Gothic"/>
-                          <a:cs typeface="Yu Gothic"/>
-                        </a:rPr>
-                        <a:t>部長の声</a:t>
-                      </a:r>
-                    </a:p>
-                  </a:txBody>
-                  <a:tcPr marL="54864" marR="54864" marT="18288" marB="18288" anchor="ctr">
-                    <a:solidFill>
-                      <a:srgbClr val="3A106E"/>
-                    </a:solidFill>
-                  </a:tcPr>
-                </a:tc>
-                <a:tc>
-                  <a:txBody>
-                    <a:bodyPr wrap="square"/>
-                    <a:lstStyle/>
-                    <a:p>
-                      <a:pPr algn="l">
-                        <a:spcAft>
-                          <a:spcPts val="0"/>
-                        </a:spcAft>
-                      </a:pPr>
-                      <a:r>
-                        <a:rPr sz="1050" b="1" i="0">
-                          <a:solidFill>
-                            <a:srgbClr val="FFFFFF"/>
-                          </a:solidFill>
-                          <a:latin typeface="Yu Gothic"/>
-                          <a:ea typeface="Yu Gothic"/>
-                          <a:cs typeface="Yu Gothic"/>
-                        </a:rPr>
-                        <a:t>STO設計への反映</a:t>
-                      </a:r>
-                    </a:p>
-                  </a:txBody>
-                  <a:tcPr marL="54864" marR="54864" marT="18288" marB="18288" anchor="ctr">
-                    <a:solidFill>
-                      <a:srgbClr val="3A106E"/>
-                    </a:solidFill>
-                  </a:tcPr>
-                </a:tc>
-              </a:tr>
-              <a:tr h="658367">
-                <a:tc>
-                  <a:txBody>
-                    <a:bodyPr wrap="square"/>
-                    <a:lstStyle/>
-                    <a:p>
-                      <a:pPr algn="l">
-                        <a:spcAft>
-                          <a:spcPts val="100"/>
-                        </a:spcAft>
-                      </a:pPr>
-                      <a:r>
-                        <a:rPr sz="1100" b="0" i="0">
-                          <a:solidFill>
-                            <a:srgbClr val="262630"/>
-                          </a:solidFill>
-                          <a:latin typeface="Yu Gothic"/>
-                          <a:ea typeface="Yu Gothic"/>
-                          <a:cs typeface="Yu Gothic"/>
-                        </a:rPr>
-                        <a:t>STOメンバーの現任案件に遅延を出さない体制を</a:t>
-                      </a:r>
-                    </a:p>
-                  </a:txBody>
-                  <a:tcPr marL="54864" marR="54864" marT="18288" marB="18288" anchor="ctr">
-                    <a:solidFill>
-                      <a:srgbClr val="FFFFFF"/>
-                    </a:solidFill>
-                  </a:tcPr>
-                </a:tc>
-                <a:tc>
-                  <a:txBody>
-                    <a:bodyPr wrap="square"/>
-                    <a:lstStyle/>
-                    <a:p>
-                      <a:pPr algn="l">
-                        <a:spcAft>
-                          <a:spcPts val="100"/>
-                        </a:spcAft>
-                      </a:pPr>
-                      <a:r>
-                        <a:rPr sz="1100" b="0" i="0">
-                          <a:solidFill>
-                            <a:srgbClr val="262630"/>
-                          </a:solidFill>
-                          <a:latin typeface="Yu Gothic"/>
-                          <a:ea typeface="Yu Gothic"/>
-                          <a:cs typeface="Yu Gothic"/>
-                        </a:rPr>
-                        <a:t>着任前の業務棚卸しと部門長合意を立ち上げ手順に組み込み</a:t>
-                      </a:r>
-                    </a:p>
-                  </a:txBody>
-                  <a:tcPr marL="54864" marR="54864" marT="18288" marB="18288" anchor="ctr">
-                    <a:solidFill>
-                      <a:srgbClr val="FFFFFF"/>
-                    </a:solidFill>
-                  </a:tcPr>
-                </a:tc>
-              </a:tr>
-              <a:tr h="658367">
-                <a:tc>
-                  <a:txBody>
-                    <a:bodyPr wrap="square"/>
-                    <a:lstStyle/>
-                    <a:p>
-                      <a:pPr algn="l">
-                        <a:spcAft>
-                          <a:spcPts val="100"/>
-                        </a:spcAft>
-                      </a:pPr>
-                      <a:r>
-                        <a:rPr sz="1100" b="0" i="0">
-                          <a:solidFill>
-                            <a:srgbClr val="262630"/>
-                          </a:solidFill>
-                          <a:latin typeface="Yu Gothic"/>
-                          <a:ea typeface="Yu Gothic"/>
-                          <a:cs typeface="Yu Gothic"/>
-                        </a:rPr>
-                        <a:t>コア人員のリソース確保と疲弊防止を</a:t>
-                      </a:r>
-                    </a:p>
-                  </a:txBody>
-                  <a:tcPr marL="54864" marR="54864" marT="18288" marB="18288" anchor="ctr">
-                    <a:solidFill>
-                      <a:srgbClr val="F7F7F9"/>
-                    </a:solidFill>
-                  </a:tcPr>
-                </a:tc>
-                <a:tc>
-                  <a:txBody>
-                    <a:bodyPr wrap="square"/>
-                    <a:lstStyle/>
-                    <a:p>
-                      <a:pPr algn="l">
-                        <a:spcAft>
-                          <a:spcPts val="100"/>
-                        </a:spcAft>
-                      </a:pPr>
-                      <a:r>
-                        <a:rPr sz="1100" b="0" i="0">
-                          <a:solidFill>
-                            <a:srgbClr val="262630"/>
-                          </a:solidFill>
-                          <a:latin typeface="Yu Gothic"/>
-                          <a:ea typeface="Yu Gothic"/>
-                          <a:cs typeface="Yu Gothic"/>
-                        </a:rPr>
-                        <a:t>専任化の3原則＋金曜レビューで負荷を毎週確認</a:t>
-                      </a:r>
-                    </a:p>
-                  </a:txBody>
-                  <a:tcPr marL="54864" marR="54864" marT="18288" marB="18288" anchor="ctr">
-                    <a:solidFill>
-                      <a:srgbClr val="F7F7F9"/>
-                    </a:solidFill>
-                  </a:tcPr>
-                </a:tc>
-              </a:tr>
-              <a:tr h="658367">
-                <a:tc>
-                  <a:txBody>
-                    <a:bodyPr wrap="square"/>
-                    <a:lstStyle/>
-                    <a:p>
-                      <a:pPr algn="l">
-                        <a:spcAft>
-                          <a:spcPts val="100"/>
-                        </a:spcAft>
-                      </a:pPr>
-                      <a:r>
-                        <a:rPr sz="1100" b="0" i="0">
-                          <a:solidFill>
-                            <a:srgbClr val="262630"/>
-                          </a:solidFill>
-                          <a:latin typeface="Yu Gothic"/>
-                          <a:ea typeface="Yu Gothic"/>
-                          <a:cs typeface="Yu Gothic"/>
-                        </a:rPr>
-                        <a:t>経営確認だらけで現場が止まらないか</a:t>
-                      </a:r>
-                    </a:p>
-                  </a:txBody>
-                  <a:tcPr marL="54864" marR="54864" marT="18288" marB="18288" anchor="ctr">
-                    <a:solidFill>
-                      <a:srgbClr val="FFFFFF"/>
-                    </a:solidFill>
-                  </a:tcPr>
-                </a:tc>
-                <a:tc>
-                  <a:txBody>
-                    <a:bodyPr wrap="square"/>
-                    <a:lstStyle/>
-                    <a:p>
-                      <a:pPr algn="l">
-                        <a:spcAft>
-                          <a:spcPts val="100"/>
-                        </a:spcAft>
-                      </a:pPr>
-                      <a:r>
-                        <a:rPr sz="1100" b="0" i="0">
-                          <a:solidFill>
-                            <a:srgbClr val="262630"/>
-                          </a:solidFill>
-                          <a:latin typeface="Yu Gothic"/>
-                          <a:ea typeface="Yu Gothic"/>
-                          <a:cs typeface="Yu Gothic"/>
-                        </a:rPr>
-                        <a:t>L1〜L4の権限4段設計で現場の自走範囲を明文化</a:t>
-                      </a:r>
-                    </a:p>
-                  </a:txBody>
-                  <a:tcPr marL="54864" marR="54864" marT="18288" marB="18288" anchor="ctr">
-                    <a:solidFill>
-                      <a:srgbClr val="FFFFFF"/>
-                    </a:solidFill>
-                  </a:tcPr>
-                </a:tc>
-              </a:tr>
-              <a:tr h="658371">
-                <a:tc>
-                  <a:txBody>
-                    <a:bodyPr wrap="square"/>
-                    <a:lstStyle/>
-                    <a:p>
-                      <a:pPr algn="l">
-                        <a:spcAft>
-                          <a:spcPts val="100"/>
-                        </a:spcAft>
-                      </a:pPr>
-                      <a:r>
-                        <a:rPr sz="1100" b="0" i="0">
-                          <a:solidFill>
-                            <a:srgbClr val="262630"/>
-                          </a:solidFill>
-                          <a:latin typeface="Yu Gothic"/>
-                          <a:ea typeface="Yu Gothic"/>
-                          <a:cs typeface="Yu Gothic"/>
-                        </a:rPr>
-                        <a:t>管理強化にならないか・評価に使われないか</a:t>
-                      </a:r>
-                    </a:p>
-                  </a:txBody>
-                  <a:tcPr marL="54864" marR="54864" marT="18288" marB="18288" anchor="ctr">
-                    <a:solidFill>
-                      <a:srgbClr val="F7F7F9"/>
-                    </a:solidFill>
-                  </a:tcPr>
-                </a:tc>
-                <a:tc>
-                  <a:txBody>
-                    <a:bodyPr wrap="square"/>
-                    <a:lstStyle/>
-                    <a:p>
-                      <a:pPr algn="l">
-                        <a:spcAft>
-                          <a:spcPts val="100"/>
-                        </a:spcAft>
-                      </a:pPr>
-                      <a:r>
-                        <a:rPr sz="1100" b="0" i="0">
-                          <a:solidFill>
-                            <a:srgbClr val="262630"/>
-                          </a:solidFill>
-                          <a:latin typeface="Yu Gothic"/>
-                          <a:ea typeface="Yu Gothic"/>
-                          <a:cs typeface="Yu Gothic"/>
-                        </a:rPr>
-                        <a:t>工数の個人評価利用の禁止を大原則として全資料に明記</a:t>
-                      </a:r>
-                    </a:p>
-                  </a:txBody>
-                  <a:tcPr marL="54864" marR="54864" marT="18288" marB="18288" anchor="ctr">
-                    <a:solidFill>
-                      <a:srgbClr val="F7F7F9"/>
-                    </a:solidFill>
-                  </a:tcPr>
-                </a:tc>
-              </a:tr>
-            </a:tbl>
-          </a:graphicData>
-        </a:graphic>
-      </p:graphicFrame>
+      <p:sp>
+        <p:nvSpPr>
+          <p:cNvPr id="5" name="Rectangle 4"/>
+          <p:cNvSpPr/>
+          <p:nvPr/>
+        </p:nvSpPr>
+        <p:spPr>
+          <a:xfrm>
+            <a:off x="502920" y="2249424"/>
+            <a:ext cx="2112264" cy="2798064"/>
+          </a:xfrm>
+          <a:prstGeom prst="rect">
+            <a:avLst/>
+          </a:prstGeom>
+          <a:solidFill>
+            <a:srgbClr val="FFFFFF"/>
+          </a:solidFill>
+          <a:ln w="9525">
+            <a:solidFill>
+              <a:srgbClr val="D9D9E0"/>
+            </a:solidFill>
+          </a:ln>
+          <a:effectLst/>
+        </p:spPr>
+        <p:style>
+          <a:lnRef idx="1">
+            <a:schemeClr val="accent1"/>
+          </a:lnRef>
+          <a:fillRef idx="3">
+            <a:schemeClr val="accent1"/>
+          </a:fillRef>
+          <a:effectRef idx="2">
+            <a:schemeClr val="accent1"/>
+          </a:effectRef>
+          <a:fontRef idx="minor">
+            <a:schemeClr val="lt1"/>
+          </a:fontRef>
+        </p:style>
+        <p:txBody>
+          <a:bodyPr rtlCol="0" anchor="ctr"/>
+          <a:lstStyle/>
+          <a:p>
+            <a:pPr algn="ctr"/>
+          </a:p>
+        </p:txBody>
+      </p:sp>
       <p:sp>
         <p:nvSpPr>
           <p:cNvPr id="6" name="Rectangle 5"/>
@@ -13104,8 +15274,912 @@
         </p:nvSpPr>
         <p:spPr>
           <a:xfrm>
-            <a:off x="502920" y="5285232"/>
-            <a:ext cx="11183112" cy="603504"/>
+            <a:off x="502920" y="2249424"/>
+            <a:ext cx="2112264" cy="786384"/>
+          </a:xfrm>
+          <a:prstGeom prst="rect">
+            <a:avLst/>
+          </a:prstGeom>
+          <a:solidFill>
+            <a:srgbClr val="3A106E"/>
+          </a:solidFill>
+          <a:ln>
+            <a:noFill/>
+          </a:ln>
+          <a:effectLst/>
+        </p:spPr>
+        <p:style>
+          <a:lnRef idx="1">
+            <a:schemeClr val="accent1"/>
+          </a:lnRef>
+          <a:fillRef idx="3">
+            <a:schemeClr val="accent1"/>
+          </a:fillRef>
+          <a:effectRef idx="2">
+            <a:schemeClr val="accent1"/>
+          </a:effectRef>
+          <a:fontRef idx="minor">
+            <a:schemeClr val="lt1"/>
+          </a:fontRef>
+        </p:style>
+        <p:txBody>
+          <a:bodyPr rtlCol="0" anchor="ctr"/>
+          <a:lstStyle/>
+          <a:p>
+            <a:pPr algn="ctr"/>
+          </a:p>
+        </p:txBody>
+      </p:sp>
+      <p:sp>
+        <p:nvSpPr>
+          <p:cNvPr id="7" name="TextBox 6"/>
+          <p:cNvSpPr txBox="1"/>
+          <p:nvPr/>
+        </p:nvSpPr>
+        <p:spPr>
+          <a:xfrm>
+            <a:off x="502920" y="2322576"/>
+            <a:ext cx="2112264" cy="658368"/>
+          </a:xfrm>
+          <a:prstGeom prst="rect">
+            <a:avLst/>
+          </a:prstGeom>
+          <a:noFill/>
+        </p:spPr>
+        <p:txBody>
+          <a:bodyPr wrap="square" lIns="0" rIns="0" tIns="0" bIns="0" anchor="ctr">
+            <a:spAutoFit/>
+          </a:bodyPr>
+          <a:lstStyle/>
+          <a:p>
+            <a:pPr algn="ctr">
+              <a:spcAft>
+                <a:spcPts val="0"/>
+              </a:spcAft>
+            </a:pPr>
+            <a:r>
+              <a:rPr sz="2600" b="1" i="0">
+                <a:solidFill>
+                  <a:srgbClr val="FFFFFF"/>
+                </a:solidFill>
+                <a:latin typeface="Yu Gothic"/>
+                <a:ea typeface="Yu Gothic"/>
+                <a:cs typeface="Yu Gothic"/>
+              </a:rPr>
+              <a:t>月</a:t>
+            </a:r>
+          </a:p>
+        </p:txBody>
+      </p:sp>
+      <p:sp>
+        <p:nvSpPr>
+          <p:cNvPr id="8" name="TextBox 7"/>
+          <p:cNvSpPr txBox="1"/>
+          <p:nvPr/>
+        </p:nvSpPr>
+        <p:spPr>
+          <a:xfrm>
+            <a:off x="630936" y="3291839"/>
+            <a:ext cx="1856232" cy="1554480"/>
+          </a:xfrm>
+          <a:prstGeom prst="rect">
+            <a:avLst/>
+          </a:prstGeom>
+          <a:noFill/>
+        </p:spPr>
+        <p:txBody>
+          <a:bodyPr wrap="square" lIns="0" rIns="0" tIns="0" bIns="0" anchor="t">
+            <a:spAutoFit/>
+          </a:bodyPr>
+          <a:lstStyle/>
+          <a:p>
+            <a:pPr algn="ctr">
+              <a:spcAft>
+                <a:spcPts val="200"/>
+              </a:spcAft>
+            </a:pPr>
+            <a:r>
+              <a:rPr sz="1150" b="1" i="0">
+                <a:solidFill>
+                  <a:srgbClr val="3A106E"/>
+                </a:solidFill>
+                <a:latin typeface="Yu Gothic"/>
+                <a:ea typeface="Yu Gothic"/>
+                <a:cs typeface="Yu Gothic"/>
+              </a:rPr>
+              <a:t>スケジュール確定</a:t>
+            </a:r>
+          </a:p>
+          <a:p>
+            <a:pPr algn="ctr">
+              <a:spcAft>
+                <a:spcPts val="200"/>
+              </a:spcAft>
+            </a:pPr>
+            <a:r>
+              <a:rPr sz="1150" b="0" i="0">
+                <a:solidFill>
+                  <a:srgbClr val="262630"/>
+                </a:solidFill>
+                <a:latin typeface="Yu Gothic"/>
+                <a:ea typeface="Yu Gothic"/>
+                <a:cs typeface="Yu Gothic"/>
+              </a:rPr>
+              <a:t>データ週次更新</a:t>
+            </a:r>
+          </a:p>
+        </p:txBody>
+      </p:sp>
+      <p:sp>
+        <p:nvSpPr>
+          <p:cNvPr id="9" name="Rectangle 8"/>
+          <p:cNvSpPr/>
+          <p:nvPr/>
+        </p:nvSpPr>
+        <p:spPr>
+          <a:xfrm>
+            <a:off x="2770632" y="2249424"/>
+            <a:ext cx="2112264" cy="2798064"/>
+          </a:xfrm>
+          <a:prstGeom prst="rect">
+            <a:avLst/>
+          </a:prstGeom>
+          <a:solidFill>
+            <a:srgbClr val="FFFFFF"/>
+          </a:solidFill>
+          <a:ln w="9525">
+            <a:solidFill>
+              <a:srgbClr val="D9D9E0"/>
+            </a:solidFill>
+          </a:ln>
+          <a:effectLst/>
+        </p:spPr>
+        <p:style>
+          <a:lnRef idx="1">
+            <a:schemeClr val="accent1"/>
+          </a:lnRef>
+          <a:fillRef idx="3">
+            <a:schemeClr val="accent1"/>
+          </a:fillRef>
+          <a:effectRef idx="2">
+            <a:schemeClr val="accent1"/>
+          </a:effectRef>
+          <a:fontRef idx="minor">
+            <a:schemeClr val="lt1"/>
+          </a:fontRef>
+        </p:style>
+        <p:txBody>
+          <a:bodyPr rtlCol="0" anchor="ctr"/>
+          <a:lstStyle/>
+          <a:p>
+            <a:pPr algn="ctr"/>
+          </a:p>
+        </p:txBody>
+      </p:sp>
+      <p:sp>
+        <p:nvSpPr>
+          <p:cNvPr id="10" name="Rectangle 9"/>
+          <p:cNvSpPr/>
+          <p:nvPr/>
+        </p:nvSpPr>
+        <p:spPr>
+          <a:xfrm>
+            <a:off x="2770632" y="2249424"/>
+            <a:ext cx="2112264" cy="786384"/>
+          </a:xfrm>
+          <a:prstGeom prst="rect">
+            <a:avLst/>
+          </a:prstGeom>
+          <a:solidFill>
+            <a:srgbClr val="3A106E"/>
+          </a:solidFill>
+          <a:ln>
+            <a:noFill/>
+          </a:ln>
+          <a:effectLst/>
+        </p:spPr>
+        <p:style>
+          <a:lnRef idx="1">
+            <a:schemeClr val="accent1"/>
+          </a:lnRef>
+          <a:fillRef idx="3">
+            <a:schemeClr val="accent1"/>
+          </a:fillRef>
+          <a:effectRef idx="2">
+            <a:schemeClr val="accent1"/>
+          </a:effectRef>
+          <a:fontRef idx="minor">
+            <a:schemeClr val="lt1"/>
+          </a:fontRef>
+        </p:style>
+        <p:txBody>
+          <a:bodyPr rtlCol="0" anchor="ctr"/>
+          <a:lstStyle/>
+          <a:p>
+            <a:pPr algn="ctr"/>
+          </a:p>
+        </p:txBody>
+      </p:sp>
+      <p:sp>
+        <p:nvSpPr>
+          <p:cNvPr id="11" name="TextBox 10"/>
+          <p:cNvSpPr txBox="1"/>
+          <p:nvPr/>
+        </p:nvSpPr>
+        <p:spPr>
+          <a:xfrm>
+            <a:off x="2770632" y="2322576"/>
+            <a:ext cx="2112264" cy="658368"/>
+          </a:xfrm>
+          <a:prstGeom prst="rect">
+            <a:avLst/>
+          </a:prstGeom>
+          <a:noFill/>
+        </p:spPr>
+        <p:txBody>
+          <a:bodyPr wrap="square" lIns="0" rIns="0" tIns="0" bIns="0" anchor="ctr">
+            <a:spAutoFit/>
+          </a:bodyPr>
+          <a:lstStyle/>
+          <a:p>
+            <a:pPr algn="ctr">
+              <a:spcAft>
+                <a:spcPts val="0"/>
+              </a:spcAft>
+            </a:pPr>
+            <a:r>
+              <a:rPr sz="2600" b="1" i="0">
+                <a:solidFill>
+                  <a:srgbClr val="FFFFFF"/>
+                </a:solidFill>
+                <a:latin typeface="Yu Gothic"/>
+                <a:ea typeface="Yu Gothic"/>
+                <a:cs typeface="Yu Gothic"/>
+              </a:rPr>
+              <a:t>火</a:t>
+            </a:r>
+          </a:p>
+        </p:txBody>
+      </p:sp>
+      <p:sp>
+        <p:nvSpPr>
+          <p:cNvPr id="12" name="TextBox 11"/>
+          <p:cNvSpPr txBox="1"/>
+          <p:nvPr/>
+        </p:nvSpPr>
+        <p:spPr>
+          <a:xfrm>
+            <a:off x="2898648" y="3291839"/>
+            <a:ext cx="1856232" cy="1554480"/>
+          </a:xfrm>
+          <a:prstGeom prst="rect">
+            <a:avLst/>
+          </a:prstGeom>
+          <a:noFill/>
+        </p:spPr>
+        <p:txBody>
+          <a:bodyPr wrap="square" lIns="0" rIns="0" tIns="0" bIns="0" anchor="t">
+            <a:spAutoFit/>
+          </a:bodyPr>
+          <a:lstStyle/>
+          <a:p>
+            <a:pPr algn="ctr">
+              <a:spcAft>
+                <a:spcPts val="200"/>
+              </a:spcAft>
+            </a:pPr>
+            <a:r>
+              <a:rPr sz="1150" b="1" i="0">
+                <a:solidFill>
+                  <a:srgbClr val="3A106E"/>
+                </a:solidFill>
+                <a:latin typeface="Yu Gothic"/>
+                <a:ea typeface="Yu Gothic"/>
+                <a:cs typeface="Yu Gothic"/>
+              </a:rPr>
+              <a:t>分科会×3</a:t>
+            </a:r>
+          </a:p>
+          <a:p>
+            <a:pPr algn="ctr">
+              <a:spcAft>
+                <a:spcPts val="200"/>
+              </a:spcAft>
+            </a:pPr>
+            <a:r>
+              <a:rPr sz="1150" b="0" i="0">
+                <a:solidFill>
+                  <a:srgbClr val="262630"/>
+                </a:solidFill>
+                <a:latin typeface="Yu Gothic"/>
+                <a:ea typeface="Yu Gothic"/>
+                <a:cs typeface="Yu Gothic"/>
+              </a:rPr>
+              <a:t>（週次75分）</a:t>
+            </a:r>
+          </a:p>
+        </p:txBody>
+      </p:sp>
+      <p:sp>
+        <p:nvSpPr>
+          <p:cNvPr id="13" name="Rectangle 12"/>
+          <p:cNvSpPr/>
+          <p:nvPr/>
+        </p:nvSpPr>
+        <p:spPr>
+          <a:xfrm>
+            <a:off x="5038344" y="2249424"/>
+            <a:ext cx="2112264" cy="2798064"/>
+          </a:xfrm>
+          <a:prstGeom prst="rect">
+            <a:avLst/>
+          </a:prstGeom>
+          <a:solidFill>
+            <a:srgbClr val="FFFFFF"/>
+          </a:solidFill>
+          <a:ln w="9525">
+            <a:solidFill>
+              <a:srgbClr val="D9D9E0"/>
+            </a:solidFill>
+          </a:ln>
+          <a:effectLst/>
+        </p:spPr>
+        <p:style>
+          <a:lnRef idx="1">
+            <a:schemeClr val="accent1"/>
+          </a:lnRef>
+          <a:fillRef idx="3">
+            <a:schemeClr val="accent1"/>
+          </a:fillRef>
+          <a:effectRef idx="2">
+            <a:schemeClr val="accent1"/>
+          </a:effectRef>
+          <a:fontRef idx="minor">
+            <a:schemeClr val="lt1"/>
+          </a:fontRef>
+        </p:style>
+        <p:txBody>
+          <a:bodyPr rtlCol="0" anchor="ctr"/>
+          <a:lstStyle/>
+          <a:p>
+            <a:pPr algn="ctr"/>
+          </a:p>
+        </p:txBody>
+      </p:sp>
+      <p:sp>
+        <p:nvSpPr>
+          <p:cNvPr id="14" name="Rectangle 13"/>
+          <p:cNvSpPr/>
+          <p:nvPr/>
+        </p:nvSpPr>
+        <p:spPr>
+          <a:xfrm>
+            <a:off x="5038344" y="2249424"/>
+            <a:ext cx="2112264" cy="786384"/>
+          </a:xfrm>
+          <a:prstGeom prst="rect">
+            <a:avLst/>
+          </a:prstGeom>
+          <a:solidFill>
+            <a:srgbClr val="3A106E"/>
+          </a:solidFill>
+          <a:ln>
+            <a:noFill/>
+          </a:ln>
+          <a:effectLst/>
+        </p:spPr>
+        <p:style>
+          <a:lnRef idx="1">
+            <a:schemeClr val="accent1"/>
+          </a:lnRef>
+          <a:fillRef idx="3">
+            <a:schemeClr val="accent1"/>
+          </a:fillRef>
+          <a:effectRef idx="2">
+            <a:schemeClr val="accent1"/>
+          </a:effectRef>
+          <a:fontRef idx="minor">
+            <a:schemeClr val="lt1"/>
+          </a:fontRef>
+        </p:style>
+        <p:txBody>
+          <a:bodyPr rtlCol="0" anchor="ctr"/>
+          <a:lstStyle/>
+          <a:p>
+            <a:pPr algn="ctr"/>
+          </a:p>
+        </p:txBody>
+      </p:sp>
+      <p:sp>
+        <p:nvSpPr>
+          <p:cNvPr id="15" name="TextBox 14"/>
+          <p:cNvSpPr txBox="1"/>
+          <p:nvPr/>
+        </p:nvSpPr>
+        <p:spPr>
+          <a:xfrm>
+            <a:off x="5038344" y="2322576"/>
+            <a:ext cx="2112264" cy="658368"/>
+          </a:xfrm>
+          <a:prstGeom prst="rect">
+            <a:avLst/>
+          </a:prstGeom>
+          <a:noFill/>
+        </p:spPr>
+        <p:txBody>
+          <a:bodyPr wrap="square" lIns="0" rIns="0" tIns="0" bIns="0" anchor="ctr">
+            <a:spAutoFit/>
+          </a:bodyPr>
+          <a:lstStyle/>
+          <a:p>
+            <a:pPr algn="ctr">
+              <a:spcAft>
+                <a:spcPts val="0"/>
+              </a:spcAft>
+            </a:pPr>
+            <a:r>
+              <a:rPr sz="2600" b="1" i="0">
+                <a:solidFill>
+                  <a:srgbClr val="FFFFFF"/>
+                </a:solidFill>
+                <a:latin typeface="Yu Gothic"/>
+                <a:ea typeface="Yu Gothic"/>
+                <a:cs typeface="Yu Gothic"/>
+              </a:rPr>
+              <a:t>水</a:t>
+            </a:r>
+          </a:p>
+        </p:txBody>
+      </p:sp>
+      <p:sp>
+        <p:nvSpPr>
+          <p:cNvPr id="16" name="TextBox 15"/>
+          <p:cNvSpPr txBox="1"/>
+          <p:nvPr/>
+        </p:nvSpPr>
+        <p:spPr>
+          <a:xfrm>
+            <a:off x="5166360" y="3291839"/>
+            <a:ext cx="1856232" cy="1554480"/>
+          </a:xfrm>
+          <a:prstGeom prst="rect">
+            <a:avLst/>
+          </a:prstGeom>
+          <a:noFill/>
+        </p:spPr>
+        <p:txBody>
+          <a:bodyPr wrap="square" lIns="0" rIns="0" tIns="0" bIns="0" anchor="t">
+            <a:spAutoFit/>
+          </a:bodyPr>
+          <a:lstStyle/>
+          <a:p>
+            <a:pPr algn="ctr">
+              <a:spcAft>
+                <a:spcPts val="200"/>
+              </a:spcAft>
+            </a:pPr>
+            <a:r>
+              <a:rPr sz="1150" b="1" i="0">
+                <a:solidFill>
+                  <a:srgbClr val="3A106E"/>
+                </a:solidFill>
+                <a:latin typeface="Yu Gothic"/>
+                <a:ea typeface="Yu Gothic"/>
+                <a:cs typeface="Yu Gothic"/>
+              </a:rPr>
+              <a:t>データ処理</a:t>
+            </a:r>
+          </a:p>
+          <a:p>
+            <a:pPr algn="ctr">
+              <a:spcAft>
+                <a:spcPts val="200"/>
+              </a:spcAft>
+            </a:pPr>
+            <a:r>
+              <a:rPr sz="1150" b="0" i="0">
+                <a:solidFill>
+                  <a:srgbClr val="262630"/>
+                </a:solidFill>
+                <a:latin typeface="Yu Gothic"/>
+                <a:ea typeface="Yu Gothic"/>
+                <a:cs typeface="Yu Gothic"/>
+              </a:rPr>
+              <a:t>集中日</a:t>
+            </a:r>
+          </a:p>
+        </p:txBody>
+      </p:sp>
+      <p:sp>
+        <p:nvSpPr>
+          <p:cNvPr id="17" name="Rectangle 16"/>
+          <p:cNvSpPr/>
+          <p:nvPr/>
+        </p:nvSpPr>
+        <p:spPr>
+          <a:xfrm>
+            <a:off x="7306056" y="2249424"/>
+            <a:ext cx="2112264" cy="2798064"/>
+          </a:xfrm>
+          <a:prstGeom prst="rect">
+            <a:avLst/>
+          </a:prstGeom>
+          <a:solidFill>
+            <a:srgbClr val="FFFFFF"/>
+          </a:solidFill>
+          <a:ln w="9525">
+            <a:solidFill>
+              <a:srgbClr val="D9D9E0"/>
+            </a:solidFill>
+          </a:ln>
+          <a:effectLst/>
+        </p:spPr>
+        <p:style>
+          <a:lnRef idx="1">
+            <a:schemeClr val="accent1"/>
+          </a:lnRef>
+          <a:fillRef idx="3">
+            <a:schemeClr val="accent1"/>
+          </a:fillRef>
+          <a:effectRef idx="2">
+            <a:schemeClr val="accent1"/>
+          </a:effectRef>
+          <a:fontRef idx="minor">
+            <a:schemeClr val="lt1"/>
+          </a:fontRef>
+        </p:style>
+        <p:txBody>
+          <a:bodyPr rtlCol="0" anchor="ctr"/>
+          <a:lstStyle/>
+          <a:p>
+            <a:pPr algn="ctr"/>
+          </a:p>
+        </p:txBody>
+      </p:sp>
+      <p:sp>
+        <p:nvSpPr>
+          <p:cNvPr id="18" name="Rectangle 17"/>
+          <p:cNvSpPr/>
+          <p:nvPr/>
+        </p:nvSpPr>
+        <p:spPr>
+          <a:xfrm>
+            <a:off x="7306056" y="2249424"/>
+            <a:ext cx="2112264" cy="786384"/>
+          </a:xfrm>
+          <a:prstGeom prst="rect">
+            <a:avLst/>
+          </a:prstGeom>
+          <a:solidFill>
+            <a:srgbClr val="3A106E"/>
+          </a:solidFill>
+          <a:ln>
+            <a:noFill/>
+          </a:ln>
+          <a:effectLst/>
+        </p:spPr>
+        <p:style>
+          <a:lnRef idx="1">
+            <a:schemeClr val="accent1"/>
+          </a:lnRef>
+          <a:fillRef idx="3">
+            <a:schemeClr val="accent1"/>
+          </a:fillRef>
+          <a:effectRef idx="2">
+            <a:schemeClr val="accent1"/>
+          </a:effectRef>
+          <a:fontRef idx="minor">
+            <a:schemeClr val="lt1"/>
+          </a:fontRef>
+        </p:style>
+        <p:txBody>
+          <a:bodyPr rtlCol="0" anchor="ctr"/>
+          <a:lstStyle/>
+          <a:p>
+            <a:pPr algn="ctr"/>
+          </a:p>
+        </p:txBody>
+      </p:sp>
+      <p:sp>
+        <p:nvSpPr>
+          <p:cNvPr id="19" name="TextBox 18"/>
+          <p:cNvSpPr txBox="1"/>
+          <p:nvPr/>
+        </p:nvSpPr>
+        <p:spPr>
+          <a:xfrm>
+            <a:off x="7306056" y="2322576"/>
+            <a:ext cx="2112264" cy="658368"/>
+          </a:xfrm>
+          <a:prstGeom prst="rect">
+            <a:avLst/>
+          </a:prstGeom>
+          <a:noFill/>
+        </p:spPr>
+        <p:txBody>
+          <a:bodyPr wrap="square" lIns="0" rIns="0" tIns="0" bIns="0" anchor="ctr">
+            <a:spAutoFit/>
+          </a:bodyPr>
+          <a:lstStyle/>
+          <a:p>
+            <a:pPr algn="ctr">
+              <a:spcAft>
+                <a:spcPts val="0"/>
+              </a:spcAft>
+            </a:pPr>
+            <a:r>
+              <a:rPr sz="2600" b="1" i="0">
+                <a:solidFill>
+                  <a:srgbClr val="FFFFFF"/>
+                </a:solidFill>
+                <a:latin typeface="Yu Gothic"/>
+                <a:ea typeface="Yu Gothic"/>
+                <a:cs typeface="Yu Gothic"/>
+              </a:rPr>
+              <a:t>木</a:t>
+            </a:r>
+          </a:p>
+        </p:txBody>
+      </p:sp>
+      <p:sp>
+        <p:nvSpPr>
+          <p:cNvPr id="20" name="TextBox 19"/>
+          <p:cNvSpPr txBox="1"/>
+          <p:nvPr/>
+        </p:nvSpPr>
+        <p:spPr>
+          <a:xfrm>
+            <a:off x="7434072" y="3291839"/>
+            <a:ext cx="1856232" cy="1554480"/>
+          </a:xfrm>
+          <a:prstGeom prst="rect">
+            <a:avLst/>
+          </a:prstGeom>
+          <a:noFill/>
+        </p:spPr>
+        <p:txBody>
+          <a:bodyPr wrap="square" lIns="0" rIns="0" tIns="0" bIns="0" anchor="t">
+            <a:spAutoFit/>
+          </a:bodyPr>
+          <a:lstStyle/>
+          <a:p>
+            <a:pPr algn="ctr">
+              <a:spcAft>
+                <a:spcPts val="200"/>
+              </a:spcAft>
+            </a:pPr>
+            <a:r>
+              <a:rPr sz="1150" b="1" i="0">
+                <a:solidFill>
+                  <a:srgbClr val="3A106E"/>
+                </a:solidFill>
+                <a:latin typeface="Yu Gothic"/>
+                <a:ea typeface="Yu Gothic"/>
+                <a:cs typeface="Yu Gothic"/>
+              </a:rPr>
+              <a:t>戦略会議</a:t>
+            </a:r>
+          </a:p>
+          <a:p>
+            <a:pPr algn="ctr">
+              <a:spcAft>
+                <a:spcPts val="200"/>
+              </a:spcAft>
+            </a:pPr>
+            <a:r>
+              <a:rPr sz="1150" b="0" i="0">
+                <a:solidFill>
+                  <a:srgbClr val="262630"/>
+                </a:solidFill>
+                <a:latin typeface="Yu Gothic"/>
+                <a:ea typeface="Yu Gothic"/>
+                <a:cs typeface="Yu Gothic"/>
+              </a:rPr>
+              <a:t>（隔週90分・社長）</a:t>
+            </a:r>
+          </a:p>
+        </p:txBody>
+      </p:sp>
+      <p:sp>
+        <p:nvSpPr>
+          <p:cNvPr id="21" name="Rectangle 20"/>
+          <p:cNvSpPr/>
+          <p:nvPr/>
+        </p:nvSpPr>
+        <p:spPr>
+          <a:xfrm>
+            <a:off x="9573768" y="2249424"/>
+            <a:ext cx="2112264" cy="2798064"/>
+          </a:xfrm>
+          <a:prstGeom prst="rect">
+            <a:avLst/>
+          </a:prstGeom>
+          <a:solidFill>
+            <a:srgbClr val="FFFFFF"/>
+          </a:solidFill>
+          <a:ln w="9525">
+            <a:solidFill>
+              <a:srgbClr val="D9D9E0"/>
+            </a:solidFill>
+          </a:ln>
+          <a:effectLst/>
+        </p:spPr>
+        <p:style>
+          <a:lnRef idx="1">
+            <a:schemeClr val="accent1"/>
+          </a:lnRef>
+          <a:fillRef idx="3">
+            <a:schemeClr val="accent1"/>
+          </a:fillRef>
+          <a:effectRef idx="2">
+            <a:schemeClr val="accent1"/>
+          </a:effectRef>
+          <a:fontRef idx="minor">
+            <a:schemeClr val="lt1"/>
+          </a:fontRef>
+        </p:style>
+        <p:txBody>
+          <a:bodyPr rtlCol="0" anchor="ctr"/>
+          <a:lstStyle/>
+          <a:p>
+            <a:pPr algn="ctr"/>
+          </a:p>
+        </p:txBody>
+      </p:sp>
+      <p:sp>
+        <p:nvSpPr>
+          <p:cNvPr id="22" name="Rectangle 21"/>
+          <p:cNvSpPr/>
+          <p:nvPr/>
+        </p:nvSpPr>
+        <p:spPr>
+          <a:xfrm>
+            <a:off x="9573768" y="2249424"/>
+            <a:ext cx="2112264" cy="786384"/>
+          </a:xfrm>
+          <a:prstGeom prst="rect">
+            <a:avLst/>
+          </a:prstGeom>
+          <a:solidFill>
+            <a:srgbClr val="3A106E"/>
+          </a:solidFill>
+          <a:ln>
+            <a:noFill/>
+          </a:ln>
+          <a:effectLst/>
+        </p:spPr>
+        <p:style>
+          <a:lnRef idx="1">
+            <a:schemeClr val="accent1"/>
+          </a:lnRef>
+          <a:fillRef idx="3">
+            <a:schemeClr val="accent1"/>
+          </a:fillRef>
+          <a:effectRef idx="2">
+            <a:schemeClr val="accent1"/>
+          </a:effectRef>
+          <a:fontRef idx="minor">
+            <a:schemeClr val="lt1"/>
+          </a:fontRef>
+        </p:style>
+        <p:txBody>
+          <a:bodyPr rtlCol="0" anchor="ctr"/>
+          <a:lstStyle/>
+          <a:p>
+            <a:pPr algn="ctr"/>
+          </a:p>
+        </p:txBody>
+      </p:sp>
+      <p:sp>
+        <p:nvSpPr>
+          <p:cNvPr id="23" name="TextBox 22"/>
+          <p:cNvSpPr txBox="1"/>
+          <p:nvPr/>
+        </p:nvSpPr>
+        <p:spPr>
+          <a:xfrm>
+            <a:off x="9573768" y="2322576"/>
+            <a:ext cx="2112264" cy="658368"/>
+          </a:xfrm>
+          <a:prstGeom prst="rect">
+            <a:avLst/>
+          </a:prstGeom>
+          <a:noFill/>
+        </p:spPr>
+        <p:txBody>
+          <a:bodyPr wrap="square" lIns="0" rIns="0" tIns="0" bIns="0" anchor="ctr">
+            <a:spAutoFit/>
+          </a:bodyPr>
+          <a:lstStyle/>
+          <a:p>
+            <a:pPr algn="ctr">
+              <a:spcAft>
+                <a:spcPts val="0"/>
+              </a:spcAft>
+            </a:pPr>
+            <a:r>
+              <a:rPr sz="2600" b="1" i="0">
+                <a:solidFill>
+                  <a:srgbClr val="FFFFFF"/>
+                </a:solidFill>
+                <a:latin typeface="Yu Gothic"/>
+                <a:ea typeface="Yu Gothic"/>
+                <a:cs typeface="Yu Gothic"/>
+              </a:rPr>
+              <a:t>金</a:t>
+            </a:r>
+          </a:p>
+        </p:txBody>
+      </p:sp>
+      <p:sp>
+        <p:nvSpPr>
+          <p:cNvPr id="24" name="TextBox 23"/>
+          <p:cNvSpPr txBox="1"/>
+          <p:nvPr/>
+        </p:nvSpPr>
+        <p:spPr>
+          <a:xfrm>
+            <a:off x="9701784" y="3291839"/>
+            <a:ext cx="1856232" cy="1554480"/>
+          </a:xfrm>
+          <a:prstGeom prst="rect">
+            <a:avLst/>
+          </a:prstGeom>
+          <a:noFill/>
+        </p:spPr>
+        <p:txBody>
+          <a:bodyPr wrap="square" lIns="0" rIns="0" tIns="0" bIns="0" anchor="t">
+            <a:spAutoFit/>
+          </a:bodyPr>
+          <a:lstStyle/>
+          <a:p>
+            <a:pPr algn="ctr">
+              <a:spcAft>
+                <a:spcPts val="200"/>
+              </a:spcAft>
+            </a:pPr>
+            <a:r>
+              <a:rPr sz="1150" b="1" i="0">
+                <a:solidFill>
+                  <a:srgbClr val="3A106E"/>
+                </a:solidFill>
+                <a:latin typeface="Yu Gothic"/>
+                <a:ea typeface="Yu Gothic"/>
+                <a:cs typeface="Yu Gothic"/>
+              </a:rPr>
+              <a:t>STO週次</a:t>
+            </a:r>
+          </a:p>
+          <a:p>
+            <a:pPr algn="ctr">
+              <a:spcAft>
+                <a:spcPts val="200"/>
+              </a:spcAft>
+            </a:pPr>
+            <a:r>
+              <a:rPr sz="1150" b="0" i="0">
+                <a:solidFill>
+                  <a:srgbClr val="262630"/>
+                </a:solidFill>
+                <a:latin typeface="Yu Gothic"/>
+                <a:ea typeface="Yu Gothic"/>
+                <a:cs typeface="Yu Gothic"/>
+              </a:rPr>
+              <a:t>レビュー30分</a:t>
+            </a:r>
+          </a:p>
+        </p:txBody>
+      </p:sp>
+      <p:sp>
+        <p:nvSpPr>
+          <p:cNvPr id="25" name="Rectangle 24"/>
+          <p:cNvSpPr/>
+          <p:nvPr/>
+        </p:nvSpPr>
+        <p:spPr>
+          <a:xfrm>
+            <a:off x="502920" y="5394960"/>
+            <a:ext cx="11183112" cy="676656"/>
           </a:xfrm>
           <a:prstGeom prst="rect">
             <a:avLst/>
@@ -13142,20 +16216,20 @@
       </p:sp>
       <p:sp>
         <p:nvSpPr>
-          <p:cNvPr id="7" name="Rectangle 6"/>
+          <p:cNvPr id="26" name="Rectangle 25"/>
           <p:cNvSpPr/>
           <p:nvPr/>
         </p:nvSpPr>
         <p:spPr>
           <a:xfrm>
-            <a:off x="502920" y="5285232"/>
-            <a:ext cx="38100" cy="603504"/>
+            <a:off x="502920" y="5394960"/>
+            <a:ext cx="38100" cy="676656"/>
           </a:xfrm>
           <a:prstGeom prst="rect">
             <a:avLst/>
           </a:prstGeom>
           <a:solidFill>
-            <a:srgbClr val="3A106E"/>
+            <a:srgbClr val="7823DC"/>
           </a:solidFill>
           <a:ln>
             <a:noFill/>
@@ -13186,14 +16260,14 @@
       </p:sp>
       <p:sp>
         <p:nvSpPr>
-          <p:cNvPr id="8" name="TextBox 7"/>
+          <p:cNvPr id="27" name="TextBox 26"/>
           <p:cNvSpPr txBox="1"/>
           <p:nvPr/>
         </p:nvSpPr>
         <p:spPr>
           <a:xfrm>
-            <a:off x="713232" y="5340096"/>
-            <a:ext cx="10835640" cy="493776"/>
+            <a:off x="713232" y="5449824"/>
+            <a:ext cx="10835640" cy="566928"/>
           </a:xfrm>
           <a:prstGeom prst="rect">
             <a:avLst/>
@@ -13214,20 +16288,20 @@
             <a:r>
               <a:rPr sz="1050" b="1" i="0">
                 <a:solidFill>
-                  <a:srgbClr val="262630"/>
+                  <a:srgbClr val="3A106E"/>
                 </a:solidFill>
                 <a:latin typeface="Yu Gothic"/>
                 <a:ea typeface="Yu Gothic"/>
                 <a:cs typeface="Yu Gothic"/>
               </a:rPr>
-              <a:t>部長フィードバックは37件全件に回答済み。うち7点をグランドデザインに反映しています</a:t>
-            </a:r>
-          </a:p>
-        </p:txBody>
-      </p:sp>
-      <p:sp>
-        <p:nvSpPr>
-          <p:cNvPr id="9" name="Rectangle 8"/>
+              <a:t>会長のお時間をいただくのは月次の点検会議60分のみです。日々の運転はSTOが担います</a:t>
+            </a:r>
+          </a:p>
+        </p:txBody>
+      </p:sp>
+      <p:sp>
+        <p:nvSpPr>
+          <p:cNvPr id="28" name="Rectangle 27"/>
           <p:cNvSpPr/>
           <p:nvPr/>
         </p:nvSpPr>
@@ -13271,7 +16345,7 @@
       </p:sp>
       <p:sp>
         <p:nvSpPr>
-          <p:cNvPr id="10" name="TextBox 9"/>
+          <p:cNvPr id="29" name="TextBox 28"/>
           <p:cNvSpPr txBox="1"/>
           <p:nvPr/>
         </p:nvSpPr>
@@ -13312,7 +16386,7 @@
       </p:sp>
       <p:sp>
         <p:nvSpPr>
-          <p:cNvPr id="11" name="TextBox 10"/>
+          <p:cNvPr id="30" name="TextBox 29"/>
           <p:cNvSpPr txBox="1"/>
           <p:nvPr/>
         </p:nvSpPr>

--- a/docs/営業改革_STO立ち上げ_山本会長共有資料.pptx
+++ b/docs/営業改革_STO立ち上げ_山本会長共有資料.pptx
@@ -9594,7 +9594,7 @@
                 <a:ea typeface="Yu Gothic"/>
                 <a:cs typeface="Yu Gothic"/>
               </a:rPr>
-              <a:t>体制（案）</a:t>
+              <a:t>体制</a:t>
             </a:r>
           </a:p>
         </p:txBody>
@@ -9635,7 +9635,7 @@
                 <a:ea typeface="Yu Gothic"/>
                 <a:cs typeface="Yu Gothic"/>
               </a:rPr>
-              <a:t>専任2名＋兼務2名の最小構成</a:t>
+              <a:t>専任2名＋兼務2名の最小構成 — 全枠確定（7/16決定）</a:t>
             </a:r>
           </a:p>
         </p:txBody>
@@ -9693,8 +9693,8 @@
           <p:nvPr/>
         </p:nvGraphicFramePr>
         <p:xfrm>
-          <a:off x="502920" y="1975104"/>
-          <a:ext cx="11183110" cy="2743200"/>
+          <a:off x="502920" y="1810512"/>
+          <a:ext cx="11183110" cy="3072384"/>
         </p:xfrm>
         <a:graphic>
           <a:graphicData uri="http://schemas.openxmlformats.org/drawingml/2006/table">
@@ -9704,11 +9704,11 @@
               </a:tblPr>
               <a:tblGrid>
                 <a:gridCol w="2383286"/>
-                <a:gridCol w="1374972"/>
-                <a:gridCol w="2016626"/>
-                <a:gridCol w="5408226"/>
+                <a:gridCol w="1283307"/>
+                <a:gridCol w="1741632"/>
+                <a:gridCol w="5774885"/>
               </a:tblGrid>
-              <a:tr h="548640">
+              <a:tr h="512064">
                 <a:tc>
                   <a:txBody>
                     <a:bodyPr wrap="square"/>
@@ -9826,7 +9826,7 @@
                   </a:tcPr>
                 </a:tc>
               </a:tr>
-              <a:tr h="548640">
+              <a:tr h="512064">
                 <a:tc>
                   <a:txBody>
                     <a:bodyPr wrap="square"/>
@@ -9838,7 +9838,7 @@
                         </a:spcAft>
                       </a:pPr>
                       <a:r>
-                        <a:rPr sz="1100" b="1" i="0">
+                        <a:rPr sz="950" b="1" i="0">
                           <a:solidFill>
                             <a:srgbClr val="3A106E"/>
                           </a:solidFill>
@@ -9867,7 +9867,7 @@
                         </a:spcAft>
                       </a:pPr>
                       <a:r>
-                        <a:rPr sz="1100" b="0" i="0">
+                        <a:rPr sz="950" b="0" i="0">
                           <a:solidFill>
                             <a:srgbClr val="262630"/>
                           </a:solidFill>
@@ -9896,7 +9896,7 @@
                         </a:spcAft>
                       </a:pPr>
                       <a:r>
-                        <a:rPr sz="1100" b="0" i="0">
+                        <a:rPr sz="950" b="0" i="0">
                           <a:solidFill>
                             <a:srgbClr val="262630"/>
                           </a:solidFill>
@@ -9925,7 +9925,7 @@
                         </a:spcAft>
                       </a:pPr>
                       <a:r>
-                        <a:rPr sz="1100" b="0" i="0">
+                        <a:rPr sz="950" b="0" i="0">
                           <a:solidFill>
                             <a:srgbClr val="262630"/>
                           </a:solidFill>
@@ -9933,7 +9933,7 @@
                           <a:ea typeface="Yu Gothic"/>
                           <a:cs typeface="Yu Gothic"/>
                         </a:rPr>
-                        <a:t>意思決定・トップ外交・詰まりの解消</a:t>
+                        <a:t>優先順位・重要判断・障害の除去・トップ外交</a:t>
                       </a:r>
                     </a:p>
                   </a:txBody>
@@ -9944,7 +9944,7 @@
                   </a:tcPr>
                 </a:tc>
               </a:tr>
-              <a:tr h="548640">
+              <a:tr h="512064">
                 <a:tc>
                   <a:txBody>
                     <a:bodyPr wrap="square"/>
@@ -9956,7 +9956,7 @@
                         </a:spcAft>
                       </a:pPr>
                       <a:r>
-                        <a:rPr sz="1100" b="1" i="0">
+                        <a:rPr sz="950" b="1" i="0">
                           <a:solidFill>
                             <a:srgbClr val="3A106E"/>
                           </a:solidFill>
@@ -9964,7 +9964,7 @@
                           <a:ea typeface="Yu Gothic"/>
                           <a:cs typeface="Yu Gothic"/>
                         </a:rPr>
-                        <a:t>STOリード</a:t>
+                        <a:t>変革設計リード</a:t>
                       </a:r>
                     </a:p>
                   </a:txBody>
@@ -9985,7 +9985,7 @@
                         </a:spcAft>
                       </a:pPr>
                       <a:r>
-                        <a:rPr sz="1100" b="0" i="0">
+                        <a:rPr sz="950" b="0" i="0">
                           <a:solidFill>
                             <a:srgbClr val="262630"/>
                           </a:solidFill>
@@ -9993,7 +9993,7 @@
                           <a:ea typeface="Yu Gothic"/>
                           <a:cs typeface="Yu Gothic"/>
                         </a:rPr>
-                        <a:t>坪井</a:t>
+                        <a:t>小澤</a:t>
                       </a:r>
                     </a:p>
                   </a:txBody>
@@ -10014,7 +10014,7 @@
                         </a:spcAft>
                       </a:pPr>
                       <a:r>
-                        <a:rPr sz="1100" b="0" i="0">
+                        <a:rPr sz="950" b="0" i="0">
                           <a:solidFill>
                             <a:srgbClr val="262630"/>
                           </a:solidFill>
@@ -10043,7 +10043,7 @@
                         </a:spcAft>
                       </a:pPr>
                       <a:r>
-                        <a:rPr sz="1100" b="0" i="0">
+                        <a:rPr sz="950" b="0" i="0">
                           <a:solidFill>
                             <a:srgbClr val="262630"/>
                           </a:solidFill>
@@ -10051,7 +10051,7 @@
                           <a:ea typeface="Yu Gothic"/>
                           <a:cs typeface="Yu Gothic"/>
                         </a:rPr>
-                        <a:t>データ基盤の総責任者</a:t>
+                        <a:t>改革の中身：課題設計・営業プロセス/案件評価/監修・契約の再設計・意思決定書・パイロット・標準化</a:t>
                       </a:r>
                     </a:p>
                   </a:txBody>
@@ -10062,7 +10062,7 @@
                   </a:tcPr>
                 </a:tc>
               </a:tr>
-              <a:tr h="548640">
+              <a:tr h="512064">
                 <a:tc>
                   <a:txBody>
                     <a:bodyPr wrap="square"/>
@@ -10074,7 +10074,7 @@
                         </a:spcAft>
                       </a:pPr>
                       <a:r>
-                        <a:rPr sz="1100" b="1" i="0">
+                        <a:rPr sz="950" b="1" i="0">
                           <a:solidFill>
                             <a:srgbClr val="3A106E"/>
                           </a:solidFill>
@@ -10082,7 +10082,7 @@
                           <a:ea typeface="Yu Gothic"/>
                           <a:cs typeface="Yu Gothic"/>
                         </a:rPr>
-                        <a:t>PMO・会議運営</a:t>
+                        <a:t>実行統制・データリード</a:t>
                       </a:r>
                     </a:p>
                   </a:txBody>
@@ -10103,7 +10103,7 @@
                         </a:spcAft>
                       </a:pPr>
                       <a:r>
-                        <a:rPr sz="1100" b="0" i="0">
+                        <a:rPr sz="950" b="0" i="0">
                           <a:solidFill>
                             <a:srgbClr val="262630"/>
                           </a:solidFill>
@@ -10111,7 +10111,7 @@
                           <a:ea typeface="Yu Gothic"/>
                           <a:cs typeface="Yu Gothic"/>
                         </a:rPr>
-                        <a:t>岡田</a:t>
+                        <a:t>坪井</a:t>
                       </a:r>
                     </a:p>
                   </a:txBody>
@@ -10132,7 +10132,7 @@
                         </a:spcAft>
                       </a:pPr>
                       <a:r>
-                        <a:rPr sz="1100" b="0" i="0">
+                        <a:rPr sz="950" b="0" i="0">
                           <a:solidFill>
                             <a:srgbClr val="262630"/>
                           </a:solidFill>
@@ -10161,7 +10161,7 @@
                         </a:spcAft>
                       </a:pPr>
                       <a:r>
-                        <a:rPr sz="1100" b="0" i="0">
+                        <a:rPr sz="950" b="0" i="0">
                           <a:solidFill>
                             <a:srgbClr val="262630"/>
                           </a:solidFill>
@@ -10169,7 +10169,7 @@
                           <a:ea typeface="Yu Gothic"/>
                           <a:cs typeface="Yu Gothic"/>
                         </a:rPr>
-                        <a:t>会議体の運転・宿題管理</a:t>
+                        <a:t>改革の完遂：統合計画・KPIダッシュボード・データ品質統制・決定/リスク/未決の一元管理・停滞検知とエスカレーション</a:t>
                       </a:r>
                     </a:p>
                   </a:txBody>
@@ -10180,7 +10180,7 @@
                   </a:tcPr>
                 </a:tc>
               </a:tr>
-              <a:tr h="548640">
+              <a:tr h="512064">
                 <a:tc>
                   <a:txBody>
                     <a:bodyPr wrap="square"/>
@@ -10192,7 +10192,7 @@
                         </a:spcAft>
                       </a:pPr>
                       <a:r>
-                        <a:rPr sz="1100" b="1" i="0">
+                        <a:rPr sz="950" b="1" i="0">
                           <a:solidFill>
                             <a:srgbClr val="3A106E"/>
                           </a:solidFill>
@@ -10200,7 +10200,7 @@
                           <a:ea typeface="Yu Gothic"/>
                           <a:cs typeface="Yu Gothic"/>
                         </a:rPr>
-                        <a:t>財務リエゾン</a:t>
+                        <a:t>戦略サポート</a:t>
                       </a:r>
                     </a:p>
                   </a:txBody>
@@ -10221,7 +10221,7 @@
                         </a:spcAft>
                       </a:pPr>
                       <a:r>
-                        <a:rPr sz="1100" b="0" i="0">
+                        <a:rPr sz="950" b="0" i="0">
                           <a:solidFill>
                             <a:srgbClr val="262630"/>
                           </a:solidFill>
@@ -10229,7 +10229,7 @@
                           <a:ea typeface="Yu Gothic"/>
                           <a:cs typeface="Yu Gothic"/>
                         </a:rPr>
-                        <a:t>柳沼</a:t>
+                        <a:t>大塩</a:t>
                       </a:r>
                     </a:p>
                   </a:txBody>
@@ -10250,7 +10250,7 @@
                         </a:spcAft>
                       </a:pPr>
                       <a:r>
-                        <a:rPr sz="1100" b="0" i="0">
+                        <a:rPr sz="950" b="0" i="0">
                           <a:solidFill>
                             <a:srgbClr val="262630"/>
                           </a:solidFill>
@@ -10258,7 +10258,7 @@
                           <a:ea typeface="Yu Gothic"/>
                           <a:cs typeface="Yu Gothic"/>
                         </a:rPr>
-                        <a:t>兼務・週2〜3h</a:t>
+                        <a:t>兼務</a:t>
                       </a:r>
                     </a:p>
                   </a:txBody>
@@ -10279,7 +10279,7 @@
                         </a:spcAft>
                       </a:pPr>
                       <a:r>
-                        <a:rPr sz="1100" b="0" i="0">
+                        <a:rPr sz="950" b="0" i="0">
                           <a:solidFill>
                             <a:srgbClr val="262630"/>
                           </a:solidFill>
@@ -10287,7 +10287,7 @@
                           <a:ea typeface="Yu Gothic"/>
                           <a:cs typeface="Yu Gothic"/>
                         </a:rPr>
-                        <a:t>財務データ供給・粗利算定検証</a:t>
+                        <a:t>読み管理原案・経営向け論点整理・HD経企との接続</a:t>
                       </a:r>
                     </a:p>
                   </a:txBody>
@@ -10298,6 +10298,124 @@
                   </a:tcPr>
                 </a:tc>
               </a:tr>
+              <a:tr h="512064">
+                <a:tc>
+                  <a:txBody>
+                    <a:bodyPr wrap="square"/>
+                    <a:lstStyle/>
+                    <a:p>
+                      <a:pPr algn="l">
+                        <a:spcAft>
+                          <a:spcPts val="100"/>
+                        </a:spcAft>
+                      </a:pPr>
+                      <a:r>
+                        <a:rPr sz="950" b="1" i="0">
+                          <a:solidFill>
+                            <a:srgbClr val="3A106E"/>
+                          </a:solidFill>
+                          <a:latin typeface="Yu Gothic"/>
+                          <a:ea typeface="Yu Gothic"/>
+                          <a:cs typeface="Yu Gothic"/>
+                        </a:rPr>
+                        <a:t>財務リエゾン</a:t>
+                      </a:r>
+                    </a:p>
+                  </a:txBody>
+                  <a:tcPr marL="54864" marR="54864" marT="18288" marB="18288" anchor="ctr">
+                    <a:solidFill>
+                      <a:srgbClr val="FFFFFF"/>
+                    </a:solidFill>
+                  </a:tcPr>
+                </a:tc>
+                <a:tc>
+                  <a:txBody>
+                    <a:bodyPr wrap="square"/>
+                    <a:lstStyle/>
+                    <a:p>
+                      <a:pPr algn="l">
+                        <a:spcAft>
+                          <a:spcPts val="100"/>
+                        </a:spcAft>
+                      </a:pPr>
+                      <a:r>
+                        <a:rPr sz="950" b="0" i="0">
+                          <a:solidFill>
+                            <a:srgbClr val="262630"/>
+                          </a:solidFill>
+                          <a:latin typeface="Yu Gothic"/>
+                          <a:ea typeface="Yu Gothic"/>
+                          <a:cs typeface="Yu Gothic"/>
+                        </a:rPr>
+                        <a:t>柳沼</a:t>
+                      </a:r>
+                    </a:p>
+                  </a:txBody>
+                  <a:tcPr marL="54864" marR="54864" marT="18288" marB="18288" anchor="ctr">
+                    <a:solidFill>
+                      <a:srgbClr val="FFFFFF"/>
+                    </a:solidFill>
+                  </a:tcPr>
+                </a:tc>
+                <a:tc>
+                  <a:txBody>
+                    <a:bodyPr wrap="square"/>
+                    <a:lstStyle/>
+                    <a:p>
+                      <a:pPr algn="l">
+                        <a:spcAft>
+                          <a:spcPts val="100"/>
+                        </a:spcAft>
+                      </a:pPr>
+                      <a:r>
+                        <a:rPr sz="950" b="0" i="0">
+                          <a:solidFill>
+                            <a:srgbClr val="262630"/>
+                          </a:solidFill>
+                          <a:latin typeface="Yu Gothic"/>
+                          <a:ea typeface="Yu Gothic"/>
+                          <a:cs typeface="Yu Gothic"/>
+                        </a:rPr>
+                        <a:t>兼務・週2〜3h</a:t>
+                      </a:r>
+                    </a:p>
+                  </a:txBody>
+                  <a:tcPr marL="54864" marR="54864" marT="18288" marB="18288" anchor="ctr">
+                    <a:solidFill>
+                      <a:srgbClr val="FFFFFF"/>
+                    </a:solidFill>
+                  </a:tcPr>
+                </a:tc>
+                <a:tc>
+                  <a:txBody>
+                    <a:bodyPr wrap="square"/>
+                    <a:lstStyle/>
+                    <a:p>
+                      <a:pPr algn="l">
+                        <a:spcAft>
+                          <a:spcPts val="100"/>
+                        </a:spcAft>
+                      </a:pPr>
+                      <a:r>
+                        <a:rPr sz="950" b="0" i="0">
+                          <a:solidFill>
+                            <a:srgbClr val="262630"/>
+                          </a:solidFill>
+                          <a:latin typeface="Yu Gothic"/>
+                          <a:ea typeface="Yu Gothic"/>
+                          <a:cs typeface="Yu Gothic"/>
+                        </a:rPr>
+                        <a:t>財務データ定期供給・粗利算定検証</a:t>
+                      </a:r>
+                    </a:p>
+                  </a:txBody>
+                  <a:tcPr marL="54864" marR="54864" marT="18288" marB="18288" anchor="ctr">
+                    <a:solidFill>
+                      <a:srgbClr val="FFFFFF"/>
+                    </a:solidFill>
+                  </a:tcPr>
+                </a:tc>
+              </a:tr>
             </a:tbl>
           </a:graphicData>
         </a:graphic>
@@ -10310,7 +10428,7 @@
         </p:nvSpPr>
         <p:spPr>
           <a:xfrm>
-            <a:off x="502920" y="4937760"/>
+            <a:off x="502920" y="5285232"/>
             <a:ext cx="5504688" cy="713232"/>
           </a:xfrm>
           <a:prstGeom prst="rect">
@@ -10356,7 +10474,7 @@
         </p:nvSpPr>
         <p:spPr>
           <a:xfrm>
-            <a:off x="502920" y="4937760"/>
+            <a:off x="502920" y="5285232"/>
             <a:ext cx="38100" cy="713232"/>
           </a:xfrm>
           <a:prstGeom prst="rect">
@@ -10400,7 +10518,7 @@
         </p:nvSpPr>
         <p:spPr>
           <a:xfrm>
-            <a:off x="685800" y="5010912"/>
+            <a:off x="685800" y="5358384"/>
             <a:ext cx="5212080" cy="585216"/>
           </a:xfrm>
           <a:prstGeom prst="rect">
@@ -10441,7 +10559,7 @@
         </p:nvSpPr>
         <p:spPr>
           <a:xfrm>
-            <a:off x="6181344" y="4937760"/>
+            <a:off x="6181344" y="5285232"/>
             <a:ext cx="5504688" cy="713232"/>
           </a:xfrm>
           <a:prstGeom prst="rect">
@@ -10487,7 +10605,7 @@
         </p:nvSpPr>
         <p:spPr>
           <a:xfrm>
-            <a:off x="6181344" y="4937760"/>
+            <a:off x="6181344" y="5285232"/>
             <a:ext cx="38100" cy="713232"/>
           </a:xfrm>
           <a:prstGeom prst="rect">
@@ -10531,7 +10649,7 @@
         </p:nvSpPr>
         <p:spPr>
           <a:xfrm>
-            <a:off x="6364224" y="5010912"/>
+            <a:off x="6364224" y="5358384"/>
             <a:ext cx="5212080" cy="585216"/>
           </a:xfrm>
           <a:prstGeom prst="rect">

--- a/docs/営業改革_STO立ち上げ_山本会長共有資料.pptx
+++ b/docs/営業改革_STO立ち上げ_山本会長共有資料.pptx
@@ -9993,7 +9993,7 @@
                           <a:ea typeface="Yu Gothic"/>
                           <a:cs typeface="Yu Gothic"/>
                         </a:rPr>
-                        <a:t>小澤</a:t>
+                        <a:t>小沢</a:t>
                       </a:r>
                     </a:p>
                   </a:txBody>

--- a/docs/営業改革_STO立ち上げ_山本会長共有資料.pptx
+++ b/docs/営業改革_STO立ち上げ_山本会長共有資料.pptx
@@ -6152,7 +6152,7 @@
                 <a:ea typeface="Yu Gothic"/>
                 <a:cs typeface="Yu Gothic"/>
               </a:rPr>
-              <a:t>専任化の部門長合意・発足通知</a:t>
+              <a:t>専任・兼務の枠の部門長合意・発足通知</a:t>
             </a:r>
           </a:p>
         </p:txBody>
@@ -6864,7 +6864,7 @@
                 <a:ea typeface="Yu Gothic"/>
                 <a:cs typeface="Yu Gothic"/>
               </a:rPr>
-              <a:t>② 専任体制の維持</a:t>
+              <a:t>② 専任・兼務体制の維持</a:t>
             </a:r>
           </a:p>
           <a:p>
@@ -6882,7 +6882,7 @@
                 <a:ea typeface="Yu Gothic"/>
                 <a:cs typeface="Yu Gothic"/>
               </a:rPr>
-              <a:t>途中で部門都合により専任が崩れそうな場合の後押し</a:t>
+              <a:t>途中で部門都合により専任・兼務の枠が崩れそうな場合の後押し</a:t>
             </a:r>
           </a:p>
         </p:txBody>
@@ -9635,7 +9635,7 @@
                 <a:ea typeface="Yu Gothic"/>
                 <a:cs typeface="Yu Gothic"/>
               </a:rPr>
-              <a:t>専任2名＋兼務2名の最小構成 — 全枠確定（7/16決定）</a:t>
+              <a:t>専任1名＋兼務3名の最小構成 — 全枠確定（7/16決定）</a:t>
             </a:r>
           </a:p>
         </p:txBody>
@@ -10140,7 +10140,7 @@
                           <a:ea typeface="Yu Gothic"/>
                           <a:cs typeface="Yu Gothic"/>
                         </a:rPr>
-                        <a:t>専任</a:t>
+                        <a:t>兼務</a:t>
                       </a:r>
                     </a:p>
                   </a:txBody>
@@ -11137,7 +11137,7 @@
                 <a:ea typeface="Yu Gothic"/>
                 <a:cs typeface="Yu Gothic"/>
               </a:rPr>
-              <a:t>着任前に整理してから専任化</a:t>
+              <a:t>着任前に、専任・兼務それぞれの枠を確保</a:t>
             </a:r>
           </a:p>
           <a:p>
@@ -11155,7 +11155,7 @@
                 <a:ea typeface="Yu Gothic"/>
                 <a:cs typeface="Yu Gothic"/>
               </a:rPr>
-              <a:t>現任業務・サポート中案件の一覧を部門長と確認し、引き継ぐか停止するかを決めてから専任化する（兼務での二重負荷は認めない）</a:t>
+              <a:t>専任・兼務それぞれの枠を、着任前に部門長と合意して確保する。小沢さんは現任業務を引き継ぐか停止してから専任化。坪井さんはSTO稼働枠を明示的に切り出す（暗黙の上乗せ・二重負荷は認めない）</a:t>
             </a:r>
           </a:p>
         </p:txBody>
@@ -11345,7 +11345,7 @@
                 <a:ea typeface="Yu Gothic"/>
                 <a:cs typeface="Yu Gothic"/>
               </a:rPr>
-              <a:t>専任期間の評価は新谷が責任</a:t>
+              <a:t>稼働期間の評価は新谷が責任</a:t>
             </a:r>
           </a:p>
           <a:p>
@@ -11363,7 +11363,7 @@
                 <a:ea typeface="Yu Gothic"/>
                 <a:cs typeface="Yu Gothic"/>
               </a:rPr>
-              <a:t>専任期間中の評価は改革貢献で新谷が責任を持つ</a:t>
+              <a:t>専任・兼務いずれの枠でも、STOでの稼働期間中の評価は改革貢献で新谷が責任を持つ</a:t>
             </a:r>
           </a:p>
         </p:txBody>
